--- a/slides/presentazione_design_origin_v2.pptx
+++ b/slides/presentazione_design_origin_v2.pptx
@@ -201,41 +201,39 @@
             <c:showLeaderLines val="0"/>
           </c:dLbls>
           <c:cat>
-            <c:multiLvlStrRef>
+            <c:strRef>
               <c:f>Sheet1!$A$2:$A$8</c:f>
-              <c:multiLvlStrCache>
+              <c:strCache>
                 <c:ptCount val="7"/>
-                <c:lvl>
-                  <c:pt idx="0">
-                    <c:v>Brute force (1.829)</c:v>
-                  </c:pt>
-                  <c:pt idx="1">
-                    <c:v>PortScan (391)</c:v>
-                  </c:pt>
-                  <c:pt idx="2">
-                    <c:v>Web attack (428)</c:v>
-                  </c:pt>
-                  <c:pt idx="3">
-                    <c:v>Bot (287)</c:v>
-                  </c:pt>
-                  <c:pt idx="4">
-                    <c:v>Infiltration (7)</c:v>
-                  </c:pt>
-                  <c:pt idx="5">
-                    <c:v>Heartbleed (1)</c:v>
-                  </c:pt>
-                  <c:pt idx="6">
-                    <c:v>DoS (64.317)</c:v>
-                  </c:pt>
-                </c:lvl>
-              </c:multiLvlStrCache>
-            </c:multiLvlStrRef>
+                <c:pt idx="0">
+                  <c:v>Brute force (1.829)</c:v>
+                </c:pt>
+                <c:pt idx="1">
+                  <c:v>PortScan (391)</c:v>
+                </c:pt>
+                <c:pt idx="2">
+                  <c:v>Web attack (428)</c:v>
+                </c:pt>
+                <c:pt idx="3">
+                  <c:v>Bot (287)</c:v>
+                </c:pt>
+                <c:pt idx="4">
+                  <c:v>Infiltration (7)*</c:v>
+                </c:pt>
+                <c:pt idx="5">
+                  <c:v>Heartbleed (1)*</c:v>
+                </c:pt>
+                <c:pt idx="6">
+                  <c:v>DoS (64.317)</c:v>
+                </c:pt>
+              </c:strCache>
+            </c:strRef>
           </c:cat>
           <c:val>
             <c:numRef>
               <c:f>Sheet1!$B$2:$B$8</c:f>
               <c:numCache>
-                <c:formatCode>General</c:formatCode>
+                <c:formatCode>0.0%</c:formatCode>
                 <c:ptCount val="7"/>
                 <c:pt idx="0">
                   <c:v>0.003</c:v>
@@ -247,13 +245,13 @@
                   <c:v>0.617</c:v>
                 </c:pt>
                 <c:pt idx="3">
-                  <c:v>0</c:v>
+                  <c:v>0.0</c:v>
                 </c:pt>
                 <c:pt idx="4">
-                  <c:v>0</c:v>
+                  <c:v>0.0</c:v>
                 </c:pt>
                 <c:pt idx="5">
-                  <c:v>0</c:v>
+                  <c:v>0.0</c:v>
                 </c:pt>
                 <c:pt idx="6">
                   <c:v>0.181</c:v>
@@ -308,41 +306,39 @@
             <c:showLeaderLines val="0"/>
           </c:dLbls>
           <c:cat>
-            <c:multiLvlStrRef>
+            <c:strRef>
               <c:f>Sheet1!$A$2:$A$8</c:f>
-              <c:multiLvlStrCache>
+              <c:strCache>
                 <c:ptCount val="7"/>
-                <c:lvl>
-                  <c:pt idx="0">
-                    <c:v>Brute force (1.829)</c:v>
-                  </c:pt>
-                  <c:pt idx="1">
-                    <c:v>PortScan (391)</c:v>
-                  </c:pt>
-                  <c:pt idx="2">
-                    <c:v>Web attack (428)</c:v>
-                  </c:pt>
-                  <c:pt idx="3">
-                    <c:v>Bot (287)</c:v>
-                  </c:pt>
-                  <c:pt idx="4">
-                    <c:v>Infiltration (7)</c:v>
-                  </c:pt>
-                  <c:pt idx="5">
-                    <c:v>Heartbleed (1)</c:v>
-                  </c:pt>
-                  <c:pt idx="6">
-                    <c:v>DoS (64.317)</c:v>
-                  </c:pt>
-                </c:lvl>
-              </c:multiLvlStrCache>
-            </c:multiLvlStrRef>
+                <c:pt idx="0">
+                  <c:v>Brute force (1.829)</c:v>
+                </c:pt>
+                <c:pt idx="1">
+                  <c:v>PortScan (391)</c:v>
+                </c:pt>
+                <c:pt idx="2">
+                  <c:v>Web attack (428)</c:v>
+                </c:pt>
+                <c:pt idx="3">
+                  <c:v>Bot (287)</c:v>
+                </c:pt>
+                <c:pt idx="4">
+                  <c:v>Infiltration (7)*</c:v>
+                </c:pt>
+                <c:pt idx="5">
+                  <c:v>Heartbleed (1)*</c:v>
+                </c:pt>
+                <c:pt idx="6">
+                  <c:v>DoS (64.317)</c:v>
+                </c:pt>
+              </c:strCache>
+            </c:strRef>
           </c:cat>
           <c:val>
             <c:numRef>
               <c:f>Sheet1!$C$2:$C$8</c:f>
               <c:numCache>
-                <c:formatCode>General</c:formatCode>
+                <c:formatCode>0.0%</c:formatCode>
                 <c:ptCount val="7"/>
                 <c:pt idx="0">
                   <c:v>0.004</c:v>
@@ -360,7 +356,7 @@
                   <c:v>0.429</c:v>
                 </c:pt>
                 <c:pt idx="5">
-                  <c:v>1</c:v>
+                  <c:v>1.0</c:v>
                 </c:pt>
                 <c:pt idx="6">
                   <c:v>0.747</c:v>
@@ -1937,7 +1933,7 @@
     </p:bg>
     <p:spTree>
       <p:nvGrpSpPr>
-        <p:cNvPr id="1" name=""/>
+        <p:cNvPr id="2" name=""/>
         <p:cNvGrpSpPr/>
         <p:nvPr/>
       </p:nvGrpSpPr>
@@ -1951,7 +1947,7 @@
       </p:grpSpPr>
       <p:sp>
         <p:nvSpPr>
-          <p:cNvPr id="2" name="Text 0"/>
+          <p:cNvPr id="3" name="Text 0"/>
           <p:cNvSpPr txBox="1"/>
           <p:nvPr/>
         </p:nvSpPr>
@@ -1990,7 +1986,7 @@
       </p:sp>
       <p:sp>
         <p:nvSpPr>
-          <p:cNvPr id="3" name="Shape 1"/>
+          <p:cNvPr id="4" name="Shape 1"/>
           <p:cNvSpPr/>
           <p:nvPr/>
         </p:nvSpPr>
@@ -2017,7 +2013,7 @@
       </p:sp>
       <p:pic>
         <p:nvPicPr>
-          <p:cNvPr id="4" name="Image 0" descr="Logo Unimore">    </p:cNvPr>
+          <p:cNvPr id="5" name="Image 0" descr="Logo Unimore">    </p:cNvPr>
           <p:cNvPicPr>
             <a:picLocks noChangeAspect="1"/>
           </p:cNvPicPr>
@@ -2041,7 +2037,7 @@
       </p:pic>
       <p:sp>
         <p:nvSpPr>
-          <p:cNvPr id="5" name="Text 2"/>
+          <p:cNvPr id="6" name="Text 2"/>
           <p:cNvSpPr/>
           <p:nvPr/>
         </p:nvSpPr>
@@ -2092,7 +2088,7 @@
       </p:sp>
       <p:sp>
         <p:nvSpPr>
-          <p:cNvPr id="6" name="Text 3"/>
+          <p:cNvPr id="7" name="Text 3"/>
           <p:cNvSpPr txBox="1"/>
           <p:nvPr/>
         </p:nvSpPr>
@@ -2723,7 +2719,7 @@
     </p:bg>
     <p:spTree>
       <p:nvGrpSpPr>
-        <p:cNvPr id="1" name=""/>
+        <p:cNvPr id="2" name=""/>
         <p:cNvGrpSpPr/>
         <p:nvPr/>
       </p:nvGrpSpPr>
@@ -2737,7 +2733,7 @@
       </p:grpSpPr>
       <p:sp>
         <p:nvSpPr>
-          <p:cNvPr id="2" name="Text 0"/>
+          <p:cNvPr id="3" name="Text 0"/>
           <p:cNvSpPr txBox="1"/>
           <p:nvPr/>
         </p:nvSpPr>
@@ -2776,7 +2772,7 @@
       </p:sp>
       <p:sp>
         <p:nvSpPr>
-          <p:cNvPr id="3" name="Shape 1"/>
+          <p:cNvPr id="4" name="Shape 1"/>
           <p:cNvSpPr/>
           <p:nvPr/>
         </p:nvSpPr>
@@ -2803,7 +2799,7 @@
       </p:sp>
       <p:pic>
         <p:nvPicPr>
-          <p:cNvPr id="4" name="Image 0" descr="Logo Unimore">    </p:cNvPr>
+          <p:cNvPr id="5" name="Image 0" descr="Logo Unimore">    </p:cNvPr>
           <p:cNvPicPr>
             <a:picLocks noChangeAspect="1"/>
           </p:cNvPicPr>
@@ -2827,7 +2823,7 @@
       </p:pic>
       <p:sp>
         <p:nvSpPr>
-          <p:cNvPr id="5" name="Text 2"/>
+          <p:cNvPr id="6" name="Text 2"/>
           <p:cNvSpPr/>
           <p:nvPr/>
         </p:nvSpPr>
@@ -2878,7 +2874,7 @@
       </p:sp>
       <p:sp>
         <p:nvSpPr>
-          <p:cNvPr id="6" name="Text 3"/>
+          <p:cNvPr id="7" name="Text 3"/>
           <p:cNvSpPr txBox="1"/>
           <p:nvPr/>
         </p:nvSpPr>
@@ -2931,7 +2927,7 @@
       </p:sp>
       <p:sp>
         <p:nvSpPr>
-          <p:cNvPr id="7" name="Shape 4"/>
+          <p:cNvPr id="8" name="Shape 4"/>
           <p:cNvSpPr/>
           <p:nvPr/>
         </p:nvSpPr>
@@ -2965,7 +2961,7 @@
       </p:sp>
       <p:sp>
         <p:nvSpPr>
-          <p:cNvPr id="8" name="Shape 5"/>
+          <p:cNvPr id="9" name="Shape 5"/>
           <p:cNvSpPr/>
           <p:nvPr/>
         </p:nvSpPr>
@@ -2992,7 +2988,7 @@
       </p:sp>
       <p:sp>
         <p:nvSpPr>
-          <p:cNvPr id="9" name="Text 6"/>
+          <p:cNvPr id="10" name="Text 6"/>
           <p:cNvSpPr txBox="1"/>
           <p:nvPr/>
         </p:nvSpPr>
@@ -3811,7 +3807,7 @@
                 <a:ea typeface="Segoe UI Semibold" pitchFamily="34" charset="-122"/>
                 <a:cs typeface="Segoe UI Semibold" pitchFamily="34" charset="-120"/>
               </a:rPr>
-              <a:t>77 FEATURE PER FLUSSO · LE FAMIGLIE PRINCIPALI</a:t>
+              <a:t>FLUSSI PER FAMIGLIA · SCALA LOGARITMICA</a:t>
             </a:r>
             <a:endParaRPr lang="en-US" sz="1050" dirty="0"/>
           </a:p>
@@ -3819,41 +3815,14 @@
       </p:sp>
       <p:sp>
         <p:nvSpPr>
-          <p:cNvPr id="35" name="Shape 31"/>
-          <p:cNvSpPr/>
-          <p:nvPr/>
-        </p:nvSpPr>
-        <p:spPr>
-          <a:xfrm>
-            <a:off x="1234440" y="3566160"/>
-            <a:ext cx="2293544" cy="868680"/>
-          </a:xfrm>
-          <a:prstGeom prst="roundRect">
-            <a:avLst>
-              <a:gd name="adj" fmla="val 14737"/>
-            </a:avLst>
-          </a:prstGeom>
-          <a:solidFill>
-            <a:srgbClr val="FFFFFF"/>
-          </a:solidFill>
-          <a:ln w="9525">
-            <a:solidFill>
-              <a:srgbClr val="D6E3EC"/>
-            </a:solidFill>
-            <a:prstDash val="solid"/>
-          </a:ln>
-        </p:spPr>
-      </p:sp>
-      <p:sp>
-        <p:nvSpPr>
-          <p:cNvPr id="36" name="Text 32"/>
+          <p:cNvPr id="35" name="Text 39"/>
           <p:cNvSpPr txBox="1"/>
           <p:nvPr/>
         </p:nvSpPr>
         <p:spPr>
           <a:xfrm>
-            <a:off x="1417320" y="3566160"/>
-            <a:ext cx="1927784" cy="868680"/>
+            <a:off x="1234440" y="5029200"/>
+            <a:ext cx="3058058" cy="237744"/>
           </a:xfrm>
           <a:prstGeom prst="rect">
             <a:avLst/>
@@ -3862,31 +3831,92 @@
           <a:ln/>
         </p:spPr>
         <p:txBody>
-          <a:bodyPr wrap="square" lIns="0" tIns="0" rIns="0" bIns="0" rtlCol="0" anchor="ctr"/>
+          <a:bodyPr wrap="square" lIns="0" tIns="0" rIns="0" bIns="0" rtlCol="0" anchor="t"/>
           <a:lstStyle/>
           <a:p>
             <a:pPr indent="0" marL="0">
               <a:buNone/>
             </a:pPr>
             <a:r>
-              <a:rPr lang="en-US" sz="1600" dirty="0">
-                <a:solidFill>
-                  <a:srgbClr val="0B2438"/>
+              <a:rPr lang="en-US" sz="1050" spc="150" kern="0" dirty="0">
+                <a:solidFill>
+                  <a:srgbClr val="4A6478"/>
+                </a:solidFill>
+                <a:latin typeface="Segoe UI Semibold" pitchFamily="34" charset="0"/>
+                <a:ea typeface="Segoe UI Semibold" pitchFamily="34" charset="-122"/>
+                <a:cs typeface="Segoe UI Semibold" pitchFamily="34" charset="-120"/>
+              </a:rPr>
+              <a:t>DATASET</a:t>
+            </a:r>
+            <a:endParaRPr lang="en-US" sz="1050" dirty="0"/>
+          </a:p>
+        </p:txBody>
+      </p:sp>
+      <p:sp>
+        <p:nvSpPr>
+          <p:cNvPr id="36" name="Text 40"/>
+          <p:cNvSpPr txBox="1"/>
+          <p:nvPr/>
+        </p:nvSpPr>
+        <p:spPr>
+          <a:xfrm>
+            <a:off x="1234440" y="5257800"/>
+            <a:ext cx="3058058" cy="640080"/>
+          </a:xfrm>
+          <a:prstGeom prst="rect">
+            <a:avLst/>
+          </a:prstGeom>
+          <a:noFill/>
+          <a:ln/>
+        </p:spPr>
+        <p:txBody>
+          <a:bodyPr wrap="square" lIns="0" tIns="0" rIns="0" bIns="0" rtlCol="0" anchor="t"/>
+          <a:lstStyle/>
+          <a:p>
+            <a:pPr indent="0" marL="0">
+              <a:buNone/>
+            </a:pPr>
+            <a:r>
+              <a:rPr lang="en-US" sz="3400" dirty="0">
+                <a:solidFill>
+                  <a:srgbClr val="045991"/>
                 </a:solidFill>
                 <a:latin typeface="Georgia" pitchFamily="34" charset="0"/>
                 <a:ea typeface="Georgia" pitchFamily="34" charset="-122"/>
                 <a:cs typeface="Georgia" pitchFamily="34" charset="-120"/>
               </a:rPr>
-              <a:t>Tempi</a:t>
-            </a:r>
-            <a:endParaRPr lang="en-US" sz="1400" dirty="0"/>
-          </a:p>
+              <a:t>2,3 milioni</a:t>
+            </a:r>
+            <a:endParaRPr lang="en-US" sz="3400" dirty="0"/>
+          </a:p>
+        </p:txBody>
+      </p:sp>
+      <p:sp>
+        <p:nvSpPr>
+          <p:cNvPr id="37" name="Text 41"/>
+          <p:cNvSpPr txBox="1"/>
+          <p:nvPr/>
+        </p:nvSpPr>
+        <p:spPr>
+          <a:xfrm>
+            <a:off x="1234440" y="5943600"/>
+            <a:ext cx="3058058" cy="274320"/>
+          </a:xfrm>
+          <a:prstGeom prst="rect">
+            <a:avLst/>
+          </a:prstGeom>
+          <a:noFill/>
+          <a:ln/>
+        </p:spPr>
+        <p:txBody>
+          <a:bodyPr wrap="square" lIns="0" tIns="0" rIns="0" bIns="0" rtlCol="0" anchor="t"/>
+          <a:lstStyle/>
           <a:p>
             <a:pPr indent="0" marL="0">
               <a:buNone/>
             </a:pPr>
             <a:r>
-              <a:rPr lang="en-US" sz="1100" dirty="0">
+              <a:rPr lang="en-US" sz="1200" dirty="0">
                 <a:solidFill>
                   <a:srgbClr val="4A6478"/>
                 </a:solidFill>
@@ -3894,49 +3924,22 @@
                 <a:ea typeface="Segoe UI" pitchFamily="34" charset="-122"/>
                 <a:cs typeface="Segoe UI" pitchFamily="34" charset="-120"/>
               </a:rPr>
-              <a:t>durata, intervalli tra pacchetti, pause</a:t>
-            </a:r>
-            <a:endParaRPr lang="en-US" sz="1400" dirty="0"/>
-          </a:p>
-        </p:txBody>
-      </p:sp>
-      <p:sp>
-        <p:nvSpPr>
-          <p:cNvPr id="37" name="Shape 33"/>
-          <p:cNvSpPr/>
-          <p:nvPr/>
-        </p:nvSpPr>
-        <p:spPr>
-          <a:xfrm>
-            <a:off x="3710864" y="3566160"/>
-            <a:ext cx="2293544" cy="868680"/>
-          </a:xfrm>
-          <a:prstGeom prst="roundRect">
-            <a:avLst>
-              <a:gd name="adj" fmla="val 14737"/>
-            </a:avLst>
-          </a:prstGeom>
-          <a:solidFill>
-            <a:srgbClr val="FFFFFF"/>
-          </a:solidFill>
-          <a:ln w="9525">
-            <a:solidFill>
-              <a:srgbClr val="D6E3EC"/>
-            </a:solidFill>
-            <a:prstDash val="solid"/>
-          </a:ln>
-        </p:spPr>
-      </p:sp>
-      <p:sp>
-        <p:nvSpPr>
-          <p:cNvPr id="38" name="Text 34"/>
+              <a:t>flussi, rete di laboratorio</a:t>
+            </a:r>
+            <a:endParaRPr lang="en-US" sz="1200" dirty="0"/>
+          </a:p>
+        </p:txBody>
+      </p:sp>
+      <p:sp>
+        <p:nvSpPr>
+          <p:cNvPr id="38" name="Text 42"/>
           <p:cNvSpPr txBox="1"/>
           <p:nvPr/>
         </p:nvSpPr>
         <p:spPr>
           <a:xfrm>
-            <a:off x="3893744" y="3566160"/>
-            <a:ext cx="1927784" cy="868680"/>
+            <a:off x="4566818" y="5029200"/>
+            <a:ext cx="3058058" cy="237744"/>
           </a:xfrm>
           <a:prstGeom prst="rect">
             <a:avLst/>
@@ -3945,31 +3948,92 @@
           <a:ln/>
         </p:spPr>
         <p:txBody>
-          <a:bodyPr wrap="square" lIns="0" tIns="0" rIns="0" bIns="0" rtlCol="0" anchor="ctr"/>
+          <a:bodyPr wrap="square" lIns="0" tIns="0" rIns="0" bIns="0" rtlCol="0" anchor="t"/>
           <a:lstStyle/>
           <a:p>
             <a:pPr indent="0" marL="0">
               <a:buNone/>
             </a:pPr>
             <a:r>
-              <a:rPr lang="en-US" sz="1600" dirty="0">
-                <a:solidFill>
-                  <a:srgbClr val="0B2438"/>
+              <a:rPr lang="en-US" sz="1050" spc="150" kern="0" dirty="0">
+                <a:solidFill>
+                  <a:srgbClr val="4A6478"/>
+                </a:solidFill>
+                <a:latin typeface="Segoe UI Semibold" pitchFamily="34" charset="0"/>
+                <a:ea typeface="Segoe UI Semibold" pitchFamily="34" charset="-122"/>
+                <a:cs typeface="Segoe UI Semibold" pitchFamily="34" charset="-120"/>
+              </a:rPr>
+              <a:t>PULIZIA</a:t>
+            </a:r>
+            <a:endParaRPr lang="en-US" sz="1050" dirty="0"/>
+          </a:p>
+        </p:txBody>
+      </p:sp>
+      <p:sp>
+        <p:nvSpPr>
+          <p:cNvPr id="39" name="Text 43"/>
+          <p:cNvSpPr txBox="1"/>
+          <p:nvPr/>
+        </p:nvSpPr>
+        <p:spPr>
+          <a:xfrm>
+            <a:off x="4566818" y="5257800"/>
+            <a:ext cx="3058058" cy="640080"/>
+          </a:xfrm>
+          <a:prstGeom prst="rect">
+            <a:avLst/>
+          </a:prstGeom>
+          <a:noFill/>
+          <a:ln/>
+        </p:spPr>
+        <p:txBody>
+          <a:bodyPr wrap="square" lIns="0" tIns="0" rIns="0" bIns="0" rtlCol="0" anchor="t"/>
+          <a:lstStyle/>
+          <a:p>
+            <a:pPr indent="0" marL="0">
+              <a:buNone/>
+            </a:pPr>
+            <a:r>
+              <a:rPr lang="en-US" sz="3400" dirty="0">
+                <a:solidFill>
+                  <a:srgbClr val="045991"/>
                 </a:solidFill>
                 <a:latin typeface="Georgia" pitchFamily="34" charset="0"/>
                 <a:ea typeface="Georgia" pitchFamily="34" charset="-122"/>
                 <a:cs typeface="Georgia" pitchFamily="34" charset="-120"/>
               </a:rPr>
-              <a:t>Volumi e dimensioni</a:t>
-            </a:r>
-            <a:endParaRPr lang="en-US" sz="1400" dirty="0"/>
-          </a:p>
+              <a:t>2.143 + 2.843</a:t>
+            </a:r>
+            <a:endParaRPr lang="en-US" sz="3400" dirty="0"/>
+          </a:p>
+        </p:txBody>
+      </p:sp>
+      <p:sp>
+        <p:nvSpPr>
+          <p:cNvPr id="40" name="Text 44"/>
+          <p:cNvSpPr txBox="1"/>
+          <p:nvPr/>
+        </p:nvSpPr>
+        <p:spPr>
+          <a:xfrm>
+            <a:off x="4566818" y="5943600"/>
+            <a:ext cx="3058058" cy="274320"/>
+          </a:xfrm>
+          <a:prstGeom prst="rect">
+            <a:avLst/>
+          </a:prstGeom>
+          <a:noFill/>
+          <a:ln/>
+        </p:spPr>
+        <p:txBody>
+          <a:bodyPr wrap="square" lIns="0" tIns="0" rIns="0" bIns="0" rtlCol="0" anchor="t"/>
+          <a:lstStyle/>
           <a:p>
             <a:pPr indent="0" marL="0">
               <a:buNone/>
             </a:pPr>
             <a:r>
-              <a:rPr lang="en-US" sz="1100" dirty="0">
+              <a:rPr lang="en-US" sz="1200" dirty="0">
                 <a:solidFill>
                   <a:srgbClr val="4A6478"/>
                 </a:solidFill>
@@ -3977,49 +4041,22 @@
                 <a:ea typeface="Segoe UI" pitchFamily="34" charset="-122"/>
                 <a:cs typeface="Segoe UI" pitchFamily="34" charset="-120"/>
               </a:rPr>
-              <a:t>pacchetti e byte per direzione</a:t>
-            </a:r>
-            <a:endParaRPr lang="en-US" sz="1400" dirty="0"/>
-          </a:p>
-        </p:txBody>
-      </p:sp>
-      <p:sp>
-        <p:nvSpPr>
-          <p:cNvPr id="39" name="Shape 35"/>
-          <p:cNvSpPr/>
-          <p:nvPr/>
-        </p:nvSpPr>
-        <p:spPr>
-          <a:xfrm>
-            <a:off x="6187288" y="3566160"/>
-            <a:ext cx="2293544" cy="868680"/>
-          </a:xfrm>
-          <a:prstGeom prst="roundRect">
-            <a:avLst>
-              <a:gd name="adj" fmla="val 14737"/>
-            </a:avLst>
-          </a:prstGeom>
-          <a:solidFill>
-            <a:srgbClr val="FFFFFF"/>
-          </a:solidFill>
-          <a:ln w="9525">
-            <a:solidFill>
-              <a:srgbClr val="D6E3EC"/>
-            </a:solidFill>
-            <a:prstDash val="solid"/>
-          </a:ln>
-        </p:spPr>
-      </p:sp>
-      <p:sp>
-        <p:nvSpPr>
-          <p:cNvPr id="40" name="Text 36"/>
+              <a:t>etichette corrette + righe rimosse</a:t>
+            </a:r>
+            <a:endParaRPr lang="en-US" sz="1200" dirty="0"/>
+          </a:p>
+        </p:txBody>
+      </p:sp>
+      <p:sp>
+        <p:nvSpPr>
+          <p:cNvPr id="41" name="Text 45"/>
           <p:cNvSpPr txBox="1"/>
           <p:nvPr/>
         </p:nvSpPr>
         <p:spPr>
           <a:xfrm>
-            <a:off x="6370168" y="3566160"/>
-            <a:ext cx="1927784" cy="868680"/>
+            <a:off x="7899197" y="5029200"/>
+            <a:ext cx="3058058" cy="237744"/>
           </a:xfrm>
           <a:prstGeom prst="rect">
             <a:avLst/>
@@ -4028,31 +4065,92 @@
           <a:ln/>
         </p:spPr>
         <p:txBody>
-          <a:bodyPr wrap="square" lIns="0" tIns="0" rIns="0" bIns="0" rtlCol="0" anchor="ctr"/>
+          <a:bodyPr wrap="square" lIns="0" tIns="0" rIns="0" bIns="0" rtlCol="0" anchor="t"/>
           <a:lstStyle/>
           <a:p>
             <a:pPr indent="0" marL="0">
               <a:buNone/>
             </a:pPr>
             <a:r>
-              <a:rPr lang="en-US" sz="1600" dirty="0">
-                <a:solidFill>
-                  <a:srgbClr val="0B2438"/>
+              <a:rPr lang="en-US" sz="1050" spc="150" kern="0" dirty="0">
+                <a:solidFill>
+                  <a:srgbClr val="4A6478"/>
+                </a:solidFill>
+                <a:latin typeface="Segoe UI Semibold" pitchFamily="34" charset="0"/>
+                <a:ea typeface="Segoe UI Semibold" pitchFamily="34" charset="-122"/>
+                <a:cs typeface="Segoe UI Semibold" pitchFamily="34" charset="-120"/>
+              </a:rPr>
+              <a:t>SPLIT CASUALE 60 / 20 / 20</a:t>
+            </a:r>
+            <a:endParaRPr lang="en-US" sz="1050" dirty="0"/>
+          </a:p>
+        </p:txBody>
+      </p:sp>
+      <p:sp>
+        <p:nvSpPr>
+          <p:cNvPr id="42" name="Text 46"/>
+          <p:cNvSpPr txBox="1"/>
+          <p:nvPr/>
+        </p:nvSpPr>
+        <p:spPr>
+          <a:xfrm>
+            <a:off x="7899197" y="5257800"/>
+            <a:ext cx="3058058" cy="640080"/>
+          </a:xfrm>
+          <a:prstGeom prst="rect">
+            <a:avLst/>
+          </a:prstGeom>
+          <a:noFill/>
+          <a:ln/>
+        </p:spPr>
+        <p:txBody>
+          <a:bodyPr wrap="square" lIns="0" tIns="0" rIns="0" bIns="0" rtlCol="0" anchor="t"/>
+          <a:lstStyle/>
+          <a:p>
+            <a:pPr indent="0" marL="0">
+              <a:buNone/>
+            </a:pPr>
+            <a:r>
+              <a:rPr lang="en-US" sz="3400" dirty="0">
+                <a:solidFill>
+                  <a:srgbClr val="045991"/>
                 </a:solidFill>
                 <a:latin typeface="Georgia" pitchFamily="34" charset="0"/>
                 <a:ea typeface="Georgia" pitchFamily="34" charset="-122"/>
                 <a:cs typeface="Georgia" pitchFamily="34" charset="-120"/>
               </a:rPr>
-              <a:t>Velocità</a:t>
-            </a:r>
-            <a:endParaRPr lang="en-US" sz="1400" dirty="0"/>
-          </a:p>
+              <a:t>1.386.580</a:t>
+            </a:r>
+            <a:endParaRPr lang="en-US" sz="3400" dirty="0"/>
+          </a:p>
+        </p:txBody>
+      </p:sp>
+      <p:sp>
+        <p:nvSpPr>
+          <p:cNvPr id="43" name="Text 47"/>
+          <p:cNvSpPr txBox="1"/>
+          <p:nvPr/>
+        </p:nvSpPr>
+        <p:spPr>
+          <a:xfrm>
+            <a:off x="7899197" y="5943600"/>
+            <a:ext cx="3058058" cy="274320"/>
+          </a:xfrm>
+          <a:prstGeom prst="rect">
+            <a:avLst/>
+          </a:prstGeom>
+          <a:noFill/>
+          <a:ln/>
+        </p:spPr>
+        <p:txBody>
+          <a:bodyPr wrap="square" lIns="0" tIns="0" rIns="0" bIns="0" rtlCol="0" anchor="t"/>
+          <a:lstStyle/>
           <a:p>
             <a:pPr indent="0" marL="0">
               <a:buNone/>
             </a:pPr>
             <a:r>
-              <a:rPr lang="en-US" sz="1100" dirty="0">
+              <a:rPr lang="en-US" sz="1200" dirty="0">
                 <a:solidFill>
                   <a:srgbClr val="4A6478"/>
                 </a:solidFill>
@@ -4060,443 +4158,949 @@
                 <a:ea typeface="Segoe UI" pitchFamily="34" charset="-122"/>
                 <a:cs typeface="Segoe UI" pitchFamily="34" charset="-120"/>
               </a:rPr>
-              <a:t>byte/s e pacchetti/s</a:t>
-            </a:r>
-            <a:endParaRPr lang="en-US" sz="1400" dirty="0"/>
-          </a:p>
-        </p:txBody>
-      </p:sp>
-      <p:sp>
-        <p:nvSpPr>
-          <p:cNvPr id="41" name="Shape 37"/>
-          <p:cNvSpPr/>
-          <p:nvPr/>
-        </p:nvSpPr>
-        <p:spPr>
-          <a:xfrm>
-            <a:off x="8663711" y="3566160"/>
-            <a:ext cx="2293544" cy="868680"/>
-          </a:xfrm>
-          <a:prstGeom prst="roundRect">
-            <a:avLst>
-              <a:gd name="adj" fmla="val 14737"/>
-            </a:avLst>
-          </a:prstGeom>
-          <a:solidFill>
-            <a:srgbClr val="FFFFFF"/>
-          </a:solidFill>
-          <a:ln w="9525">
-            <a:solidFill>
-              <a:srgbClr val="D6E3EC"/>
-            </a:solidFill>
-            <a:prstDash val="solid"/>
-          </a:ln>
-        </p:spPr>
-      </p:sp>
-      <p:sp>
-        <p:nvSpPr>
-          <p:cNvPr id="42" name="Text 38"/>
+              <a:t>train · 462.193 val · 462.194 test</a:t>
+            </a:r>
+            <a:endParaRPr lang="en-US" sz="1200" dirty="0"/>
+          </a:p>
+        </p:txBody>
+      </p:sp>
+      <p:sp>
+        <p:nvSpPr>
+          <p:cNvPr id="44" name="TextBox 51"/>
           <p:cNvSpPr txBox="1"/>
           <p:nvPr/>
         </p:nvSpPr>
         <p:spPr>
           <a:xfrm>
-            <a:off x="8846591" y="3566160"/>
-            <a:ext cx="1927784" cy="868680"/>
-          </a:xfrm>
-          <a:prstGeom prst="rect">
-            <a:avLst/>
-          </a:prstGeom>
-          <a:noFill/>
-          <a:ln/>
-        </p:spPr>
-        <p:txBody>
-          <a:bodyPr wrap="square" lIns="0" tIns="0" rIns="0" bIns="0" rtlCol="0" anchor="ctr"/>
-          <a:lstStyle/>
-          <a:p>
-            <a:pPr indent="0" marL="0">
-              <a:buNone/>
-            </a:pPr>
-            <a:r>
-              <a:rPr lang="en-US" sz="1600" dirty="0">
+            <a:off x="1234440" y="3584448"/>
+            <a:ext cx="1554480" cy="169164"/>
+          </a:xfrm>
+          <a:prstGeom prst="rect">
+            <a:avLst/>
+          </a:prstGeom>
+          <a:noFill/>
+        </p:spPr>
+        <p:txBody>
+          <a:bodyPr wrap="square" lIns="0" rIns="0" tIns="0" bIns="0" anchor="ctr">
+            <a:spAutoFit/>
+          </a:bodyPr>
+          <a:lstStyle/>
+          <a:p>
+            <a:pPr algn="r"/>
+            <a:r>
+              <a:rPr sz="1000" b="0" i="0">
                 <a:solidFill>
                   <a:srgbClr val="0B2438"/>
                 </a:solidFill>
-                <a:latin typeface="Georgia" pitchFamily="34" charset="0"/>
-                <a:ea typeface="Georgia" pitchFamily="34" charset="-122"/>
-                <a:cs typeface="Georgia" pitchFamily="34" charset="-120"/>
-              </a:rPr>
-              <a:t>Flag TCP</a:t>
-            </a:r>
-            <a:endParaRPr lang="en-US" sz="1400" dirty="0"/>
-          </a:p>
-          <a:p>
-            <a:pPr indent="0" marL="0">
-              <a:buNone/>
-            </a:pPr>
-            <a:r>
-              <a:rPr lang="en-US" sz="1100" dirty="0">
+                <a:latin typeface="Segoe UI"/>
+              </a:rPr>
+              <a:t>Benign</a:t>
+            </a:r>
+          </a:p>
+        </p:txBody>
+      </p:sp>
+      <p:sp>
+        <p:nvSpPr>
+          <p:cNvPr id="45" name="Rectangle 52"/>
+          <p:cNvSpPr/>
+          <p:nvPr/>
+        </p:nvSpPr>
+        <p:spPr>
+          <a:xfrm>
+            <a:off x="2880360" y="3616452"/>
+            <a:ext cx="5482087" cy="105156"/>
+          </a:xfrm>
+          <a:prstGeom prst="rect">
+            <a:avLst/>
+          </a:prstGeom>
+          <a:solidFill>
+            <a:srgbClr val="0C649C"/>
+          </a:solidFill>
+          <a:ln>
+            <a:noFill/>
+          </a:ln>
+          <a:effectLst/>
+        </p:spPr>
+        <p:style>
+          <a:lnRef idx="1">
+            <a:schemeClr val="accent1"/>
+          </a:lnRef>
+          <a:fillRef idx="3">
+            <a:schemeClr val="accent1"/>
+          </a:fillRef>
+          <a:effectRef idx="2">
+            <a:schemeClr val="accent1"/>
+          </a:effectRef>
+          <a:fontRef idx="minor">
+            <a:schemeClr val="lt1"/>
+          </a:fontRef>
+        </p:style>
+        <p:txBody>
+          <a:bodyPr rtlCol="0" anchor="ctr"/>
+          <a:lstStyle/>
+          <a:p/>
+        </p:txBody>
+      </p:sp>
+      <p:sp>
+        <p:nvSpPr>
+          <p:cNvPr id="46" name="TextBox 53"/>
+          <p:cNvSpPr txBox="1"/>
+          <p:nvPr/>
+        </p:nvSpPr>
+        <p:spPr>
+          <a:xfrm>
+            <a:off x="8426455" y="3584448"/>
+            <a:ext cx="1005840" cy="169164"/>
+          </a:xfrm>
+          <a:prstGeom prst="rect">
+            <a:avLst/>
+          </a:prstGeom>
+          <a:noFill/>
+        </p:spPr>
+        <p:txBody>
+          <a:bodyPr wrap="square" lIns="0" rIns="0" tIns="0" bIns="0" anchor="ctr">
+            <a:spAutoFit/>
+          </a:bodyPr>
+          <a:lstStyle/>
+          <a:p>
+            <a:pPr algn="l"/>
+            <a:r>
+              <a:rPr sz="950" b="0" i="0">
                 <a:solidFill>
                   <a:srgbClr val="4A6478"/>
                 </a:solidFill>
-                <a:latin typeface="Segoe UI" pitchFamily="34" charset="0"/>
-                <a:ea typeface="Segoe UI" pitchFamily="34" charset="-122"/>
-                <a:cs typeface="Segoe UI" pitchFamily="34" charset="-120"/>
-              </a:rPr>
-              <a:t>SYN, FIN, RST, ACK…</a:t>
-            </a:r>
-            <a:endParaRPr lang="en-US" sz="1400" dirty="0"/>
-          </a:p>
-        </p:txBody>
-      </p:sp>
-      <p:sp>
-        <p:nvSpPr>
-          <p:cNvPr id="43" name="Text 39"/>
+                <a:latin typeface="Segoe UI"/>
+              </a:rPr>
+              <a:t>1.977.318</a:t>
+            </a:r>
+          </a:p>
+        </p:txBody>
+      </p:sp>
+      <p:sp>
+        <p:nvSpPr>
+          <p:cNvPr id="47" name="TextBox 54"/>
           <p:cNvSpPr txBox="1"/>
           <p:nvPr/>
         </p:nvSpPr>
         <p:spPr>
           <a:xfrm>
-            <a:off x="1234440" y="4754880"/>
-            <a:ext cx="3058058" cy="237744"/>
-          </a:xfrm>
-          <a:prstGeom prst="rect">
-            <a:avLst/>
-          </a:prstGeom>
-          <a:noFill/>
-          <a:ln/>
-        </p:spPr>
-        <p:txBody>
-          <a:bodyPr wrap="square" lIns="0" tIns="0" rIns="0" bIns="0" rtlCol="0" anchor="t"/>
-          <a:lstStyle/>
-          <a:p>
-            <a:pPr indent="0" marL="0">
-              <a:buNone/>
-            </a:pPr>
-            <a:r>
-              <a:rPr lang="en-US" sz="1050" spc="150" kern="0" dirty="0">
+            <a:off x="1234440" y="3753612"/>
+            <a:ext cx="1554480" cy="169164"/>
+          </a:xfrm>
+          <a:prstGeom prst="rect">
+            <a:avLst/>
+          </a:prstGeom>
+          <a:noFill/>
+        </p:spPr>
+        <p:txBody>
+          <a:bodyPr wrap="square" lIns="0" rIns="0" tIns="0" bIns="0" anchor="ctr">
+            <a:spAutoFit/>
+          </a:bodyPr>
+          <a:lstStyle/>
+          <a:p>
+            <a:pPr algn="r"/>
+            <a:r>
+              <a:rPr sz="1000" b="0" i="0">
+                <a:solidFill>
+                  <a:srgbClr val="0B2438"/>
+                </a:solidFill>
+                <a:latin typeface="Segoe UI"/>
+              </a:rPr>
+              <a:t>DoS / DDoS</a:t>
+            </a:r>
+          </a:p>
+        </p:txBody>
+      </p:sp>
+      <p:sp>
+        <p:nvSpPr>
+          <p:cNvPr id="48" name="Rectangle 55"/>
+          <p:cNvSpPr/>
+          <p:nvPr/>
+        </p:nvSpPr>
+        <p:spPr>
+          <a:xfrm>
+            <a:off x="2880360" y="3785616"/>
+            <a:ext cx="4795488" cy="105156"/>
+          </a:xfrm>
+          <a:prstGeom prst="rect">
+            <a:avLst/>
+          </a:prstGeom>
+          <a:solidFill>
+            <a:srgbClr val="C98A3E"/>
+          </a:solidFill>
+          <a:ln>
+            <a:noFill/>
+          </a:ln>
+          <a:effectLst/>
+        </p:spPr>
+        <p:style>
+          <a:lnRef idx="1">
+            <a:schemeClr val="accent1"/>
+          </a:lnRef>
+          <a:fillRef idx="3">
+            <a:schemeClr val="accent1"/>
+          </a:fillRef>
+          <a:effectRef idx="2">
+            <a:schemeClr val="accent1"/>
+          </a:effectRef>
+          <a:fontRef idx="minor">
+            <a:schemeClr val="lt1"/>
+          </a:fontRef>
+        </p:style>
+        <p:txBody>
+          <a:bodyPr rtlCol="0" anchor="ctr"/>
+          <a:lstStyle/>
+          <a:p/>
+        </p:txBody>
+      </p:sp>
+      <p:sp>
+        <p:nvSpPr>
+          <p:cNvPr id="49" name="TextBox 56"/>
+          <p:cNvSpPr txBox="1"/>
+          <p:nvPr/>
+        </p:nvSpPr>
+        <p:spPr>
+          <a:xfrm>
+            <a:off x="7739856" y="3753612"/>
+            <a:ext cx="1005840" cy="169164"/>
+          </a:xfrm>
+          <a:prstGeom prst="rect">
+            <a:avLst/>
+          </a:prstGeom>
+          <a:noFill/>
+        </p:spPr>
+        <p:txBody>
+          <a:bodyPr wrap="square" lIns="0" rIns="0" tIns="0" bIns="0" anchor="ctr">
+            <a:spAutoFit/>
+          </a:bodyPr>
+          <a:lstStyle/>
+          <a:p>
+            <a:pPr algn="l"/>
+            <a:r>
+              <a:rPr sz="950" b="0" i="0">
                 <a:solidFill>
                   <a:srgbClr val="4A6478"/>
                 </a:solidFill>
-                <a:latin typeface="Segoe UI Semibold" pitchFamily="34" charset="0"/>
-                <a:ea typeface="Segoe UI Semibold" pitchFamily="34" charset="-122"/>
-                <a:cs typeface="Segoe UI Semibold" pitchFamily="34" charset="-120"/>
-              </a:rPr>
-              <a:t>DATASET</a:t>
-            </a:r>
-            <a:endParaRPr lang="en-US" sz="1050" dirty="0"/>
-          </a:p>
-        </p:txBody>
-      </p:sp>
-      <p:sp>
-        <p:nvSpPr>
-          <p:cNvPr id="44" name="Text 40"/>
+                <a:latin typeface="Segoe UI"/>
+              </a:rPr>
+              <a:t>321.759</a:t>
+            </a:r>
+          </a:p>
+        </p:txBody>
+      </p:sp>
+      <p:sp>
+        <p:nvSpPr>
+          <p:cNvPr id="50" name="TextBox 57"/>
           <p:cNvSpPr txBox="1"/>
           <p:nvPr/>
         </p:nvSpPr>
         <p:spPr>
           <a:xfrm>
-            <a:off x="1234440" y="4983480"/>
-            <a:ext cx="3058058" cy="640080"/>
-          </a:xfrm>
-          <a:prstGeom prst="rect">
-            <a:avLst/>
-          </a:prstGeom>
-          <a:noFill/>
-          <a:ln/>
-        </p:spPr>
-        <p:txBody>
-          <a:bodyPr wrap="square" lIns="0" tIns="0" rIns="0" bIns="0" rtlCol="0" anchor="t"/>
-          <a:lstStyle/>
-          <a:p>
-            <a:pPr indent="0" marL="0">
-              <a:buNone/>
-            </a:pPr>
-            <a:r>
-              <a:rPr lang="en-US" sz="3400" dirty="0">
-                <a:solidFill>
-                  <a:srgbClr val="045991"/>
-                </a:solidFill>
-                <a:latin typeface="Georgia" pitchFamily="34" charset="0"/>
-                <a:ea typeface="Georgia" pitchFamily="34" charset="-122"/>
-                <a:cs typeface="Georgia" pitchFamily="34" charset="-120"/>
-              </a:rPr>
-              <a:t>2,3 milioni</a:t>
-            </a:r>
-            <a:endParaRPr lang="en-US" sz="3400" dirty="0"/>
-          </a:p>
-        </p:txBody>
-      </p:sp>
-      <p:sp>
-        <p:nvSpPr>
-          <p:cNvPr id="45" name="Text 41"/>
+            <a:off x="1234440" y="3922776"/>
+            <a:ext cx="1554480" cy="169164"/>
+          </a:xfrm>
+          <a:prstGeom prst="rect">
+            <a:avLst/>
+          </a:prstGeom>
+          <a:noFill/>
+        </p:spPr>
+        <p:txBody>
+          <a:bodyPr wrap="square" lIns="0" rIns="0" tIns="0" bIns="0" anchor="ctr">
+            <a:spAutoFit/>
+          </a:bodyPr>
+          <a:lstStyle/>
+          <a:p>
+            <a:pPr algn="r"/>
+            <a:r>
+              <a:rPr sz="1000" b="0" i="0">
+                <a:solidFill>
+                  <a:srgbClr val="0B2438"/>
+                </a:solidFill>
+                <a:latin typeface="Segoe UI"/>
+              </a:rPr>
+              <a:t>Brute force</a:t>
+            </a:r>
+          </a:p>
+        </p:txBody>
+      </p:sp>
+      <p:sp>
+        <p:nvSpPr>
+          <p:cNvPr id="51" name="Rectangle 58"/>
+          <p:cNvSpPr/>
+          <p:nvPr/>
+        </p:nvSpPr>
+        <p:spPr>
+          <a:xfrm>
+            <a:off x="2880360" y="3954780"/>
+            <a:ext cx="3449268" cy="105156"/>
+          </a:xfrm>
+          <a:prstGeom prst="rect">
+            <a:avLst/>
+          </a:prstGeom>
+          <a:solidFill>
+            <a:srgbClr val="C98A3E"/>
+          </a:solidFill>
+          <a:ln>
+            <a:noFill/>
+          </a:ln>
+          <a:effectLst/>
+        </p:spPr>
+        <p:style>
+          <a:lnRef idx="1">
+            <a:schemeClr val="accent1"/>
+          </a:lnRef>
+          <a:fillRef idx="3">
+            <a:schemeClr val="accent1"/>
+          </a:fillRef>
+          <a:effectRef idx="2">
+            <a:schemeClr val="accent1"/>
+          </a:effectRef>
+          <a:fontRef idx="minor">
+            <a:schemeClr val="lt1"/>
+          </a:fontRef>
+        </p:style>
+        <p:txBody>
+          <a:bodyPr rtlCol="0" anchor="ctr"/>
+          <a:lstStyle/>
+          <a:p/>
+        </p:txBody>
+      </p:sp>
+      <p:sp>
+        <p:nvSpPr>
+          <p:cNvPr id="52" name="TextBox 59"/>
           <p:cNvSpPr txBox="1"/>
           <p:nvPr/>
         </p:nvSpPr>
         <p:spPr>
           <a:xfrm>
-            <a:off x="1234440" y="5669280"/>
-            <a:ext cx="3058058" cy="274320"/>
-          </a:xfrm>
-          <a:prstGeom prst="rect">
-            <a:avLst/>
-          </a:prstGeom>
-          <a:noFill/>
-          <a:ln/>
-        </p:spPr>
-        <p:txBody>
-          <a:bodyPr wrap="square" lIns="0" tIns="0" rIns="0" bIns="0" rtlCol="0" anchor="t"/>
-          <a:lstStyle/>
-          <a:p>
-            <a:pPr indent="0" marL="0">
-              <a:buNone/>
-            </a:pPr>
-            <a:r>
-              <a:rPr lang="en-US" sz="1200" dirty="0">
+            <a:off x="6393636" y="3922776"/>
+            <a:ext cx="1005840" cy="169164"/>
+          </a:xfrm>
+          <a:prstGeom prst="rect">
+            <a:avLst/>
+          </a:prstGeom>
+          <a:noFill/>
+        </p:spPr>
+        <p:txBody>
+          <a:bodyPr wrap="square" lIns="0" rIns="0" tIns="0" bIns="0" anchor="ctr">
+            <a:spAutoFit/>
+          </a:bodyPr>
+          <a:lstStyle/>
+          <a:p>
+            <a:pPr algn="l"/>
+            <a:r>
+              <a:rPr sz="950" b="0" i="0">
                 <a:solidFill>
                   <a:srgbClr val="4A6478"/>
                 </a:solidFill>
-                <a:latin typeface="Segoe UI" pitchFamily="34" charset="0"/>
-                <a:ea typeface="Segoe UI" pitchFamily="34" charset="-122"/>
-                <a:cs typeface="Segoe UI" pitchFamily="34" charset="-120"/>
-              </a:rPr>
-              <a:t>flussi, rete di laboratorio</a:t>
-            </a:r>
-            <a:endParaRPr lang="en-US" sz="1200" dirty="0"/>
-          </a:p>
-        </p:txBody>
-      </p:sp>
-      <p:sp>
-        <p:nvSpPr>
-          <p:cNvPr id="46" name="Text 42"/>
+                <a:latin typeface="Segoe UI"/>
+              </a:rPr>
+              <a:t>9.150</a:t>
+            </a:r>
+          </a:p>
+        </p:txBody>
+      </p:sp>
+      <p:sp>
+        <p:nvSpPr>
+          <p:cNvPr id="53" name="TextBox 60"/>
           <p:cNvSpPr txBox="1"/>
           <p:nvPr/>
         </p:nvSpPr>
         <p:spPr>
           <a:xfrm>
-            <a:off x="4566818" y="4754880"/>
-            <a:ext cx="3058058" cy="237744"/>
-          </a:xfrm>
-          <a:prstGeom prst="rect">
-            <a:avLst/>
-          </a:prstGeom>
-          <a:noFill/>
-          <a:ln/>
-        </p:spPr>
-        <p:txBody>
-          <a:bodyPr wrap="square" lIns="0" tIns="0" rIns="0" bIns="0" rtlCol="0" anchor="t"/>
-          <a:lstStyle/>
-          <a:p>
-            <a:pPr indent="0" marL="0">
-              <a:buNone/>
-            </a:pPr>
-            <a:r>
-              <a:rPr lang="en-US" sz="1050" spc="150" kern="0" dirty="0">
+            <a:off x="1234440" y="4091940"/>
+            <a:ext cx="1554480" cy="169164"/>
+          </a:xfrm>
+          <a:prstGeom prst="rect">
+            <a:avLst/>
+          </a:prstGeom>
+          <a:noFill/>
+        </p:spPr>
+        <p:txBody>
+          <a:bodyPr wrap="square" lIns="0" rIns="0" tIns="0" bIns="0" anchor="ctr">
+            <a:spAutoFit/>
+          </a:bodyPr>
+          <a:lstStyle/>
+          <a:p>
+            <a:pPr algn="r"/>
+            <a:r>
+              <a:rPr sz="1000" b="0" i="0">
+                <a:solidFill>
+                  <a:srgbClr val="0B2438"/>
+                </a:solidFill>
+                <a:latin typeface="Segoe UI"/>
+              </a:rPr>
+              <a:t>Web attack</a:t>
+            </a:r>
+          </a:p>
+        </p:txBody>
+      </p:sp>
+      <p:sp>
+        <p:nvSpPr>
+          <p:cNvPr id="54" name="Rectangle 61"/>
+          <p:cNvSpPr/>
+          <p:nvPr/>
+        </p:nvSpPr>
+        <p:spPr>
+          <a:xfrm>
+            <a:off x="2880360" y="4123944"/>
+            <a:ext cx="2900370" cy="105156"/>
+          </a:xfrm>
+          <a:prstGeom prst="rect">
+            <a:avLst/>
+          </a:prstGeom>
+          <a:solidFill>
+            <a:srgbClr val="C98A3E"/>
+          </a:solidFill>
+          <a:ln>
+            <a:noFill/>
+          </a:ln>
+          <a:effectLst/>
+        </p:spPr>
+        <p:style>
+          <a:lnRef idx="1">
+            <a:schemeClr val="accent1"/>
+          </a:lnRef>
+          <a:fillRef idx="3">
+            <a:schemeClr val="accent1"/>
+          </a:fillRef>
+          <a:effectRef idx="2">
+            <a:schemeClr val="accent1"/>
+          </a:effectRef>
+          <a:fontRef idx="minor">
+            <a:schemeClr val="lt1"/>
+          </a:fontRef>
+        </p:style>
+        <p:txBody>
+          <a:bodyPr rtlCol="0" anchor="ctr"/>
+          <a:lstStyle/>
+          <a:p/>
+        </p:txBody>
+      </p:sp>
+      <p:sp>
+        <p:nvSpPr>
+          <p:cNvPr id="55" name="TextBox 62"/>
+          <p:cNvSpPr txBox="1"/>
+          <p:nvPr/>
+        </p:nvSpPr>
+        <p:spPr>
+          <a:xfrm>
+            <a:off x="5844738" y="4091940"/>
+            <a:ext cx="1005840" cy="169164"/>
+          </a:xfrm>
+          <a:prstGeom prst="rect">
+            <a:avLst/>
+          </a:prstGeom>
+          <a:noFill/>
+        </p:spPr>
+        <p:txBody>
+          <a:bodyPr wrap="square" lIns="0" rIns="0" tIns="0" bIns="0" anchor="ctr">
+            <a:spAutoFit/>
+          </a:bodyPr>
+          <a:lstStyle/>
+          <a:p>
+            <a:pPr algn="l"/>
+            <a:r>
+              <a:rPr sz="950" b="0" i="0">
                 <a:solidFill>
                   <a:srgbClr val="4A6478"/>
                 </a:solidFill>
-                <a:latin typeface="Segoe UI Semibold" pitchFamily="34" charset="0"/>
-                <a:ea typeface="Segoe UI Semibold" pitchFamily="34" charset="-122"/>
-                <a:cs typeface="Segoe UI Semibold" pitchFamily="34" charset="-120"/>
-              </a:rPr>
-              <a:t>PULIZIA</a:t>
-            </a:r>
-            <a:endParaRPr lang="en-US" sz="1050" dirty="0"/>
-          </a:p>
-        </p:txBody>
-      </p:sp>
-      <p:sp>
-        <p:nvSpPr>
-          <p:cNvPr id="47" name="Text 43"/>
+                <a:latin typeface="Segoe UI"/>
+              </a:rPr>
+              <a:t>2.143</a:t>
+            </a:r>
+          </a:p>
+        </p:txBody>
+      </p:sp>
+      <p:sp>
+        <p:nvSpPr>
+          <p:cNvPr id="56" name="TextBox 63"/>
           <p:cNvSpPr txBox="1"/>
           <p:nvPr/>
         </p:nvSpPr>
         <p:spPr>
           <a:xfrm>
-            <a:off x="4566818" y="4983480"/>
-            <a:ext cx="3058058" cy="640080"/>
-          </a:xfrm>
-          <a:prstGeom prst="rect">
-            <a:avLst/>
-          </a:prstGeom>
-          <a:noFill/>
-          <a:ln/>
-        </p:spPr>
-        <p:txBody>
-          <a:bodyPr wrap="square" lIns="0" tIns="0" rIns="0" bIns="0" rtlCol="0" anchor="t"/>
-          <a:lstStyle/>
-          <a:p>
-            <a:pPr indent="0" marL="0">
-              <a:buNone/>
-            </a:pPr>
-            <a:r>
-              <a:rPr lang="en-US" sz="3400" dirty="0">
-                <a:solidFill>
-                  <a:srgbClr val="045991"/>
-                </a:solidFill>
-                <a:latin typeface="Georgia" pitchFamily="34" charset="0"/>
-                <a:ea typeface="Georgia" pitchFamily="34" charset="-122"/>
-                <a:cs typeface="Georgia" pitchFamily="34" charset="-120"/>
-              </a:rPr>
-              <a:t>2.143 + 2.843</a:t>
-            </a:r>
-            <a:endParaRPr lang="en-US" sz="3400" dirty="0"/>
-          </a:p>
-        </p:txBody>
-      </p:sp>
-      <p:sp>
-        <p:nvSpPr>
-          <p:cNvPr id="48" name="Text 44"/>
+            <a:off x="1234440" y="4261104"/>
+            <a:ext cx="1554480" cy="169164"/>
+          </a:xfrm>
+          <a:prstGeom prst="rect">
+            <a:avLst/>
+          </a:prstGeom>
+          <a:noFill/>
+        </p:spPr>
+        <p:txBody>
+          <a:bodyPr wrap="square" lIns="0" rIns="0" tIns="0" bIns="0" anchor="ctr">
+            <a:spAutoFit/>
+          </a:bodyPr>
+          <a:lstStyle/>
+          <a:p>
+            <a:pPr algn="r"/>
+            <a:r>
+              <a:rPr sz="1000" b="0" i="0">
+                <a:solidFill>
+                  <a:srgbClr val="0B2438"/>
+                </a:solidFill>
+                <a:latin typeface="Segoe UI"/>
+              </a:rPr>
+              <a:t>PortScan</a:t>
+            </a:r>
+          </a:p>
+        </p:txBody>
+      </p:sp>
+      <p:sp>
+        <p:nvSpPr>
+          <p:cNvPr id="57" name="Rectangle 64"/>
+          <p:cNvSpPr/>
+          <p:nvPr/>
+        </p:nvSpPr>
+        <p:spPr>
+          <a:xfrm>
+            <a:off x="2880360" y="4293108"/>
+            <a:ext cx="2865844" cy="105156"/>
+          </a:xfrm>
+          <a:prstGeom prst="rect">
+            <a:avLst/>
+          </a:prstGeom>
+          <a:solidFill>
+            <a:srgbClr val="C98A3E"/>
+          </a:solidFill>
+          <a:ln>
+            <a:noFill/>
+          </a:ln>
+          <a:effectLst/>
+        </p:spPr>
+        <p:style>
+          <a:lnRef idx="1">
+            <a:schemeClr val="accent1"/>
+          </a:lnRef>
+          <a:fillRef idx="3">
+            <a:schemeClr val="accent1"/>
+          </a:fillRef>
+          <a:effectRef idx="2">
+            <a:schemeClr val="accent1"/>
+          </a:effectRef>
+          <a:fontRef idx="minor">
+            <a:schemeClr val="lt1"/>
+          </a:fontRef>
+        </p:style>
+        <p:txBody>
+          <a:bodyPr rtlCol="0" anchor="ctr"/>
+          <a:lstStyle/>
+          <a:p/>
+        </p:txBody>
+      </p:sp>
+      <p:sp>
+        <p:nvSpPr>
+          <p:cNvPr id="58" name="TextBox 65"/>
           <p:cNvSpPr txBox="1"/>
           <p:nvPr/>
         </p:nvSpPr>
         <p:spPr>
           <a:xfrm>
-            <a:off x="4566818" y="5669280"/>
-            <a:ext cx="3058058" cy="274320"/>
-          </a:xfrm>
-          <a:prstGeom prst="rect">
-            <a:avLst/>
-          </a:prstGeom>
-          <a:noFill/>
-          <a:ln/>
-        </p:spPr>
-        <p:txBody>
-          <a:bodyPr wrap="square" lIns="0" tIns="0" rIns="0" bIns="0" rtlCol="0" anchor="t"/>
-          <a:lstStyle/>
-          <a:p>
-            <a:pPr indent="0" marL="0">
-              <a:buNone/>
-            </a:pPr>
-            <a:r>
-              <a:rPr lang="en-US" sz="1200" dirty="0">
+            <a:off x="5810212" y="4261104"/>
+            <a:ext cx="1005840" cy="169164"/>
+          </a:xfrm>
+          <a:prstGeom prst="rect">
+            <a:avLst/>
+          </a:prstGeom>
+          <a:noFill/>
+        </p:spPr>
+        <p:txBody>
+          <a:bodyPr wrap="square" lIns="0" rIns="0" tIns="0" bIns="0" anchor="ctr">
+            <a:spAutoFit/>
+          </a:bodyPr>
+          <a:lstStyle/>
+          <a:p>
+            <a:pPr algn="l"/>
+            <a:r>
+              <a:rPr sz="950" b="0" i="0">
                 <a:solidFill>
                   <a:srgbClr val="4A6478"/>
                 </a:solidFill>
-                <a:latin typeface="Segoe UI" pitchFamily="34" charset="0"/>
-                <a:ea typeface="Segoe UI" pitchFamily="34" charset="-122"/>
-                <a:cs typeface="Segoe UI" pitchFamily="34" charset="-120"/>
-              </a:rPr>
-              <a:t>righe corrotte, corrette o rimosse</a:t>
-            </a:r>
-            <a:endParaRPr lang="en-US" sz="1200" dirty="0"/>
-          </a:p>
-        </p:txBody>
-      </p:sp>
-      <p:sp>
-        <p:nvSpPr>
-          <p:cNvPr id="49" name="Text 45"/>
+                <a:latin typeface="Segoe UI"/>
+              </a:rPr>
+              <a:t>1.956</a:t>
+            </a:r>
+          </a:p>
+        </p:txBody>
+      </p:sp>
+      <p:sp>
+        <p:nvSpPr>
+          <p:cNvPr id="59" name="TextBox 66"/>
           <p:cNvSpPr txBox="1"/>
           <p:nvPr/>
         </p:nvSpPr>
         <p:spPr>
           <a:xfrm>
-            <a:off x="7899197" y="4754880"/>
-            <a:ext cx="3058058" cy="237744"/>
-          </a:xfrm>
-          <a:prstGeom prst="rect">
-            <a:avLst/>
-          </a:prstGeom>
-          <a:noFill/>
-          <a:ln/>
-        </p:spPr>
-        <p:txBody>
-          <a:bodyPr wrap="square" lIns="0" tIns="0" rIns="0" bIns="0" rtlCol="0" anchor="t"/>
-          <a:lstStyle/>
-          <a:p>
-            <a:pPr indent="0" marL="0">
-              <a:buNone/>
-            </a:pPr>
-            <a:r>
-              <a:rPr lang="en-US" sz="1050" spc="150" kern="0" dirty="0">
+            <a:off x="1234440" y="4430268"/>
+            <a:ext cx="1554480" cy="169164"/>
+          </a:xfrm>
+          <a:prstGeom prst="rect">
+            <a:avLst/>
+          </a:prstGeom>
+          <a:noFill/>
+        </p:spPr>
+        <p:txBody>
+          <a:bodyPr wrap="square" lIns="0" rIns="0" tIns="0" bIns="0" anchor="ctr">
+            <a:spAutoFit/>
+          </a:bodyPr>
+          <a:lstStyle/>
+          <a:p>
+            <a:pPr algn="r"/>
+            <a:r>
+              <a:rPr sz="1000" b="0" i="0">
+                <a:solidFill>
+                  <a:srgbClr val="0B2438"/>
+                </a:solidFill>
+                <a:latin typeface="Segoe UI"/>
+              </a:rPr>
+              <a:t>Bot</a:t>
+            </a:r>
+          </a:p>
+        </p:txBody>
+      </p:sp>
+      <p:sp>
+        <p:nvSpPr>
+          <p:cNvPr id="60" name="Rectangle 67"/>
+          <p:cNvSpPr/>
+          <p:nvPr/>
+        </p:nvSpPr>
+        <p:spPr>
+          <a:xfrm>
+            <a:off x="2880360" y="4462272"/>
+            <a:ext cx="2749244" cy="105156"/>
+          </a:xfrm>
+          <a:prstGeom prst="rect">
+            <a:avLst/>
+          </a:prstGeom>
+          <a:solidFill>
+            <a:srgbClr val="C98A3E"/>
+          </a:solidFill>
+          <a:ln>
+            <a:noFill/>
+          </a:ln>
+          <a:effectLst/>
+        </p:spPr>
+        <p:style>
+          <a:lnRef idx="1">
+            <a:schemeClr val="accent1"/>
+          </a:lnRef>
+          <a:fillRef idx="3">
+            <a:schemeClr val="accent1"/>
+          </a:fillRef>
+          <a:effectRef idx="2">
+            <a:schemeClr val="accent1"/>
+          </a:effectRef>
+          <a:fontRef idx="minor">
+            <a:schemeClr val="lt1"/>
+          </a:fontRef>
+        </p:style>
+        <p:txBody>
+          <a:bodyPr rtlCol="0" anchor="ctr"/>
+          <a:lstStyle/>
+          <a:p/>
+        </p:txBody>
+      </p:sp>
+      <p:sp>
+        <p:nvSpPr>
+          <p:cNvPr id="61" name="TextBox 68"/>
+          <p:cNvSpPr txBox="1"/>
+          <p:nvPr/>
+        </p:nvSpPr>
+        <p:spPr>
+          <a:xfrm>
+            <a:off x="5693612" y="4430268"/>
+            <a:ext cx="1005840" cy="169164"/>
+          </a:xfrm>
+          <a:prstGeom prst="rect">
+            <a:avLst/>
+          </a:prstGeom>
+          <a:noFill/>
+        </p:spPr>
+        <p:txBody>
+          <a:bodyPr wrap="square" lIns="0" rIns="0" tIns="0" bIns="0" anchor="ctr">
+            <a:spAutoFit/>
+          </a:bodyPr>
+          <a:lstStyle/>
+          <a:p>
+            <a:pPr algn="l"/>
+            <a:r>
+              <a:rPr sz="950" b="0" i="0">
                 <a:solidFill>
                   <a:srgbClr val="4A6478"/>
                 </a:solidFill>
-                <a:latin typeface="Segoe UI Semibold" pitchFamily="34" charset="0"/>
-                <a:ea typeface="Segoe UI Semibold" pitchFamily="34" charset="-122"/>
-                <a:cs typeface="Segoe UI Semibold" pitchFamily="34" charset="-120"/>
-              </a:rPr>
-              <a:t>SPLIT 60 / 20 / 20</a:t>
-            </a:r>
-            <a:endParaRPr lang="en-US" sz="1050" dirty="0"/>
-          </a:p>
-        </p:txBody>
-      </p:sp>
-      <p:sp>
-        <p:nvSpPr>
-          <p:cNvPr id="50" name="Text 46"/>
+                <a:latin typeface="Segoe UI"/>
+              </a:rPr>
+              <a:t>1.437</a:t>
+            </a:r>
+          </a:p>
+        </p:txBody>
+      </p:sp>
+      <p:sp>
+        <p:nvSpPr>
+          <p:cNvPr id="62" name="TextBox 69"/>
           <p:cNvSpPr txBox="1"/>
           <p:nvPr/>
         </p:nvSpPr>
         <p:spPr>
           <a:xfrm>
-            <a:off x="7899197" y="4983480"/>
-            <a:ext cx="3058058" cy="640080"/>
-          </a:xfrm>
-          <a:prstGeom prst="rect">
-            <a:avLst/>
-          </a:prstGeom>
-          <a:noFill/>
-          <a:ln/>
-        </p:spPr>
-        <p:txBody>
-          <a:bodyPr wrap="square" lIns="0" tIns="0" rIns="0" bIns="0" rtlCol="0" anchor="t"/>
-          <a:lstStyle/>
-          <a:p>
-            <a:pPr indent="0" marL="0">
-              <a:buNone/>
-            </a:pPr>
-            <a:r>
-              <a:rPr lang="en-US" sz="3400" dirty="0">
-                <a:solidFill>
-                  <a:srgbClr val="045991"/>
-                </a:solidFill>
-                <a:latin typeface="Georgia" pitchFamily="34" charset="0"/>
-                <a:ea typeface="Georgia" pitchFamily="34" charset="-122"/>
-                <a:cs typeface="Georgia" pitchFamily="34" charset="-120"/>
-              </a:rPr>
-              <a:t>1.386.580</a:t>
-            </a:r>
-            <a:endParaRPr lang="en-US" sz="3400" dirty="0"/>
-          </a:p>
-        </p:txBody>
-      </p:sp>
-      <p:sp>
-        <p:nvSpPr>
-          <p:cNvPr id="51" name="Text 47"/>
+            <a:off x="1234440" y="4599432"/>
+            <a:ext cx="1554480" cy="169164"/>
+          </a:xfrm>
+          <a:prstGeom prst="rect">
+            <a:avLst/>
+          </a:prstGeom>
+          <a:noFill/>
+        </p:spPr>
+        <p:txBody>
+          <a:bodyPr wrap="square" lIns="0" rIns="0" tIns="0" bIns="0" anchor="ctr">
+            <a:spAutoFit/>
+          </a:bodyPr>
+          <a:lstStyle/>
+          <a:p>
+            <a:pPr algn="r"/>
+            <a:r>
+              <a:rPr sz="1000" b="0" i="0">
+                <a:solidFill>
+                  <a:srgbClr val="0B2438"/>
+                </a:solidFill>
+                <a:latin typeface="Segoe UI"/>
+              </a:rPr>
+              <a:t>Infiltration</a:t>
+            </a:r>
+          </a:p>
+        </p:txBody>
+      </p:sp>
+      <p:sp>
+        <p:nvSpPr>
+          <p:cNvPr id="63" name="Rectangle 70"/>
+          <p:cNvSpPr/>
+          <p:nvPr/>
+        </p:nvSpPr>
+        <p:spPr>
+          <a:xfrm>
+            <a:off x="2880360" y="4631436"/>
+            <a:ext cx="1355096" cy="105156"/>
+          </a:xfrm>
+          <a:prstGeom prst="rect">
+            <a:avLst/>
+          </a:prstGeom>
+          <a:solidFill>
+            <a:srgbClr val="9A3B1B"/>
+          </a:solidFill>
+          <a:ln>
+            <a:noFill/>
+          </a:ln>
+          <a:effectLst/>
+        </p:spPr>
+        <p:style>
+          <a:lnRef idx="1">
+            <a:schemeClr val="accent1"/>
+          </a:lnRef>
+          <a:fillRef idx="3">
+            <a:schemeClr val="accent1"/>
+          </a:fillRef>
+          <a:effectRef idx="2">
+            <a:schemeClr val="accent1"/>
+          </a:effectRef>
+          <a:fontRef idx="minor">
+            <a:schemeClr val="lt1"/>
+          </a:fontRef>
+        </p:style>
+        <p:txBody>
+          <a:bodyPr rtlCol="0" anchor="ctr"/>
+          <a:lstStyle/>
+          <a:p/>
+        </p:txBody>
+      </p:sp>
+      <p:sp>
+        <p:nvSpPr>
+          <p:cNvPr id="64" name="TextBox 71"/>
           <p:cNvSpPr txBox="1"/>
           <p:nvPr/>
         </p:nvSpPr>
         <p:spPr>
           <a:xfrm>
-            <a:off x="7899197" y="5669280"/>
-            <a:ext cx="3058058" cy="274320"/>
-          </a:xfrm>
-          <a:prstGeom prst="rect">
-            <a:avLst/>
-          </a:prstGeom>
-          <a:noFill/>
-          <a:ln/>
-        </p:spPr>
-        <p:txBody>
-          <a:bodyPr wrap="square" lIns="0" tIns="0" rIns="0" bIns="0" rtlCol="0" anchor="t"/>
-          <a:lstStyle/>
-          <a:p>
-            <a:pPr indent="0" marL="0">
-              <a:buNone/>
-            </a:pPr>
-            <a:r>
-              <a:rPr lang="en-US" sz="1200" dirty="0">
+            <a:off x="4299464" y="4599432"/>
+            <a:ext cx="1005840" cy="169164"/>
+          </a:xfrm>
+          <a:prstGeom prst="rect">
+            <a:avLst/>
+          </a:prstGeom>
+          <a:noFill/>
+        </p:spPr>
+        <p:txBody>
+          <a:bodyPr wrap="square" lIns="0" rIns="0" tIns="0" bIns="0" anchor="ctr">
+            <a:spAutoFit/>
+          </a:bodyPr>
+          <a:lstStyle/>
+          <a:p>
+            <a:pPr algn="l"/>
+            <a:r>
+              <a:rPr sz="950" b="0" i="0">
                 <a:solidFill>
                   <a:srgbClr val="4A6478"/>
                 </a:solidFill>
-                <a:latin typeface="Segoe UI" pitchFamily="34" charset="0"/>
-                <a:ea typeface="Segoe UI" pitchFamily="34" charset="-122"/>
-                <a:cs typeface="Segoe UI" pitchFamily="34" charset="-120"/>
-              </a:rPr>
-              <a:t>train · 462.193 val · 462.194 test</a:t>
-            </a:r>
-            <a:endParaRPr lang="en-US" sz="1200" dirty="0"/>
+                <a:latin typeface="Segoe UI"/>
+              </a:rPr>
+              <a:t>36</a:t>
+            </a:r>
+          </a:p>
+        </p:txBody>
+      </p:sp>
+      <p:sp>
+        <p:nvSpPr>
+          <p:cNvPr id="65" name="TextBox 72"/>
+          <p:cNvSpPr txBox="1"/>
+          <p:nvPr/>
+        </p:nvSpPr>
+        <p:spPr>
+          <a:xfrm>
+            <a:off x="1234440" y="4768596"/>
+            <a:ext cx="1554480" cy="169164"/>
+          </a:xfrm>
+          <a:prstGeom prst="rect">
+            <a:avLst/>
+          </a:prstGeom>
+          <a:noFill/>
+        </p:spPr>
+        <p:txBody>
+          <a:bodyPr wrap="square" lIns="0" rIns="0" tIns="0" bIns="0" anchor="ctr">
+            <a:spAutoFit/>
+          </a:bodyPr>
+          <a:lstStyle/>
+          <a:p>
+            <a:pPr algn="r"/>
+            <a:r>
+              <a:rPr sz="1000" b="0" i="0">
+                <a:solidFill>
+                  <a:srgbClr val="0B2438"/>
+                </a:solidFill>
+                <a:latin typeface="Segoe UI"/>
+              </a:rPr>
+              <a:t>Heartbleed</a:t>
+            </a:r>
+          </a:p>
+        </p:txBody>
+      </p:sp>
+      <p:sp>
+        <p:nvSpPr>
+          <p:cNvPr id="66" name="Rectangle 73"/>
+          <p:cNvSpPr/>
+          <p:nvPr/>
+        </p:nvSpPr>
+        <p:spPr>
+          <a:xfrm>
+            <a:off x="2880360" y="4800600"/>
+            <a:ext cx="906756" cy="105156"/>
+          </a:xfrm>
+          <a:prstGeom prst="rect">
+            <a:avLst/>
+          </a:prstGeom>
+          <a:solidFill>
+            <a:srgbClr val="9A3B1B"/>
+          </a:solidFill>
+          <a:ln>
+            <a:noFill/>
+          </a:ln>
+          <a:effectLst/>
+        </p:spPr>
+        <p:style>
+          <a:lnRef idx="1">
+            <a:schemeClr val="accent1"/>
+          </a:lnRef>
+          <a:fillRef idx="3">
+            <a:schemeClr val="accent1"/>
+          </a:fillRef>
+          <a:effectRef idx="2">
+            <a:schemeClr val="accent1"/>
+          </a:effectRef>
+          <a:fontRef idx="minor">
+            <a:schemeClr val="lt1"/>
+          </a:fontRef>
+        </p:style>
+        <p:txBody>
+          <a:bodyPr rtlCol="0" anchor="ctr"/>
+          <a:lstStyle/>
+          <a:p/>
+        </p:txBody>
+      </p:sp>
+      <p:sp>
+        <p:nvSpPr>
+          <p:cNvPr id="67" name="TextBox 74"/>
+          <p:cNvSpPr txBox="1"/>
+          <p:nvPr/>
+        </p:nvSpPr>
+        <p:spPr>
+          <a:xfrm>
+            <a:off x="3851124" y="4768596"/>
+            <a:ext cx="1005840" cy="169164"/>
+          </a:xfrm>
+          <a:prstGeom prst="rect">
+            <a:avLst/>
+          </a:prstGeom>
+          <a:noFill/>
+        </p:spPr>
+        <p:txBody>
+          <a:bodyPr wrap="square" lIns="0" rIns="0" tIns="0" bIns="0" anchor="ctr">
+            <a:spAutoFit/>
+          </a:bodyPr>
+          <a:lstStyle/>
+          <a:p>
+            <a:pPr algn="l"/>
+            <a:r>
+              <a:rPr sz="950" b="0" i="0">
+                <a:solidFill>
+                  <a:srgbClr val="4A6478"/>
+                </a:solidFill>
+                <a:latin typeface="Segoe UI"/>
+              </a:rPr>
+              <a:t>11</a:t>
+            </a:r>
+          </a:p>
+        </p:txBody>
+      </p:sp>
+      <p:sp>
+        <p:nvSpPr>
+          <p:cNvPr id="68" name="TextBox 75"/>
+          <p:cNvSpPr txBox="1"/>
+          <p:nvPr/>
+        </p:nvSpPr>
+        <p:spPr>
+          <a:xfrm>
+            <a:off x="9464040" y="4754880"/>
+            <a:ext cx="1490472" cy="457200"/>
+          </a:xfrm>
+          <a:prstGeom prst="rect">
+            <a:avLst/>
+          </a:prstGeom>
+          <a:noFill/>
+        </p:spPr>
+        <p:txBody>
+          <a:bodyPr wrap="square" lIns="0" rIns="0" tIns="0" bIns="0" anchor="t">
+            <a:spAutoFit/>
+          </a:bodyPr>
+          <a:lstStyle/>
+          <a:p>
+            <a:pPr algn="l"/>
+            <a:r>
+              <a:rPr sz="900" b="0" i="0">
+                <a:solidFill>
+                  <a:srgbClr val="9A3B1B"/>
+                </a:solidFill>
+                <a:latin typeface="Segoe UI"/>
+              </a:rPr>
+              <a:t>■ </a:t>
+            </a:r>
+            <a:r>
+              <a:rPr sz="900" b="0" i="0">
+                <a:solidFill>
+                  <a:srgbClr val="4A6478"/>
+                </a:solidFill>
+                <a:latin typeface="Segoe UI"/>
+              </a:rPr>
+              <a:t>meno di 50 flussi: quasi invisibili</a:t>
+            </a:r>
           </a:p>
         </p:txBody>
       </p:sp>
@@ -4527,7 +5131,7 @@
     </p:bg>
     <p:spTree>
       <p:nvGrpSpPr>
-        <p:cNvPr id="1" name=""/>
+        <p:cNvPr id="2" name=""/>
         <p:cNvGrpSpPr/>
         <p:nvPr/>
       </p:nvGrpSpPr>
@@ -4541,7 +5145,7 @@
       </p:grpSpPr>
       <p:sp>
         <p:nvSpPr>
-          <p:cNvPr id="2" name="Text 0"/>
+          <p:cNvPr id="3" name="Text 0"/>
           <p:cNvSpPr txBox="1"/>
           <p:nvPr/>
         </p:nvSpPr>
@@ -4580,7 +5184,7 @@
       </p:sp>
       <p:sp>
         <p:nvSpPr>
-          <p:cNvPr id="3" name="Shape 1"/>
+          <p:cNvPr id="4" name="Shape 1"/>
           <p:cNvSpPr/>
           <p:nvPr/>
         </p:nvSpPr>
@@ -4607,7 +5211,7 @@
       </p:sp>
       <p:pic>
         <p:nvPicPr>
-          <p:cNvPr id="4" name="Image 0" descr="Logo Unimore">    </p:cNvPr>
+          <p:cNvPr id="5" name="Image 0" descr="Logo Unimore">    </p:cNvPr>
           <p:cNvPicPr>
             <a:picLocks noChangeAspect="1"/>
           </p:cNvPicPr>
@@ -4631,7 +5235,7 @@
       </p:pic>
       <p:sp>
         <p:nvSpPr>
-          <p:cNvPr id="5" name="Text 2"/>
+          <p:cNvPr id="6" name="Text 2"/>
           <p:cNvSpPr/>
           <p:nvPr/>
         </p:nvSpPr>
@@ -4682,7 +5286,7 @@
       </p:sp>
       <p:sp>
         <p:nvSpPr>
-          <p:cNvPr id="6" name="Text 3"/>
+          <p:cNvPr id="7" name="Text 3"/>
           <p:cNvSpPr txBox="1"/>
           <p:nvPr/>
         </p:nvSpPr>
@@ -4735,7 +5339,7 @@
       </p:sp>
       <p:sp>
         <p:nvSpPr>
-          <p:cNvPr id="7" name="Shape 4"/>
+          <p:cNvPr id="8" name="Shape 4"/>
           <p:cNvSpPr/>
           <p:nvPr/>
         </p:nvSpPr>
@@ -4769,7 +5373,7 @@
       </p:sp>
       <p:sp>
         <p:nvSpPr>
-          <p:cNvPr id="8" name="Shape 5"/>
+          <p:cNvPr id="9" name="Shape 5"/>
           <p:cNvSpPr/>
           <p:nvPr/>
         </p:nvSpPr>
@@ -4796,7 +5400,7 @@
       </p:sp>
       <p:sp>
         <p:nvSpPr>
-          <p:cNvPr id="9" name="Text 6"/>
+          <p:cNvPr id="10" name="Text 6"/>
           <p:cNvSpPr txBox="1"/>
           <p:nvPr/>
         </p:nvSpPr>
@@ -7592,6 +8196,45 @@
                 <a:cs typeface="Georgia" pitchFamily="34" charset="-120"/>
               </a:rPr>
               <a:t>RF e XGBoost imparano gli attacchi. L'autoencoder impara solo il traffico normale.</a:t>
+            </a:r>
+            <a:endParaRPr lang="en-US" sz="1700" dirty="0"/>
+          </a:p>
+        </p:txBody>
+      </p:sp>
+      <p:sp>
+        <p:nvSpPr>
+          <p:cNvPr id="116" name="Text 111"/>
+          <p:cNvSpPr txBox="1"/>
+          <p:nvPr/>
+        </p:nvSpPr>
+        <p:spPr>
+          <a:xfrm>
+            <a:off x="1234440" y="6309360"/>
+            <a:ext cx="9000000" cy="274320"/>
+          </a:xfrm>
+          <a:prstGeom prst="rect">
+            <a:avLst/>
+          </a:prstGeom>
+          <a:noFill/>
+          <a:ln/>
+        </p:spPr>
+        <p:txBody>
+          <a:bodyPr wrap="square" lIns="0" tIns="0" rIns="0" bIns="0" rtlCol="0" anchor="t"/>
+          <a:lstStyle/>
+          <a:p>
+            <a:pPr algn="ctr" indent="0" marL="0">
+              <a:buNone/>
+            </a:pPr>
+            <a:r>
+              <a:rPr lang="en-US" sz="1200" i="1" dirty="0">
+                <a:solidFill>
+                  <a:srgbClr val="045991"/>
+                </a:solidFill>
+                <a:latin typeface="Georgia" pitchFamily="34" charset="0"/>
+                <a:ea typeface="Georgia" pitchFamily="34" charset="-122"/>
+                <a:cs typeface="Georgia" pitchFamily="34" charset="-120"/>
+              </a:rPr>
+              <a:t>Ensemble: errori complementari; punteggio = media dei due, ciascuno diviso per il suo 99° percentile (Benign)</a:t>
             </a:r>
             <a:endParaRPr lang="en-US" sz="1700" dirty="0"/>
           </a:p>
@@ -7624,7 +8267,7 @@
     </p:bg>
     <p:spTree>
       <p:nvGrpSpPr>
-        <p:cNvPr id="1" name=""/>
+        <p:cNvPr id="2" name=""/>
         <p:cNvGrpSpPr/>
         <p:nvPr/>
       </p:nvGrpSpPr>
@@ -7638,7 +8281,7 @@
       </p:grpSpPr>
       <p:sp>
         <p:nvSpPr>
-          <p:cNvPr id="2" name="Text 0"/>
+          <p:cNvPr id="3" name="Text 0"/>
           <p:cNvSpPr txBox="1"/>
           <p:nvPr/>
         </p:nvSpPr>
@@ -7677,7 +8320,7 @@
       </p:sp>
       <p:sp>
         <p:nvSpPr>
-          <p:cNvPr id="3" name="Shape 1"/>
+          <p:cNvPr id="4" name="Shape 1"/>
           <p:cNvSpPr/>
           <p:nvPr/>
         </p:nvSpPr>
@@ -7704,7 +8347,7 @@
       </p:sp>
       <p:pic>
         <p:nvPicPr>
-          <p:cNvPr id="4" name="Image 0" descr="Logo Unimore">    </p:cNvPr>
+          <p:cNvPr id="5" name="Image 0" descr="Logo Unimore">    </p:cNvPr>
           <p:cNvPicPr>
             <a:picLocks noChangeAspect="1"/>
           </p:cNvPicPr>
@@ -7728,7 +8371,7 @@
       </p:pic>
       <p:sp>
         <p:nvSpPr>
-          <p:cNvPr id="5" name="Text 2"/>
+          <p:cNvPr id="6" name="Text 2"/>
           <p:cNvSpPr/>
           <p:nvPr/>
         </p:nvSpPr>
@@ -7779,7 +8422,7 @@
       </p:sp>
       <p:sp>
         <p:nvSpPr>
-          <p:cNvPr id="6" name="Text 3"/>
+          <p:cNvPr id="7" name="Text 3"/>
           <p:cNvSpPr txBox="1"/>
           <p:nvPr/>
         </p:nvSpPr>
@@ -7832,7 +8475,7 @@
       </p:sp>
       <p:sp>
         <p:nvSpPr>
-          <p:cNvPr id="7" name="Shape 4"/>
+          <p:cNvPr id="8" name="Shape 4"/>
           <p:cNvSpPr/>
           <p:nvPr/>
         </p:nvSpPr>
@@ -7866,7 +8509,7 @@
       </p:sp>
       <p:sp>
         <p:nvSpPr>
-          <p:cNvPr id="8" name="Shape 5"/>
+          <p:cNvPr id="9" name="Shape 5"/>
           <p:cNvSpPr/>
           <p:nvPr/>
         </p:nvSpPr>
@@ -7893,7 +8536,7 @@
       </p:sp>
       <p:sp>
         <p:nvSpPr>
-          <p:cNvPr id="9" name="Text 6"/>
+          <p:cNvPr id="10" name="Text 6"/>
           <p:cNvSpPr txBox="1"/>
           <p:nvPr/>
         </p:nvSpPr>
@@ -9266,7 +9909,7 @@
                 <a:ea typeface="Segoe UI" pitchFamily="34" charset="-122"/>
                 <a:cs typeface="Segoe UI" pitchFamily="34" charset="-120"/>
               </a:rPr>
-              <a:t>Analisi offline di flussi registrati: CIC-IDS2017 e cattura al router della simulazione Docker. Non in tempo reale.</a:t>
+              <a:t>Analisi offline di flussi registrati: CIC-IDS2017. Non in tempo reale.</a:t>
             </a:r>
             <a:endParaRPr lang="en-US" sz="1200" dirty="0"/>
           </a:p>
@@ -9305,219 +9948,2611 @@
                 <a:ea typeface="Segoe UI Semibold" pitchFamily="34" charset="-122"/>
                 <a:cs typeface="Segoe UI Semibold" pitchFamily="34" charset="-120"/>
               </a:rPr>
-              <a:t>TRAINING E VALIDAZIONE</a:t>
+              <a:t>ERRORE DI RICOSTRUZIONE · AUTOENCODER SOLO SU BENIGN</a:t>
             </a:r>
             <a:endParaRPr lang="en-US" sz="1050" dirty="0"/>
           </a:p>
         </p:txBody>
       </p:sp>
-      <p:sp>
-        <p:nvSpPr>
-          <p:cNvPr id="51" name="Shape 47"/>
-          <p:cNvSpPr/>
-          <p:nvPr/>
-        </p:nvSpPr>
-        <p:spPr>
-          <a:xfrm>
-            <a:off x="4536338" y="5285232"/>
-            <a:ext cx="3119018" cy="1188720"/>
-          </a:xfrm>
-          <a:prstGeom prst="roundRect">
-            <a:avLst>
-              <a:gd name="adj" fmla="val 10769"/>
-            </a:avLst>
-          </a:prstGeom>
-          <a:solidFill>
-            <a:srgbClr val="FFFFFF"/>
-          </a:solidFill>
-          <a:ln w="9525">
-            <a:solidFill>
-              <a:srgbClr val="D6E3EC"/>
-            </a:solidFill>
-            <a:prstDash val="solid"/>
-          </a:ln>
-        </p:spPr>
-      </p:sp>
-      <p:sp>
-        <p:nvSpPr>
-          <p:cNvPr id="52" name="Text 48"/>
+      <p:cxnSp>
+        <p:nvCxnSpPr>
+          <p:cNvPr id="51" name="Connector 50"/>
+          <p:cNvCxnSpPr/>
+          <p:nvPr/>
+        </p:nvCxnSpPr>
+        <p:spPr>
+          <a:xfrm>
+            <a:off x="4663440" y="6126480"/>
+            <a:ext cx="6263640" cy="0"/>
+          </a:xfrm>
+          <a:prstGeom prst="line">
+            <a:avLst/>
+          </a:prstGeom>
+          <a:ln w="12700">
+            <a:solidFill>
+              <a:srgbClr val="84A0B4"/>
+            </a:solidFill>
+          </a:ln>
+        </p:spPr>
+        <p:style>
+          <a:lnRef idx="2">
+            <a:schemeClr val="accent1"/>
+          </a:lnRef>
+          <a:fillRef idx="0">
+            <a:schemeClr val="accent1"/>
+          </a:fillRef>
+          <a:effectRef idx="1">
+            <a:schemeClr val="accent1"/>
+          </a:effectRef>
+          <a:fontRef idx="minor">
+            <a:schemeClr val="tx1"/>
+          </a:fontRef>
+        </p:style>
+      </p:cxnSp>
+      <p:sp>
+        <p:nvSpPr>
+          <p:cNvPr id="52" name="Rectangle 51"/>
+          <p:cNvSpPr/>
+          <p:nvPr/>
+        </p:nvSpPr>
+        <p:spPr>
+          <a:xfrm>
+            <a:off x="4663440" y="5977427"/>
+            <a:ext cx="150327" cy="149053"/>
+          </a:xfrm>
+          <a:prstGeom prst="rect">
+            <a:avLst/>
+          </a:prstGeom>
+          <a:solidFill>
+            <a:srgbClr val="0C649C">
+              <a:alpha val="55000"/>
+            </a:srgbClr>
+          </a:solidFill>
+          <a:ln>
+            <a:noFill/>
+          </a:ln>
+          <a:effectLst/>
+        </p:spPr>
+        <p:style>
+          <a:lnRef idx="1">
+            <a:schemeClr val="accent1"/>
+          </a:lnRef>
+          <a:fillRef idx="3">
+            <a:schemeClr val="accent1"/>
+          </a:fillRef>
+          <a:effectRef idx="2">
+            <a:schemeClr val="accent1"/>
+          </a:effectRef>
+          <a:fontRef idx="minor">
+            <a:schemeClr val="lt1"/>
+          </a:fontRef>
+        </p:style>
+        <p:txBody>
+          <a:bodyPr rtlCol="0" anchor="ctr"/>
+          <a:lstStyle/>
+          <a:p/>
+        </p:txBody>
+      </p:sp>
+      <p:sp>
+        <p:nvSpPr>
+          <p:cNvPr id="53" name="Rectangle 52"/>
+          <p:cNvSpPr/>
+          <p:nvPr/>
+        </p:nvSpPr>
+        <p:spPr>
+          <a:xfrm>
+            <a:off x="4820031" y="5951017"/>
+            <a:ext cx="150327" cy="175463"/>
+          </a:xfrm>
+          <a:prstGeom prst="rect">
+            <a:avLst/>
+          </a:prstGeom>
+          <a:solidFill>
+            <a:srgbClr val="0C649C">
+              <a:alpha val="55000"/>
+            </a:srgbClr>
+          </a:solidFill>
+          <a:ln>
+            <a:noFill/>
+          </a:ln>
+          <a:effectLst/>
+        </p:spPr>
+        <p:style>
+          <a:lnRef idx="1">
+            <a:schemeClr val="accent1"/>
+          </a:lnRef>
+          <a:fillRef idx="3">
+            <a:schemeClr val="accent1"/>
+          </a:fillRef>
+          <a:effectRef idx="2">
+            <a:schemeClr val="accent1"/>
+          </a:effectRef>
+          <a:fontRef idx="minor">
+            <a:schemeClr val="lt1"/>
+          </a:fontRef>
+        </p:style>
+        <p:txBody>
+          <a:bodyPr rtlCol="0" anchor="ctr"/>
+          <a:lstStyle/>
+          <a:p/>
+        </p:txBody>
+      </p:sp>
+      <p:sp>
+        <p:nvSpPr>
+          <p:cNvPr id="54" name="Rectangle 53"/>
+          <p:cNvSpPr/>
+          <p:nvPr/>
+        </p:nvSpPr>
+        <p:spPr>
+          <a:xfrm>
+            <a:off x="4976622" y="5938019"/>
+            <a:ext cx="150327" cy="188461"/>
+          </a:xfrm>
+          <a:prstGeom prst="rect">
+            <a:avLst/>
+          </a:prstGeom>
+          <a:solidFill>
+            <a:srgbClr val="0C649C">
+              <a:alpha val="55000"/>
+            </a:srgbClr>
+          </a:solidFill>
+          <a:ln>
+            <a:noFill/>
+          </a:ln>
+          <a:effectLst/>
+        </p:spPr>
+        <p:style>
+          <a:lnRef idx="1">
+            <a:schemeClr val="accent1"/>
+          </a:lnRef>
+          <a:fillRef idx="3">
+            <a:schemeClr val="accent1"/>
+          </a:fillRef>
+          <a:effectRef idx="2">
+            <a:schemeClr val="accent1"/>
+          </a:effectRef>
+          <a:fontRef idx="minor">
+            <a:schemeClr val="lt1"/>
+          </a:fontRef>
+        </p:style>
+        <p:txBody>
+          <a:bodyPr rtlCol="0" anchor="ctr"/>
+          <a:lstStyle/>
+          <a:p/>
+        </p:txBody>
+      </p:sp>
+      <p:sp>
+        <p:nvSpPr>
+          <p:cNvPr id="55" name="Rectangle 54"/>
+          <p:cNvSpPr/>
+          <p:nvPr/>
+        </p:nvSpPr>
+        <p:spPr>
+          <a:xfrm>
+            <a:off x="5133213" y="5908433"/>
+            <a:ext cx="150327" cy="218047"/>
+          </a:xfrm>
+          <a:prstGeom prst="rect">
+            <a:avLst/>
+          </a:prstGeom>
+          <a:solidFill>
+            <a:srgbClr val="0C649C">
+              <a:alpha val="55000"/>
+            </a:srgbClr>
+          </a:solidFill>
+          <a:ln>
+            <a:noFill/>
+          </a:ln>
+          <a:effectLst/>
+        </p:spPr>
+        <p:style>
+          <a:lnRef idx="1">
+            <a:schemeClr val="accent1"/>
+          </a:lnRef>
+          <a:fillRef idx="3">
+            <a:schemeClr val="accent1"/>
+          </a:fillRef>
+          <a:effectRef idx="2">
+            <a:schemeClr val="accent1"/>
+          </a:effectRef>
+          <a:fontRef idx="minor">
+            <a:schemeClr val="lt1"/>
+          </a:fontRef>
+        </p:style>
+        <p:txBody>
+          <a:bodyPr rtlCol="0" anchor="ctr"/>
+          <a:lstStyle/>
+          <a:p/>
+        </p:txBody>
+      </p:sp>
+      <p:sp>
+        <p:nvSpPr>
+          <p:cNvPr id="56" name="Rectangle 55"/>
+          <p:cNvSpPr/>
+          <p:nvPr/>
+        </p:nvSpPr>
+        <p:spPr>
+          <a:xfrm>
+            <a:off x="5289804" y="5863570"/>
+            <a:ext cx="150327" cy="262910"/>
+          </a:xfrm>
+          <a:prstGeom prst="rect">
+            <a:avLst/>
+          </a:prstGeom>
+          <a:solidFill>
+            <a:srgbClr val="0C649C">
+              <a:alpha val="55000"/>
+            </a:srgbClr>
+          </a:solidFill>
+          <a:ln>
+            <a:noFill/>
+          </a:ln>
+          <a:effectLst/>
+        </p:spPr>
+        <p:style>
+          <a:lnRef idx="1">
+            <a:schemeClr val="accent1"/>
+          </a:lnRef>
+          <a:fillRef idx="3">
+            <a:schemeClr val="accent1"/>
+          </a:fillRef>
+          <a:effectRef idx="2">
+            <a:schemeClr val="accent1"/>
+          </a:effectRef>
+          <a:fontRef idx="minor">
+            <a:schemeClr val="lt1"/>
+          </a:fontRef>
+        </p:style>
+        <p:txBody>
+          <a:bodyPr rtlCol="0" anchor="ctr"/>
+          <a:lstStyle/>
+          <a:p/>
+        </p:txBody>
+      </p:sp>
+      <p:sp>
+        <p:nvSpPr>
+          <p:cNvPr id="57" name="Rectangle 56"/>
+          <p:cNvSpPr/>
+          <p:nvPr/>
+        </p:nvSpPr>
+        <p:spPr>
+          <a:xfrm>
+            <a:off x="5446395" y="5932547"/>
+            <a:ext cx="150327" cy="193933"/>
+          </a:xfrm>
+          <a:prstGeom prst="rect">
+            <a:avLst/>
+          </a:prstGeom>
+          <a:solidFill>
+            <a:srgbClr val="0C649C">
+              <a:alpha val="55000"/>
+            </a:srgbClr>
+          </a:solidFill>
+          <a:ln>
+            <a:noFill/>
+          </a:ln>
+          <a:effectLst/>
+        </p:spPr>
+        <p:style>
+          <a:lnRef idx="1">
+            <a:schemeClr val="accent1"/>
+          </a:lnRef>
+          <a:fillRef idx="3">
+            <a:schemeClr val="accent1"/>
+          </a:fillRef>
+          <a:effectRef idx="2">
+            <a:schemeClr val="accent1"/>
+          </a:effectRef>
+          <a:fontRef idx="minor">
+            <a:schemeClr val="lt1"/>
+          </a:fontRef>
+        </p:style>
+        <p:txBody>
+          <a:bodyPr rtlCol="0" anchor="ctr"/>
+          <a:lstStyle/>
+          <a:p/>
+        </p:txBody>
+      </p:sp>
+      <p:sp>
+        <p:nvSpPr>
+          <p:cNvPr id="58" name="Rectangle 57"/>
+          <p:cNvSpPr/>
+          <p:nvPr/>
+        </p:nvSpPr>
+        <p:spPr>
+          <a:xfrm>
+            <a:off x="5602986" y="5986938"/>
+            <a:ext cx="150327" cy="139542"/>
+          </a:xfrm>
+          <a:prstGeom prst="rect">
+            <a:avLst/>
+          </a:prstGeom>
+          <a:solidFill>
+            <a:srgbClr val="0C649C">
+              <a:alpha val="55000"/>
+            </a:srgbClr>
+          </a:solidFill>
+          <a:ln>
+            <a:noFill/>
+          </a:ln>
+          <a:effectLst/>
+        </p:spPr>
+        <p:style>
+          <a:lnRef idx="1">
+            <a:schemeClr val="accent1"/>
+          </a:lnRef>
+          <a:fillRef idx="3">
+            <a:schemeClr val="accent1"/>
+          </a:fillRef>
+          <a:effectRef idx="2">
+            <a:schemeClr val="accent1"/>
+          </a:effectRef>
+          <a:fontRef idx="minor">
+            <a:schemeClr val="lt1"/>
+          </a:fontRef>
+        </p:style>
+        <p:txBody>
+          <a:bodyPr rtlCol="0" anchor="ctr"/>
+          <a:lstStyle/>
+          <a:p/>
+        </p:txBody>
+      </p:sp>
+      <p:sp>
+        <p:nvSpPr>
+          <p:cNvPr id="59" name="Rectangle 58"/>
+          <p:cNvSpPr/>
+          <p:nvPr/>
+        </p:nvSpPr>
+        <p:spPr>
+          <a:xfrm>
+            <a:off x="5759577" y="5834934"/>
+            <a:ext cx="150327" cy="291546"/>
+          </a:xfrm>
+          <a:prstGeom prst="rect">
+            <a:avLst/>
+          </a:prstGeom>
+          <a:solidFill>
+            <a:srgbClr val="0C649C">
+              <a:alpha val="55000"/>
+            </a:srgbClr>
+          </a:solidFill>
+          <a:ln>
+            <a:noFill/>
+          </a:ln>
+          <a:effectLst/>
+        </p:spPr>
+        <p:style>
+          <a:lnRef idx="1">
+            <a:schemeClr val="accent1"/>
+          </a:lnRef>
+          <a:fillRef idx="3">
+            <a:schemeClr val="accent1"/>
+          </a:fillRef>
+          <a:effectRef idx="2">
+            <a:schemeClr val="accent1"/>
+          </a:effectRef>
+          <a:fontRef idx="minor">
+            <a:schemeClr val="lt1"/>
+          </a:fontRef>
+        </p:style>
+        <p:txBody>
+          <a:bodyPr rtlCol="0" anchor="ctr"/>
+          <a:lstStyle/>
+          <a:p/>
+        </p:txBody>
+      </p:sp>
+      <p:sp>
+        <p:nvSpPr>
+          <p:cNvPr id="60" name="Rectangle 59"/>
+          <p:cNvSpPr/>
+          <p:nvPr/>
+        </p:nvSpPr>
+        <p:spPr>
+          <a:xfrm>
+            <a:off x="5759577" y="6108692"/>
+            <a:ext cx="150327" cy="17788"/>
+          </a:xfrm>
+          <a:prstGeom prst="rect">
+            <a:avLst/>
+          </a:prstGeom>
+          <a:solidFill>
+            <a:srgbClr val="C98A3E">
+              <a:alpha val="55000"/>
+            </a:srgbClr>
+          </a:solidFill>
+          <a:ln>
+            <a:noFill/>
+          </a:ln>
+          <a:effectLst/>
+        </p:spPr>
+        <p:style>
+          <a:lnRef idx="1">
+            <a:schemeClr val="accent1"/>
+          </a:lnRef>
+          <a:fillRef idx="3">
+            <a:schemeClr val="accent1"/>
+          </a:fillRef>
+          <a:effectRef idx="2">
+            <a:schemeClr val="accent1"/>
+          </a:effectRef>
+          <a:fontRef idx="minor">
+            <a:schemeClr val="lt1"/>
+          </a:fontRef>
+        </p:style>
+        <p:txBody>
+          <a:bodyPr rtlCol="0" anchor="ctr"/>
+          <a:lstStyle/>
+          <a:p/>
+        </p:txBody>
+      </p:sp>
+      <p:sp>
+        <p:nvSpPr>
+          <p:cNvPr id="61" name="Rectangle 60"/>
+          <p:cNvSpPr/>
+          <p:nvPr/>
+        </p:nvSpPr>
+        <p:spPr>
+          <a:xfrm>
+            <a:off x="5916168" y="5734713"/>
+            <a:ext cx="150327" cy="391767"/>
+          </a:xfrm>
+          <a:prstGeom prst="rect">
+            <a:avLst/>
+          </a:prstGeom>
+          <a:solidFill>
+            <a:srgbClr val="0C649C">
+              <a:alpha val="55000"/>
+            </a:srgbClr>
+          </a:solidFill>
+          <a:ln>
+            <a:noFill/>
+          </a:ln>
+          <a:effectLst/>
+        </p:spPr>
+        <p:style>
+          <a:lnRef idx="1">
+            <a:schemeClr val="accent1"/>
+          </a:lnRef>
+          <a:fillRef idx="3">
+            <a:schemeClr val="accent1"/>
+          </a:fillRef>
+          <a:effectRef idx="2">
+            <a:schemeClr val="accent1"/>
+          </a:effectRef>
+          <a:fontRef idx="minor">
+            <a:schemeClr val="lt1"/>
+          </a:fontRef>
+        </p:style>
+        <p:txBody>
+          <a:bodyPr rtlCol="0" anchor="ctr"/>
+          <a:lstStyle/>
+          <a:p/>
+        </p:txBody>
+      </p:sp>
+      <p:sp>
+        <p:nvSpPr>
+          <p:cNvPr id="62" name="Rectangle 61"/>
+          <p:cNvSpPr/>
+          <p:nvPr/>
+        </p:nvSpPr>
+        <p:spPr>
+          <a:xfrm>
+            <a:off x="5916168" y="5970140"/>
+            <a:ext cx="150327" cy="156340"/>
+          </a:xfrm>
+          <a:prstGeom prst="rect">
+            <a:avLst/>
+          </a:prstGeom>
+          <a:solidFill>
+            <a:srgbClr val="C98A3E">
+              <a:alpha val="55000"/>
+            </a:srgbClr>
+          </a:solidFill>
+          <a:ln>
+            <a:noFill/>
+          </a:ln>
+          <a:effectLst/>
+        </p:spPr>
+        <p:style>
+          <a:lnRef idx="1">
+            <a:schemeClr val="accent1"/>
+          </a:lnRef>
+          <a:fillRef idx="3">
+            <a:schemeClr val="accent1"/>
+          </a:fillRef>
+          <a:effectRef idx="2">
+            <a:schemeClr val="accent1"/>
+          </a:effectRef>
+          <a:fontRef idx="minor">
+            <a:schemeClr val="lt1"/>
+          </a:fontRef>
+        </p:style>
+        <p:txBody>
+          <a:bodyPr rtlCol="0" anchor="ctr"/>
+          <a:lstStyle/>
+          <a:p/>
+        </p:txBody>
+      </p:sp>
+      <p:sp>
+        <p:nvSpPr>
+          <p:cNvPr id="63" name="Rectangle 62"/>
+          <p:cNvSpPr/>
+          <p:nvPr/>
+        </p:nvSpPr>
+        <p:spPr>
+          <a:xfrm>
+            <a:off x="6072759" y="5760916"/>
+            <a:ext cx="150327" cy="365564"/>
+          </a:xfrm>
+          <a:prstGeom prst="rect">
+            <a:avLst/>
+          </a:prstGeom>
+          <a:solidFill>
+            <a:srgbClr val="0C649C">
+              <a:alpha val="55000"/>
+            </a:srgbClr>
+          </a:solidFill>
+          <a:ln>
+            <a:noFill/>
+          </a:ln>
+          <a:effectLst/>
+        </p:spPr>
+        <p:style>
+          <a:lnRef idx="1">
+            <a:schemeClr val="accent1"/>
+          </a:lnRef>
+          <a:fillRef idx="3">
+            <a:schemeClr val="accent1"/>
+          </a:fillRef>
+          <a:effectRef idx="2">
+            <a:schemeClr val="accent1"/>
+          </a:effectRef>
+          <a:fontRef idx="minor">
+            <a:schemeClr val="lt1"/>
+          </a:fontRef>
+        </p:style>
+        <p:txBody>
+          <a:bodyPr rtlCol="0" anchor="ctr"/>
+          <a:lstStyle/>
+          <a:p/>
+        </p:txBody>
+      </p:sp>
+      <p:sp>
+        <p:nvSpPr>
+          <p:cNvPr id="64" name="Rectangle 63"/>
+          <p:cNvSpPr/>
+          <p:nvPr/>
+        </p:nvSpPr>
+        <p:spPr>
+          <a:xfrm>
+            <a:off x="6072759" y="5917942"/>
+            <a:ext cx="150327" cy="208538"/>
+          </a:xfrm>
+          <a:prstGeom prst="rect">
+            <a:avLst/>
+          </a:prstGeom>
+          <a:solidFill>
+            <a:srgbClr val="C98A3E">
+              <a:alpha val="55000"/>
+            </a:srgbClr>
+          </a:solidFill>
+          <a:ln>
+            <a:noFill/>
+          </a:ln>
+          <a:effectLst/>
+        </p:spPr>
+        <p:style>
+          <a:lnRef idx="1">
+            <a:schemeClr val="accent1"/>
+          </a:lnRef>
+          <a:fillRef idx="3">
+            <a:schemeClr val="accent1"/>
+          </a:fillRef>
+          <a:effectRef idx="2">
+            <a:schemeClr val="accent1"/>
+          </a:effectRef>
+          <a:fontRef idx="minor">
+            <a:schemeClr val="lt1"/>
+          </a:fontRef>
+        </p:style>
+        <p:txBody>
+          <a:bodyPr rtlCol="0" anchor="ctr"/>
+          <a:lstStyle/>
+          <a:p/>
+        </p:txBody>
+      </p:sp>
+      <p:sp>
+        <p:nvSpPr>
+          <p:cNvPr id="65" name="Rectangle 64"/>
+          <p:cNvSpPr/>
+          <p:nvPr/>
+        </p:nvSpPr>
+        <p:spPr>
+          <a:xfrm>
+            <a:off x="6229350" y="5833699"/>
+            <a:ext cx="150327" cy="292781"/>
+          </a:xfrm>
+          <a:prstGeom prst="rect">
+            <a:avLst/>
+          </a:prstGeom>
+          <a:solidFill>
+            <a:srgbClr val="0C649C">
+              <a:alpha val="55000"/>
+            </a:srgbClr>
+          </a:solidFill>
+          <a:ln>
+            <a:noFill/>
+          </a:ln>
+          <a:effectLst/>
+        </p:spPr>
+        <p:style>
+          <a:lnRef idx="1">
+            <a:schemeClr val="accent1"/>
+          </a:lnRef>
+          <a:fillRef idx="3">
+            <a:schemeClr val="accent1"/>
+          </a:fillRef>
+          <a:effectRef idx="2">
+            <a:schemeClr val="accent1"/>
+          </a:effectRef>
+          <a:fontRef idx="minor">
+            <a:schemeClr val="lt1"/>
+          </a:fontRef>
+        </p:style>
+        <p:txBody>
+          <a:bodyPr rtlCol="0" anchor="ctr"/>
+          <a:lstStyle/>
+          <a:p/>
+        </p:txBody>
+      </p:sp>
+      <p:sp>
+        <p:nvSpPr>
+          <p:cNvPr id="66" name="Rectangle 65"/>
+          <p:cNvSpPr/>
+          <p:nvPr/>
+        </p:nvSpPr>
+        <p:spPr>
+          <a:xfrm>
+            <a:off x="6229350" y="5940798"/>
+            <a:ext cx="150327" cy="185682"/>
+          </a:xfrm>
+          <a:prstGeom prst="rect">
+            <a:avLst/>
+          </a:prstGeom>
+          <a:solidFill>
+            <a:srgbClr val="C98A3E">
+              <a:alpha val="55000"/>
+            </a:srgbClr>
+          </a:solidFill>
+          <a:ln>
+            <a:noFill/>
+          </a:ln>
+          <a:effectLst/>
+        </p:spPr>
+        <p:style>
+          <a:lnRef idx="1">
+            <a:schemeClr val="accent1"/>
+          </a:lnRef>
+          <a:fillRef idx="3">
+            <a:schemeClr val="accent1"/>
+          </a:fillRef>
+          <a:effectRef idx="2">
+            <a:schemeClr val="accent1"/>
+          </a:effectRef>
+          <a:fontRef idx="minor">
+            <a:schemeClr val="lt1"/>
+          </a:fontRef>
+        </p:style>
+        <p:txBody>
+          <a:bodyPr rtlCol="0" anchor="ctr"/>
+          <a:lstStyle/>
+          <a:p/>
+        </p:txBody>
+      </p:sp>
+      <p:sp>
+        <p:nvSpPr>
+          <p:cNvPr id="67" name="Rectangle 66"/>
+          <p:cNvSpPr/>
+          <p:nvPr/>
+        </p:nvSpPr>
+        <p:spPr>
+          <a:xfrm>
+            <a:off x="6385941" y="5892544"/>
+            <a:ext cx="150327" cy="233936"/>
+          </a:xfrm>
+          <a:prstGeom prst="rect">
+            <a:avLst/>
+          </a:prstGeom>
+          <a:solidFill>
+            <a:srgbClr val="0C649C">
+              <a:alpha val="55000"/>
+            </a:srgbClr>
+          </a:solidFill>
+          <a:ln>
+            <a:noFill/>
+          </a:ln>
+          <a:effectLst/>
+        </p:spPr>
+        <p:style>
+          <a:lnRef idx="1">
+            <a:schemeClr val="accent1"/>
+          </a:lnRef>
+          <a:fillRef idx="3">
+            <a:schemeClr val="accent1"/>
+          </a:fillRef>
+          <a:effectRef idx="2">
+            <a:schemeClr val="accent1"/>
+          </a:effectRef>
+          <a:fontRef idx="minor">
+            <a:schemeClr val="lt1"/>
+          </a:fontRef>
+        </p:style>
+        <p:txBody>
+          <a:bodyPr rtlCol="0" anchor="ctr"/>
+          <a:lstStyle/>
+          <a:p/>
+        </p:txBody>
+      </p:sp>
+      <p:sp>
+        <p:nvSpPr>
+          <p:cNvPr id="68" name="Rectangle 67"/>
+          <p:cNvSpPr/>
+          <p:nvPr/>
+        </p:nvSpPr>
+        <p:spPr>
+          <a:xfrm>
+            <a:off x="6385941" y="6033386"/>
+            <a:ext cx="150327" cy="93094"/>
+          </a:xfrm>
+          <a:prstGeom prst="rect">
+            <a:avLst/>
+          </a:prstGeom>
+          <a:solidFill>
+            <a:srgbClr val="C98A3E">
+              <a:alpha val="55000"/>
+            </a:srgbClr>
+          </a:solidFill>
+          <a:ln>
+            <a:noFill/>
+          </a:ln>
+          <a:effectLst/>
+        </p:spPr>
+        <p:style>
+          <a:lnRef idx="1">
+            <a:schemeClr val="accent1"/>
+          </a:lnRef>
+          <a:fillRef idx="3">
+            <a:schemeClr val="accent1"/>
+          </a:fillRef>
+          <a:effectRef idx="2">
+            <a:schemeClr val="accent1"/>
+          </a:effectRef>
+          <a:fontRef idx="minor">
+            <a:schemeClr val="lt1"/>
+          </a:fontRef>
+        </p:style>
+        <p:txBody>
+          <a:bodyPr rtlCol="0" anchor="ctr"/>
+          <a:lstStyle/>
+          <a:p/>
+        </p:txBody>
+      </p:sp>
+      <p:sp>
+        <p:nvSpPr>
+          <p:cNvPr id="69" name="Rectangle 68"/>
+          <p:cNvSpPr/>
+          <p:nvPr/>
+        </p:nvSpPr>
+        <p:spPr>
+          <a:xfrm>
+            <a:off x="6542532" y="5985229"/>
+            <a:ext cx="150327" cy="141251"/>
+          </a:xfrm>
+          <a:prstGeom prst="rect">
+            <a:avLst/>
+          </a:prstGeom>
+          <a:solidFill>
+            <a:srgbClr val="0C649C">
+              <a:alpha val="55000"/>
+            </a:srgbClr>
+          </a:solidFill>
+          <a:ln>
+            <a:noFill/>
+          </a:ln>
+          <a:effectLst/>
+        </p:spPr>
+        <p:style>
+          <a:lnRef idx="1">
+            <a:schemeClr val="accent1"/>
+          </a:lnRef>
+          <a:fillRef idx="3">
+            <a:schemeClr val="accent1"/>
+          </a:fillRef>
+          <a:effectRef idx="2">
+            <a:schemeClr val="accent1"/>
+          </a:effectRef>
+          <a:fontRef idx="minor">
+            <a:schemeClr val="lt1"/>
+          </a:fontRef>
+        </p:style>
+        <p:txBody>
+          <a:bodyPr rtlCol="0" anchor="ctr"/>
+          <a:lstStyle/>
+          <a:p/>
+        </p:txBody>
+      </p:sp>
+      <p:sp>
+        <p:nvSpPr>
+          <p:cNvPr id="70" name="Rectangle 69"/>
+          <p:cNvSpPr/>
+          <p:nvPr/>
+        </p:nvSpPr>
+        <p:spPr>
+          <a:xfrm>
+            <a:off x="6542532" y="5970444"/>
+            <a:ext cx="150327" cy="156036"/>
+          </a:xfrm>
+          <a:prstGeom prst="rect">
+            <a:avLst/>
+          </a:prstGeom>
+          <a:solidFill>
+            <a:srgbClr val="C98A3E">
+              <a:alpha val="55000"/>
+            </a:srgbClr>
+          </a:solidFill>
+          <a:ln>
+            <a:noFill/>
+          </a:ln>
+          <a:effectLst/>
+        </p:spPr>
+        <p:style>
+          <a:lnRef idx="1">
+            <a:schemeClr val="accent1"/>
+          </a:lnRef>
+          <a:fillRef idx="3">
+            <a:schemeClr val="accent1"/>
+          </a:fillRef>
+          <a:effectRef idx="2">
+            <a:schemeClr val="accent1"/>
+          </a:effectRef>
+          <a:fontRef idx="minor">
+            <a:schemeClr val="lt1"/>
+          </a:fontRef>
+        </p:style>
+        <p:txBody>
+          <a:bodyPr rtlCol="0" anchor="ctr"/>
+          <a:lstStyle/>
+          <a:p/>
+        </p:txBody>
+      </p:sp>
+      <p:sp>
+        <p:nvSpPr>
+          <p:cNvPr id="71" name="Rectangle 70"/>
+          <p:cNvSpPr/>
+          <p:nvPr/>
+        </p:nvSpPr>
+        <p:spPr>
+          <a:xfrm>
+            <a:off x="6699123" y="6018881"/>
+            <a:ext cx="150327" cy="107599"/>
+          </a:xfrm>
+          <a:prstGeom prst="rect">
+            <a:avLst/>
+          </a:prstGeom>
+          <a:solidFill>
+            <a:srgbClr val="0C649C">
+              <a:alpha val="55000"/>
+            </a:srgbClr>
+          </a:solidFill>
+          <a:ln>
+            <a:noFill/>
+          </a:ln>
+          <a:effectLst/>
+        </p:spPr>
+        <p:style>
+          <a:lnRef idx="1">
+            <a:schemeClr val="accent1"/>
+          </a:lnRef>
+          <a:fillRef idx="3">
+            <a:schemeClr val="accent1"/>
+          </a:fillRef>
+          <a:effectRef idx="2">
+            <a:schemeClr val="accent1"/>
+          </a:effectRef>
+          <a:fontRef idx="minor">
+            <a:schemeClr val="lt1"/>
+          </a:fontRef>
+        </p:style>
+        <p:txBody>
+          <a:bodyPr rtlCol="0" anchor="ctr"/>
+          <a:lstStyle/>
+          <a:p/>
+        </p:txBody>
+      </p:sp>
+      <p:sp>
+        <p:nvSpPr>
+          <p:cNvPr id="72" name="Rectangle 71"/>
+          <p:cNvSpPr/>
+          <p:nvPr/>
+        </p:nvSpPr>
+        <p:spPr>
+          <a:xfrm>
+            <a:off x="6699123" y="6115280"/>
+            <a:ext cx="150327" cy="11200"/>
+          </a:xfrm>
+          <a:prstGeom prst="rect">
+            <a:avLst/>
+          </a:prstGeom>
+          <a:solidFill>
+            <a:srgbClr val="C98A3E">
+              <a:alpha val="55000"/>
+            </a:srgbClr>
+          </a:solidFill>
+          <a:ln>
+            <a:noFill/>
+          </a:ln>
+          <a:effectLst/>
+        </p:spPr>
+        <p:style>
+          <a:lnRef idx="1">
+            <a:schemeClr val="accent1"/>
+          </a:lnRef>
+          <a:fillRef idx="3">
+            <a:schemeClr val="accent1"/>
+          </a:fillRef>
+          <a:effectRef idx="2">
+            <a:schemeClr val="accent1"/>
+          </a:effectRef>
+          <a:fontRef idx="minor">
+            <a:schemeClr val="lt1"/>
+          </a:fontRef>
+        </p:style>
+        <p:txBody>
+          <a:bodyPr rtlCol="0" anchor="ctr"/>
+          <a:lstStyle/>
+          <a:p/>
+        </p:txBody>
+      </p:sp>
+      <p:sp>
+        <p:nvSpPr>
+          <p:cNvPr id="73" name="Rectangle 72"/>
+          <p:cNvSpPr/>
+          <p:nvPr/>
+        </p:nvSpPr>
+        <p:spPr>
+          <a:xfrm>
+            <a:off x="6855714" y="6053162"/>
+            <a:ext cx="150327" cy="73318"/>
+          </a:xfrm>
+          <a:prstGeom prst="rect">
+            <a:avLst/>
+          </a:prstGeom>
+          <a:solidFill>
+            <a:srgbClr val="0C649C">
+              <a:alpha val="55000"/>
+            </a:srgbClr>
+          </a:solidFill>
+          <a:ln>
+            <a:noFill/>
+          </a:ln>
+          <a:effectLst/>
+        </p:spPr>
+        <p:style>
+          <a:lnRef idx="1">
+            <a:schemeClr val="accent1"/>
+          </a:lnRef>
+          <a:fillRef idx="3">
+            <a:schemeClr val="accent1"/>
+          </a:fillRef>
+          <a:effectRef idx="2">
+            <a:schemeClr val="accent1"/>
+          </a:effectRef>
+          <a:fontRef idx="minor">
+            <a:schemeClr val="lt1"/>
+          </a:fontRef>
+        </p:style>
+        <p:txBody>
+          <a:bodyPr rtlCol="0" anchor="ctr"/>
+          <a:lstStyle/>
+          <a:p/>
+        </p:txBody>
+      </p:sp>
+      <p:sp>
+        <p:nvSpPr>
+          <p:cNvPr id="74" name="Rectangle 73"/>
+          <p:cNvSpPr/>
+          <p:nvPr/>
+        </p:nvSpPr>
+        <p:spPr>
+          <a:xfrm>
+            <a:off x="6855714" y="6065718"/>
+            <a:ext cx="150327" cy="60762"/>
+          </a:xfrm>
+          <a:prstGeom prst="rect">
+            <a:avLst/>
+          </a:prstGeom>
+          <a:solidFill>
+            <a:srgbClr val="C98A3E">
+              <a:alpha val="55000"/>
+            </a:srgbClr>
+          </a:solidFill>
+          <a:ln>
+            <a:noFill/>
+          </a:ln>
+          <a:effectLst/>
+        </p:spPr>
+        <p:style>
+          <a:lnRef idx="1">
+            <a:schemeClr val="accent1"/>
+          </a:lnRef>
+          <a:fillRef idx="3">
+            <a:schemeClr val="accent1"/>
+          </a:fillRef>
+          <a:effectRef idx="2">
+            <a:schemeClr val="accent1"/>
+          </a:effectRef>
+          <a:fontRef idx="minor">
+            <a:schemeClr val="lt1"/>
+          </a:fontRef>
+        </p:style>
+        <p:txBody>
+          <a:bodyPr rtlCol="0" anchor="ctr"/>
+          <a:lstStyle/>
+          <a:p/>
+        </p:txBody>
+      </p:sp>
+      <p:sp>
+        <p:nvSpPr>
+          <p:cNvPr id="75" name="Rectangle 74"/>
+          <p:cNvSpPr/>
+          <p:nvPr/>
+        </p:nvSpPr>
+        <p:spPr>
+          <a:xfrm>
+            <a:off x="7012305" y="6066591"/>
+            <a:ext cx="150327" cy="59889"/>
+          </a:xfrm>
+          <a:prstGeom prst="rect">
+            <a:avLst/>
+          </a:prstGeom>
+          <a:solidFill>
+            <a:srgbClr val="0C649C">
+              <a:alpha val="55000"/>
+            </a:srgbClr>
+          </a:solidFill>
+          <a:ln>
+            <a:noFill/>
+          </a:ln>
+          <a:effectLst/>
+        </p:spPr>
+        <p:style>
+          <a:lnRef idx="1">
+            <a:schemeClr val="accent1"/>
+          </a:lnRef>
+          <a:fillRef idx="3">
+            <a:schemeClr val="accent1"/>
+          </a:fillRef>
+          <a:effectRef idx="2">
+            <a:schemeClr val="accent1"/>
+          </a:effectRef>
+          <a:fontRef idx="minor">
+            <a:schemeClr val="lt1"/>
+          </a:fontRef>
+        </p:style>
+        <p:txBody>
+          <a:bodyPr rtlCol="0" anchor="ctr"/>
+          <a:lstStyle/>
+          <a:p/>
+        </p:txBody>
+      </p:sp>
+      <p:sp>
+        <p:nvSpPr>
+          <p:cNvPr id="76" name="Rectangle 75"/>
+          <p:cNvSpPr/>
+          <p:nvPr/>
+        </p:nvSpPr>
+        <p:spPr>
+          <a:xfrm>
+            <a:off x="7012305" y="6069671"/>
+            <a:ext cx="150327" cy="56809"/>
+          </a:xfrm>
+          <a:prstGeom prst="rect">
+            <a:avLst/>
+          </a:prstGeom>
+          <a:solidFill>
+            <a:srgbClr val="C98A3E">
+              <a:alpha val="55000"/>
+            </a:srgbClr>
+          </a:solidFill>
+          <a:ln>
+            <a:noFill/>
+          </a:ln>
+          <a:effectLst/>
+        </p:spPr>
+        <p:style>
+          <a:lnRef idx="1">
+            <a:schemeClr val="accent1"/>
+          </a:lnRef>
+          <a:fillRef idx="3">
+            <a:schemeClr val="accent1"/>
+          </a:fillRef>
+          <a:effectRef idx="2">
+            <a:schemeClr val="accent1"/>
+          </a:effectRef>
+          <a:fontRef idx="minor">
+            <a:schemeClr val="lt1"/>
+          </a:fontRef>
+        </p:style>
+        <p:txBody>
+          <a:bodyPr rtlCol="0" anchor="ctr"/>
+          <a:lstStyle/>
+          <a:p/>
+        </p:txBody>
+      </p:sp>
+      <p:sp>
+        <p:nvSpPr>
+          <p:cNvPr id="77" name="Rectangle 76"/>
+          <p:cNvSpPr/>
+          <p:nvPr/>
+        </p:nvSpPr>
+        <p:spPr>
+          <a:xfrm>
+            <a:off x="7168896" y="6085268"/>
+            <a:ext cx="150327" cy="41212"/>
+          </a:xfrm>
+          <a:prstGeom prst="rect">
+            <a:avLst/>
+          </a:prstGeom>
+          <a:solidFill>
+            <a:srgbClr val="0C649C">
+              <a:alpha val="55000"/>
+            </a:srgbClr>
+          </a:solidFill>
+          <a:ln>
+            <a:noFill/>
+          </a:ln>
+          <a:effectLst/>
+        </p:spPr>
+        <p:style>
+          <a:lnRef idx="1">
+            <a:schemeClr val="accent1"/>
+          </a:lnRef>
+          <a:fillRef idx="3">
+            <a:schemeClr val="accent1"/>
+          </a:fillRef>
+          <a:effectRef idx="2">
+            <a:schemeClr val="accent1"/>
+          </a:effectRef>
+          <a:fontRef idx="minor">
+            <a:schemeClr val="lt1"/>
+          </a:fontRef>
+        </p:style>
+        <p:txBody>
+          <a:bodyPr rtlCol="0" anchor="ctr"/>
+          <a:lstStyle/>
+          <a:p/>
+        </p:txBody>
+      </p:sp>
+      <p:sp>
+        <p:nvSpPr>
+          <p:cNvPr id="78" name="Rectangle 77"/>
+          <p:cNvSpPr/>
+          <p:nvPr/>
+        </p:nvSpPr>
+        <p:spPr>
+          <a:xfrm>
+            <a:off x="7168896" y="6028470"/>
+            <a:ext cx="150327" cy="98010"/>
+          </a:xfrm>
+          <a:prstGeom prst="rect">
+            <a:avLst/>
+          </a:prstGeom>
+          <a:solidFill>
+            <a:srgbClr val="C98A3E">
+              <a:alpha val="55000"/>
+            </a:srgbClr>
+          </a:solidFill>
+          <a:ln>
+            <a:noFill/>
+          </a:ln>
+          <a:effectLst/>
+        </p:spPr>
+        <p:style>
+          <a:lnRef idx="1">
+            <a:schemeClr val="accent1"/>
+          </a:lnRef>
+          <a:fillRef idx="3">
+            <a:schemeClr val="accent1"/>
+          </a:fillRef>
+          <a:effectRef idx="2">
+            <a:schemeClr val="accent1"/>
+          </a:effectRef>
+          <a:fontRef idx="minor">
+            <a:schemeClr val="lt1"/>
+          </a:fontRef>
+        </p:style>
+        <p:txBody>
+          <a:bodyPr rtlCol="0" anchor="ctr"/>
+          <a:lstStyle/>
+          <a:p/>
+        </p:txBody>
+      </p:sp>
+      <p:sp>
+        <p:nvSpPr>
+          <p:cNvPr id="79" name="Rectangle 78"/>
+          <p:cNvSpPr/>
+          <p:nvPr/>
+        </p:nvSpPr>
+        <p:spPr>
+          <a:xfrm>
+            <a:off x="7325487" y="6092596"/>
+            <a:ext cx="150327" cy="33884"/>
+          </a:xfrm>
+          <a:prstGeom prst="rect">
+            <a:avLst/>
+          </a:prstGeom>
+          <a:solidFill>
+            <a:srgbClr val="0C649C">
+              <a:alpha val="55000"/>
+            </a:srgbClr>
+          </a:solidFill>
+          <a:ln>
+            <a:noFill/>
+          </a:ln>
+          <a:effectLst/>
+        </p:spPr>
+        <p:style>
+          <a:lnRef idx="1">
+            <a:schemeClr val="accent1"/>
+          </a:lnRef>
+          <a:fillRef idx="3">
+            <a:schemeClr val="accent1"/>
+          </a:fillRef>
+          <a:effectRef idx="2">
+            <a:schemeClr val="accent1"/>
+          </a:effectRef>
+          <a:fontRef idx="minor">
+            <a:schemeClr val="lt1"/>
+          </a:fontRef>
+        </p:style>
+        <p:txBody>
+          <a:bodyPr rtlCol="0" anchor="ctr"/>
+          <a:lstStyle/>
+          <a:p/>
+        </p:txBody>
+      </p:sp>
+      <p:sp>
+        <p:nvSpPr>
+          <p:cNvPr id="80" name="Rectangle 79"/>
+          <p:cNvSpPr/>
+          <p:nvPr/>
+        </p:nvSpPr>
+        <p:spPr>
+          <a:xfrm>
+            <a:off x="7325487" y="5982049"/>
+            <a:ext cx="150327" cy="144431"/>
+          </a:xfrm>
+          <a:prstGeom prst="rect">
+            <a:avLst/>
+          </a:prstGeom>
+          <a:solidFill>
+            <a:srgbClr val="C98A3E">
+              <a:alpha val="55000"/>
+            </a:srgbClr>
+          </a:solidFill>
+          <a:ln>
+            <a:noFill/>
+          </a:ln>
+          <a:effectLst/>
+        </p:spPr>
+        <p:style>
+          <a:lnRef idx="1">
+            <a:schemeClr val="accent1"/>
+          </a:lnRef>
+          <a:fillRef idx="3">
+            <a:schemeClr val="accent1"/>
+          </a:fillRef>
+          <a:effectRef idx="2">
+            <a:schemeClr val="accent1"/>
+          </a:effectRef>
+          <a:fontRef idx="minor">
+            <a:schemeClr val="lt1"/>
+          </a:fontRef>
+        </p:style>
+        <p:txBody>
+          <a:bodyPr rtlCol="0" anchor="ctr"/>
+          <a:lstStyle/>
+          <a:p/>
+        </p:txBody>
+      </p:sp>
+      <p:sp>
+        <p:nvSpPr>
+          <p:cNvPr id="81" name="Rectangle 80"/>
+          <p:cNvSpPr/>
+          <p:nvPr/>
+        </p:nvSpPr>
+        <p:spPr>
+          <a:xfrm>
+            <a:off x="7482078" y="6108399"/>
+            <a:ext cx="150327" cy="18081"/>
+          </a:xfrm>
+          <a:prstGeom prst="rect">
+            <a:avLst/>
+          </a:prstGeom>
+          <a:solidFill>
+            <a:srgbClr val="0C649C">
+              <a:alpha val="55000"/>
+            </a:srgbClr>
+          </a:solidFill>
+          <a:ln>
+            <a:noFill/>
+          </a:ln>
+          <a:effectLst/>
+        </p:spPr>
+        <p:style>
+          <a:lnRef idx="1">
+            <a:schemeClr val="accent1"/>
+          </a:lnRef>
+          <a:fillRef idx="3">
+            <a:schemeClr val="accent1"/>
+          </a:fillRef>
+          <a:effectRef idx="2">
+            <a:schemeClr val="accent1"/>
+          </a:effectRef>
+          <a:fontRef idx="minor">
+            <a:schemeClr val="lt1"/>
+          </a:fontRef>
+        </p:style>
+        <p:txBody>
+          <a:bodyPr rtlCol="0" anchor="ctr"/>
+          <a:lstStyle/>
+          <a:p/>
+        </p:txBody>
+      </p:sp>
+      <p:sp>
+        <p:nvSpPr>
+          <p:cNvPr id="82" name="Rectangle 81"/>
+          <p:cNvSpPr/>
+          <p:nvPr/>
+        </p:nvSpPr>
+        <p:spPr>
+          <a:xfrm>
+            <a:off x="7482078" y="6036274"/>
+            <a:ext cx="150327" cy="90206"/>
+          </a:xfrm>
+          <a:prstGeom prst="rect">
+            <a:avLst/>
+          </a:prstGeom>
+          <a:solidFill>
+            <a:srgbClr val="C98A3E">
+              <a:alpha val="55000"/>
+            </a:srgbClr>
+          </a:solidFill>
+          <a:ln>
+            <a:noFill/>
+          </a:ln>
+          <a:effectLst/>
+        </p:spPr>
+        <p:style>
+          <a:lnRef idx="1">
+            <a:schemeClr val="accent1"/>
+          </a:lnRef>
+          <a:fillRef idx="3">
+            <a:schemeClr val="accent1"/>
+          </a:fillRef>
+          <a:effectRef idx="2">
+            <a:schemeClr val="accent1"/>
+          </a:effectRef>
+          <a:fontRef idx="minor">
+            <a:schemeClr val="lt1"/>
+          </a:fontRef>
+        </p:style>
+        <p:txBody>
+          <a:bodyPr rtlCol="0" anchor="ctr"/>
+          <a:lstStyle/>
+          <a:p/>
+        </p:txBody>
+      </p:sp>
+      <p:sp>
+        <p:nvSpPr>
+          <p:cNvPr id="83" name="Rectangle 82"/>
+          <p:cNvSpPr/>
+          <p:nvPr/>
+        </p:nvSpPr>
+        <p:spPr>
+          <a:xfrm>
+            <a:off x="7638669" y="6113137"/>
+            <a:ext cx="150327" cy="13343"/>
+          </a:xfrm>
+          <a:prstGeom prst="rect">
+            <a:avLst/>
+          </a:prstGeom>
+          <a:solidFill>
+            <a:srgbClr val="0C649C">
+              <a:alpha val="55000"/>
+            </a:srgbClr>
+          </a:solidFill>
+          <a:ln>
+            <a:noFill/>
+          </a:ln>
+          <a:effectLst/>
+        </p:spPr>
+        <p:style>
+          <a:lnRef idx="1">
+            <a:schemeClr val="accent1"/>
+          </a:lnRef>
+          <a:fillRef idx="3">
+            <a:schemeClr val="accent1"/>
+          </a:fillRef>
+          <a:effectRef idx="2">
+            <a:schemeClr val="accent1"/>
+          </a:effectRef>
+          <a:fontRef idx="minor">
+            <a:schemeClr val="lt1"/>
+          </a:fontRef>
+        </p:style>
+        <p:txBody>
+          <a:bodyPr rtlCol="0" anchor="ctr"/>
+          <a:lstStyle/>
+          <a:p/>
+        </p:txBody>
+      </p:sp>
+      <p:sp>
+        <p:nvSpPr>
+          <p:cNvPr id="84" name="Rectangle 83"/>
+          <p:cNvSpPr/>
+          <p:nvPr/>
+        </p:nvSpPr>
+        <p:spPr>
+          <a:xfrm>
+            <a:off x="7638669" y="6087306"/>
+            <a:ext cx="150327" cy="39174"/>
+          </a:xfrm>
+          <a:prstGeom prst="rect">
+            <a:avLst/>
+          </a:prstGeom>
+          <a:solidFill>
+            <a:srgbClr val="C98A3E">
+              <a:alpha val="55000"/>
+            </a:srgbClr>
+          </a:solidFill>
+          <a:ln>
+            <a:noFill/>
+          </a:ln>
+          <a:effectLst/>
+        </p:spPr>
+        <p:style>
+          <a:lnRef idx="1">
+            <a:schemeClr val="accent1"/>
+          </a:lnRef>
+          <a:fillRef idx="3">
+            <a:schemeClr val="accent1"/>
+          </a:fillRef>
+          <a:effectRef idx="2">
+            <a:schemeClr val="accent1"/>
+          </a:effectRef>
+          <a:fontRef idx="minor">
+            <a:schemeClr val="lt1"/>
+          </a:fontRef>
+        </p:style>
+        <p:txBody>
+          <a:bodyPr rtlCol="0" anchor="ctr"/>
+          <a:lstStyle/>
+          <a:p/>
+        </p:txBody>
+      </p:sp>
+      <p:sp>
+        <p:nvSpPr>
+          <p:cNvPr id="85" name="Rectangle 84"/>
+          <p:cNvSpPr/>
+          <p:nvPr/>
+        </p:nvSpPr>
+        <p:spPr>
+          <a:xfrm>
+            <a:off x="7795260" y="6118738"/>
+            <a:ext cx="150327" cy="7742"/>
+          </a:xfrm>
+          <a:prstGeom prst="rect">
+            <a:avLst/>
+          </a:prstGeom>
+          <a:solidFill>
+            <a:srgbClr val="0C649C">
+              <a:alpha val="55000"/>
+            </a:srgbClr>
+          </a:solidFill>
+          <a:ln>
+            <a:noFill/>
+          </a:ln>
+          <a:effectLst/>
+        </p:spPr>
+        <p:style>
+          <a:lnRef idx="1">
+            <a:schemeClr val="accent1"/>
+          </a:lnRef>
+          <a:fillRef idx="3">
+            <a:schemeClr val="accent1"/>
+          </a:fillRef>
+          <a:effectRef idx="2">
+            <a:schemeClr val="accent1"/>
+          </a:effectRef>
+          <a:fontRef idx="minor">
+            <a:schemeClr val="lt1"/>
+          </a:fontRef>
+        </p:style>
+        <p:txBody>
+          <a:bodyPr rtlCol="0" anchor="ctr"/>
+          <a:lstStyle/>
+          <a:p/>
+        </p:txBody>
+      </p:sp>
+      <p:sp>
+        <p:nvSpPr>
+          <p:cNvPr id="86" name="Rectangle 85"/>
+          <p:cNvSpPr/>
+          <p:nvPr/>
+        </p:nvSpPr>
+        <p:spPr>
+          <a:xfrm>
+            <a:off x="7795260" y="5852923"/>
+            <a:ext cx="150327" cy="273557"/>
+          </a:xfrm>
+          <a:prstGeom prst="rect">
+            <a:avLst/>
+          </a:prstGeom>
+          <a:solidFill>
+            <a:srgbClr val="C98A3E">
+              <a:alpha val="55000"/>
+            </a:srgbClr>
+          </a:solidFill>
+          <a:ln>
+            <a:noFill/>
+          </a:ln>
+          <a:effectLst/>
+        </p:spPr>
+        <p:style>
+          <a:lnRef idx="1">
+            <a:schemeClr val="accent1"/>
+          </a:lnRef>
+          <a:fillRef idx="3">
+            <a:schemeClr val="accent1"/>
+          </a:fillRef>
+          <a:effectRef idx="2">
+            <a:schemeClr val="accent1"/>
+          </a:effectRef>
+          <a:fontRef idx="minor">
+            <a:schemeClr val="lt1"/>
+          </a:fontRef>
+        </p:style>
+        <p:txBody>
+          <a:bodyPr rtlCol="0" anchor="ctr"/>
+          <a:lstStyle/>
+          <a:p/>
+        </p:txBody>
+      </p:sp>
+      <p:sp>
+        <p:nvSpPr>
+          <p:cNvPr id="87" name="Rectangle 86"/>
+          <p:cNvSpPr/>
+          <p:nvPr/>
+        </p:nvSpPr>
+        <p:spPr>
+          <a:xfrm>
+            <a:off x="7951851" y="6121224"/>
+            <a:ext cx="150327" cy="5256"/>
+          </a:xfrm>
+          <a:prstGeom prst="rect">
+            <a:avLst/>
+          </a:prstGeom>
+          <a:solidFill>
+            <a:srgbClr val="0C649C">
+              <a:alpha val="55000"/>
+            </a:srgbClr>
+          </a:solidFill>
+          <a:ln>
+            <a:noFill/>
+          </a:ln>
+          <a:effectLst/>
+        </p:spPr>
+        <p:style>
+          <a:lnRef idx="1">
+            <a:schemeClr val="accent1"/>
+          </a:lnRef>
+          <a:fillRef idx="3">
+            <a:schemeClr val="accent1"/>
+          </a:fillRef>
+          <a:effectRef idx="2">
+            <a:schemeClr val="accent1"/>
+          </a:effectRef>
+          <a:fontRef idx="minor">
+            <a:schemeClr val="lt1"/>
+          </a:fontRef>
+        </p:style>
+        <p:txBody>
+          <a:bodyPr rtlCol="0" anchor="ctr"/>
+          <a:lstStyle/>
+          <a:p/>
+        </p:txBody>
+      </p:sp>
+      <p:sp>
+        <p:nvSpPr>
+          <p:cNvPr id="88" name="Rectangle 87"/>
+          <p:cNvSpPr/>
+          <p:nvPr/>
+        </p:nvSpPr>
+        <p:spPr>
+          <a:xfrm>
+            <a:off x="7951851" y="5349240"/>
+            <a:ext cx="150327" cy="777240"/>
+          </a:xfrm>
+          <a:prstGeom prst="rect">
+            <a:avLst/>
+          </a:prstGeom>
+          <a:solidFill>
+            <a:srgbClr val="C98A3E">
+              <a:alpha val="55000"/>
+            </a:srgbClr>
+          </a:solidFill>
+          <a:ln>
+            <a:noFill/>
+          </a:ln>
+          <a:effectLst/>
+        </p:spPr>
+        <p:style>
+          <a:lnRef idx="1">
+            <a:schemeClr val="accent1"/>
+          </a:lnRef>
+          <a:fillRef idx="3">
+            <a:schemeClr val="accent1"/>
+          </a:fillRef>
+          <a:effectRef idx="2">
+            <a:schemeClr val="accent1"/>
+          </a:effectRef>
+          <a:fontRef idx="minor">
+            <a:schemeClr val="lt1"/>
+          </a:fontRef>
+        </p:style>
+        <p:txBody>
+          <a:bodyPr rtlCol="0" anchor="ctr"/>
+          <a:lstStyle/>
+          <a:p/>
+        </p:txBody>
+      </p:sp>
+      <p:sp>
+        <p:nvSpPr>
+          <p:cNvPr id="89" name="Rectangle 88"/>
+          <p:cNvSpPr/>
+          <p:nvPr/>
+        </p:nvSpPr>
+        <p:spPr>
+          <a:xfrm>
+            <a:off x="8108442" y="5694962"/>
+            <a:ext cx="150327" cy="431518"/>
+          </a:xfrm>
+          <a:prstGeom prst="rect">
+            <a:avLst/>
+          </a:prstGeom>
+          <a:solidFill>
+            <a:srgbClr val="C98A3E">
+              <a:alpha val="55000"/>
+            </a:srgbClr>
+          </a:solidFill>
+          <a:ln>
+            <a:noFill/>
+          </a:ln>
+          <a:effectLst/>
+        </p:spPr>
+        <p:style>
+          <a:lnRef idx="1">
+            <a:schemeClr val="accent1"/>
+          </a:lnRef>
+          <a:fillRef idx="3">
+            <a:schemeClr val="accent1"/>
+          </a:fillRef>
+          <a:effectRef idx="2">
+            <a:schemeClr val="accent1"/>
+          </a:effectRef>
+          <a:fontRef idx="minor">
+            <a:schemeClr val="lt1"/>
+          </a:fontRef>
+        </p:style>
+        <p:txBody>
+          <a:bodyPr rtlCol="0" anchor="ctr"/>
+          <a:lstStyle/>
+          <a:p/>
+        </p:txBody>
+      </p:sp>
+      <p:sp>
+        <p:nvSpPr>
+          <p:cNvPr id="90" name="Rectangle 89"/>
+          <p:cNvSpPr/>
+          <p:nvPr/>
+        </p:nvSpPr>
+        <p:spPr>
+          <a:xfrm>
+            <a:off x="8265033" y="5835896"/>
+            <a:ext cx="150327" cy="290584"/>
+          </a:xfrm>
+          <a:prstGeom prst="rect">
+            <a:avLst/>
+          </a:prstGeom>
+          <a:solidFill>
+            <a:srgbClr val="C98A3E">
+              <a:alpha val="55000"/>
+            </a:srgbClr>
+          </a:solidFill>
+          <a:ln>
+            <a:noFill/>
+          </a:ln>
+          <a:effectLst/>
+        </p:spPr>
+        <p:style>
+          <a:lnRef idx="1">
+            <a:schemeClr val="accent1"/>
+          </a:lnRef>
+          <a:fillRef idx="3">
+            <a:schemeClr val="accent1"/>
+          </a:fillRef>
+          <a:effectRef idx="2">
+            <a:schemeClr val="accent1"/>
+          </a:effectRef>
+          <a:fontRef idx="minor">
+            <a:schemeClr val="lt1"/>
+          </a:fontRef>
+        </p:style>
+        <p:txBody>
+          <a:bodyPr rtlCol="0" anchor="ctr"/>
+          <a:lstStyle/>
+          <a:p/>
+        </p:txBody>
+      </p:sp>
+      <p:sp>
+        <p:nvSpPr>
+          <p:cNvPr id="91" name="Rectangle 90"/>
+          <p:cNvSpPr/>
+          <p:nvPr/>
+        </p:nvSpPr>
+        <p:spPr>
+          <a:xfrm>
+            <a:off x="8421624" y="5950883"/>
+            <a:ext cx="150327" cy="175597"/>
+          </a:xfrm>
+          <a:prstGeom prst="rect">
+            <a:avLst/>
+          </a:prstGeom>
+          <a:solidFill>
+            <a:srgbClr val="C98A3E">
+              <a:alpha val="55000"/>
+            </a:srgbClr>
+          </a:solidFill>
+          <a:ln>
+            <a:noFill/>
+          </a:ln>
+          <a:effectLst/>
+        </p:spPr>
+        <p:style>
+          <a:lnRef idx="1">
+            <a:schemeClr val="accent1"/>
+          </a:lnRef>
+          <a:fillRef idx="3">
+            <a:schemeClr val="accent1"/>
+          </a:fillRef>
+          <a:effectRef idx="2">
+            <a:schemeClr val="accent1"/>
+          </a:effectRef>
+          <a:fontRef idx="minor">
+            <a:schemeClr val="lt1"/>
+          </a:fontRef>
+        </p:style>
+        <p:txBody>
+          <a:bodyPr rtlCol="0" anchor="ctr"/>
+          <a:lstStyle/>
+          <a:p/>
+        </p:txBody>
+      </p:sp>
+      <p:sp>
+        <p:nvSpPr>
+          <p:cNvPr id="92" name="Rectangle 91"/>
+          <p:cNvSpPr/>
+          <p:nvPr/>
+        </p:nvSpPr>
+        <p:spPr>
+          <a:xfrm>
+            <a:off x="8578215" y="6076461"/>
+            <a:ext cx="150327" cy="50019"/>
+          </a:xfrm>
+          <a:prstGeom prst="rect">
+            <a:avLst/>
+          </a:prstGeom>
+          <a:solidFill>
+            <a:srgbClr val="C98A3E">
+              <a:alpha val="55000"/>
+            </a:srgbClr>
+          </a:solidFill>
+          <a:ln>
+            <a:noFill/>
+          </a:ln>
+          <a:effectLst/>
+        </p:spPr>
+        <p:style>
+          <a:lnRef idx="1">
+            <a:schemeClr val="accent1"/>
+          </a:lnRef>
+          <a:fillRef idx="3">
+            <a:schemeClr val="accent1"/>
+          </a:fillRef>
+          <a:effectRef idx="2">
+            <a:schemeClr val="accent1"/>
+          </a:effectRef>
+          <a:fontRef idx="minor">
+            <a:schemeClr val="lt1"/>
+          </a:fontRef>
+        </p:style>
+        <p:txBody>
+          <a:bodyPr rtlCol="0" anchor="ctr"/>
+          <a:lstStyle/>
+          <a:p/>
+        </p:txBody>
+      </p:sp>
+      <p:sp>
+        <p:nvSpPr>
+          <p:cNvPr id="93" name="Rectangle 92"/>
+          <p:cNvSpPr/>
+          <p:nvPr/>
+        </p:nvSpPr>
+        <p:spPr>
+          <a:xfrm>
+            <a:off x="8734806" y="6039112"/>
+            <a:ext cx="150327" cy="87368"/>
+          </a:xfrm>
+          <a:prstGeom prst="rect">
+            <a:avLst/>
+          </a:prstGeom>
+          <a:solidFill>
+            <a:srgbClr val="C98A3E">
+              <a:alpha val="55000"/>
+            </a:srgbClr>
+          </a:solidFill>
+          <a:ln>
+            <a:noFill/>
+          </a:ln>
+          <a:effectLst/>
+        </p:spPr>
+        <p:style>
+          <a:lnRef idx="1">
+            <a:schemeClr val="accent1"/>
+          </a:lnRef>
+          <a:fillRef idx="3">
+            <a:schemeClr val="accent1"/>
+          </a:fillRef>
+          <a:effectRef idx="2">
+            <a:schemeClr val="accent1"/>
+          </a:effectRef>
+          <a:fontRef idx="minor">
+            <a:schemeClr val="lt1"/>
+          </a:fontRef>
+        </p:style>
+        <p:txBody>
+          <a:bodyPr rtlCol="0" anchor="ctr"/>
+          <a:lstStyle/>
+          <a:p/>
+        </p:txBody>
+      </p:sp>
+      <p:cxnSp>
+        <p:nvCxnSpPr>
+          <p:cNvPr id="94" name="Connector 93"/>
+          <p:cNvCxnSpPr/>
+          <p:nvPr/>
+        </p:nvCxnSpPr>
+        <p:spPr>
+          <a:xfrm>
+            <a:off x="4663440" y="6126480"/>
+            <a:ext cx="0" cy="36576"/>
+          </a:xfrm>
+          <a:prstGeom prst="line">
+            <a:avLst/>
+          </a:prstGeom>
+          <a:ln w="12700">
+            <a:solidFill>
+              <a:srgbClr val="84A0B4"/>
+            </a:solidFill>
+          </a:ln>
+        </p:spPr>
+        <p:style>
+          <a:lnRef idx="2">
+            <a:schemeClr val="accent1"/>
+          </a:lnRef>
+          <a:fillRef idx="0">
+            <a:schemeClr val="accent1"/>
+          </a:fillRef>
+          <a:effectRef idx="1">
+            <a:schemeClr val="accent1"/>
+          </a:effectRef>
+          <a:fontRef idx="minor">
+            <a:schemeClr val="tx1"/>
+          </a:fontRef>
+        </p:style>
+      </p:cxnSp>
+      <p:sp>
+        <p:nvSpPr>
+          <p:cNvPr id="95" name="TextBox 94"/>
           <p:cNvSpPr txBox="1"/>
           <p:nvPr/>
         </p:nvSpPr>
         <p:spPr>
           <a:xfrm>
-            <a:off x="4719218" y="5413248"/>
-            <a:ext cx="2753258" cy="237744"/>
-          </a:xfrm>
-          <a:prstGeom prst="rect">
-            <a:avLst/>
-          </a:prstGeom>
-          <a:noFill/>
-          <a:ln/>
-        </p:spPr>
-        <p:txBody>
-          <a:bodyPr wrap="square" lIns="0" tIns="0" rIns="0" bIns="0" rtlCol="0" anchor="t"/>
-          <a:lstStyle/>
-          <a:p>
-            <a:pPr indent="0" marL="0">
-              <a:buNone/>
-            </a:pPr>
-            <a:r>
-              <a:rPr lang="en-US" sz="1050" spc="150" kern="0" dirty="0">
-                <a:solidFill>
-                  <a:srgbClr val="C98A3E"/>
-                </a:solidFill>
-                <a:latin typeface="Segoe UI Semibold" pitchFamily="34" charset="0"/>
-                <a:ea typeface="Segoe UI Semibold" pitchFamily="34" charset="-122"/>
-                <a:cs typeface="Segoe UI Semibold" pitchFamily="34" charset="-120"/>
-              </a:rPr>
-              <a:t>XGBOOST</a:t>
-            </a:r>
-            <a:endParaRPr lang="en-US" sz="1050" dirty="0"/>
-          </a:p>
-        </p:txBody>
-      </p:sp>
-      <p:sp>
-        <p:nvSpPr>
-          <p:cNvPr id="53" name="Text 49"/>
+            <a:off x="4389120" y="6181344"/>
+            <a:ext cx="548640" cy="146304"/>
+          </a:xfrm>
+          <a:prstGeom prst="rect">
+            <a:avLst/>
+          </a:prstGeom>
+          <a:noFill/>
+        </p:spPr>
+        <p:txBody>
+          <a:bodyPr wrap="square" lIns="0" rIns="0" tIns="0" bIns="0" anchor="t">
+            <a:spAutoFit/>
+          </a:bodyPr>
+          <a:lstStyle/>
+          <a:p>
+            <a:pPr algn="ctr"/>
+            <a:r>
+              <a:rPr sz="800" b="0" i="0">
+                <a:solidFill>
+                  <a:srgbClr val="4A6478"/>
+                </a:solidFill>
+                <a:latin typeface="Segoe UI"/>
+              </a:rPr>
+              <a:t>0,001</a:t>
+            </a:r>
+          </a:p>
+        </p:txBody>
+      </p:sp>
+      <p:cxnSp>
+        <p:nvCxnSpPr>
+          <p:cNvPr id="96" name="Connector 95"/>
+          <p:cNvCxnSpPr/>
+          <p:nvPr/>
+        </p:nvCxnSpPr>
+        <p:spPr>
+          <a:xfrm>
+            <a:off x="5707380" y="6126480"/>
+            <a:ext cx="0" cy="36576"/>
+          </a:xfrm>
+          <a:prstGeom prst="line">
+            <a:avLst/>
+          </a:prstGeom>
+          <a:ln w="12700">
+            <a:solidFill>
+              <a:srgbClr val="84A0B4"/>
+            </a:solidFill>
+          </a:ln>
+        </p:spPr>
+        <p:style>
+          <a:lnRef idx="2">
+            <a:schemeClr val="accent1"/>
+          </a:lnRef>
+          <a:fillRef idx="0">
+            <a:schemeClr val="accent1"/>
+          </a:fillRef>
+          <a:effectRef idx="1">
+            <a:schemeClr val="accent1"/>
+          </a:effectRef>
+          <a:fontRef idx="minor">
+            <a:schemeClr val="tx1"/>
+          </a:fontRef>
+        </p:style>
+      </p:cxnSp>
+      <p:sp>
+        <p:nvSpPr>
+          <p:cNvPr id="97" name="TextBox 96"/>
           <p:cNvSpPr txBox="1"/>
           <p:nvPr/>
         </p:nvSpPr>
         <p:spPr>
           <a:xfrm>
-            <a:off x="4719218" y="5669280"/>
-            <a:ext cx="2753258" cy="777240"/>
-          </a:xfrm>
-          <a:prstGeom prst="rect">
-            <a:avLst/>
-          </a:prstGeom>
-          <a:noFill/>
-          <a:ln/>
-        </p:spPr>
-        <p:txBody>
-          <a:bodyPr wrap="square" lIns="0" tIns="0" rIns="0" bIns="0" rtlCol="0" anchor="t"/>
-          <a:lstStyle/>
-          <a:p>
-            <a:pPr indent="0" marL="0">
-              <a:buNone/>
-            </a:pPr>
-            <a:r>
-              <a:rPr lang="en-US" sz="1200" dirty="0">
+            <a:off x="5433060" y="6181344"/>
+            <a:ext cx="548640" cy="146304"/>
+          </a:xfrm>
+          <a:prstGeom prst="rect">
+            <a:avLst/>
+          </a:prstGeom>
+          <a:noFill/>
+        </p:spPr>
+        <p:txBody>
+          <a:bodyPr wrap="square" lIns="0" rIns="0" tIns="0" bIns="0" anchor="t">
+            <a:spAutoFit/>
+          </a:bodyPr>
+          <a:lstStyle/>
+          <a:p>
+            <a:pPr algn="ctr"/>
+            <a:r>
+              <a:rPr sz="800" b="0" i="0">
+                <a:solidFill>
+                  <a:srgbClr val="4A6478"/>
+                </a:solidFill>
+                <a:latin typeface="Segoe UI"/>
+              </a:rPr>
+              <a:t>0,01</a:t>
+            </a:r>
+          </a:p>
+        </p:txBody>
+      </p:sp>
+      <p:cxnSp>
+        <p:nvCxnSpPr>
+          <p:cNvPr id="98" name="Connector 97"/>
+          <p:cNvCxnSpPr/>
+          <p:nvPr/>
+        </p:nvCxnSpPr>
+        <p:spPr>
+          <a:xfrm>
+            <a:off x="6751320" y="6126480"/>
+            <a:ext cx="0" cy="36576"/>
+          </a:xfrm>
+          <a:prstGeom prst="line">
+            <a:avLst/>
+          </a:prstGeom>
+          <a:ln w="12700">
+            <a:solidFill>
+              <a:srgbClr val="84A0B4"/>
+            </a:solidFill>
+          </a:ln>
+        </p:spPr>
+        <p:style>
+          <a:lnRef idx="2">
+            <a:schemeClr val="accent1"/>
+          </a:lnRef>
+          <a:fillRef idx="0">
+            <a:schemeClr val="accent1"/>
+          </a:fillRef>
+          <a:effectRef idx="1">
+            <a:schemeClr val="accent1"/>
+          </a:effectRef>
+          <a:fontRef idx="minor">
+            <a:schemeClr val="tx1"/>
+          </a:fontRef>
+        </p:style>
+      </p:cxnSp>
+      <p:sp>
+        <p:nvSpPr>
+          <p:cNvPr id="99" name="TextBox 98"/>
+          <p:cNvSpPr txBox="1"/>
+          <p:nvPr/>
+        </p:nvSpPr>
+        <p:spPr>
+          <a:xfrm>
+            <a:off x="6477000" y="6181344"/>
+            <a:ext cx="548640" cy="146304"/>
+          </a:xfrm>
+          <a:prstGeom prst="rect">
+            <a:avLst/>
+          </a:prstGeom>
+          <a:noFill/>
+        </p:spPr>
+        <p:txBody>
+          <a:bodyPr wrap="square" lIns="0" rIns="0" tIns="0" bIns="0" anchor="t">
+            <a:spAutoFit/>
+          </a:bodyPr>
+          <a:lstStyle/>
+          <a:p>
+            <a:pPr algn="ctr"/>
+            <a:r>
+              <a:rPr sz="800" b="0" i="0">
+                <a:solidFill>
+                  <a:srgbClr val="4A6478"/>
+                </a:solidFill>
+                <a:latin typeface="Segoe UI"/>
+              </a:rPr>
+              <a:t>0,1</a:t>
+            </a:r>
+          </a:p>
+        </p:txBody>
+      </p:sp>
+      <p:cxnSp>
+        <p:nvCxnSpPr>
+          <p:cNvPr id="100" name="Connector 99"/>
+          <p:cNvCxnSpPr/>
+          <p:nvPr/>
+        </p:nvCxnSpPr>
+        <p:spPr>
+          <a:xfrm>
+            <a:off x="7795260" y="6126480"/>
+            <a:ext cx="0" cy="36576"/>
+          </a:xfrm>
+          <a:prstGeom prst="line">
+            <a:avLst/>
+          </a:prstGeom>
+          <a:ln w="12700">
+            <a:solidFill>
+              <a:srgbClr val="84A0B4"/>
+            </a:solidFill>
+          </a:ln>
+        </p:spPr>
+        <p:style>
+          <a:lnRef idx="2">
+            <a:schemeClr val="accent1"/>
+          </a:lnRef>
+          <a:fillRef idx="0">
+            <a:schemeClr val="accent1"/>
+          </a:fillRef>
+          <a:effectRef idx="1">
+            <a:schemeClr val="accent1"/>
+          </a:effectRef>
+          <a:fontRef idx="minor">
+            <a:schemeClr val="tx1"/>
+          </a:fontRef>
+        </p:style>
+      </p:cxnSp>
+      <p:sp>
+        <p:nvSpPr>
+          <p:cNvPr id="101" name="TextBox 100"/>
+          <p:cNvSpPr txBox="1"/>
+          <p:nvPr/>
+        </p:nvSpPr>
+        <p:spPr>
+          <a:xfrm>
+            <a:off x="7520940" y="6181344"/>
+            <a:ext cx="548640" cy="146304"/>
+          </a:xfrm>
+          <a:prstGeom prst="rect">
+            <a:avLst/>
+          </a:prstGeom>
+          <a:noFill/>
+        </p:spPr>
+        <p:txBody>
+          <a:bodyPr wrap="square" lIns="0" rIns="0" tIns="0" bIns="0" anchor="t">
+            <a:spAutoFit/>
+          </a:bodyPr>
+          <a:lstStyle/>
+          <a:p>
+            <a:pPr algn="ctr"/>
+            <a:r>
+              <a:rPr sz="800" b="0" i="0">
+                <a:solidFill>
+                  <a:srgbClr val="4A6478"/>
+                </a:solidFill>
+                <a:latin typeface="Segoe UI"/>
+              </a:rPr>
+              <a:t>1</a:t>
+            </a:r>
+          </a:p>
+        </p:txBody>
+      </p:sp>
+      <p:cxnSp>
+        <p:nvCxnSpPr>
+          <p:cNvPr id="102" name="Connector 101"/>
+          <p:cNvCxnSpPr/>
+          <p:nvPr/>
+        </p:nvCxnSpPr>
+        <p:spPr>
+          <a:xfrm>
+            <a:off x="8839200" y="6126480"/>
+            <a:ext cx="0" cy="36576"/>
+          </a:xfrm>
+          <a:prstGeom prst="line">
+            <a:avLst/>
+          </a:prstGeom>
+          <a:ln w="12700">
+            <a:solidFill>
+              <a:srgbClr val="84A0B4"/>
+            </a:solidFill>
+          </a:ln>
+        </p:spPr>
+        <p:style>
+          <a:lnRef idx="2">
+            <a:schemeClr val="accent1"/>
+          </a:lnRef>
+          <a:fillRef idx="0">
+            <a:schemeClr val="accent1"/>
+          </a:fillRef>
+          <a:effectRef idx="1">
+            <a:schemeClr val="accent1"/>
+          </a:effectRef>
+          <a:fontRef idx="minor">
+            <a:schemeClr val="tx1"/>
+          </a:fontRef>
+        </p:style>
+      </p:cxnSp>
+      <p:sp>
+        <p:nvSpPr>
+          <p:cNvPr id="103" name="TextBox 102"/>
+          <p:cNvSpPr txBox="1"/>
+          <p:nvPr/>
+        </p:nvSpPr>
+        <p:spPr>
+          <a:xfrm>
+            <a:off x="8564880" y="6181344"/>
+            <a:ext cx="548640" cy="146304"/>
+          </a:xfrm>
+          <a:prstGeom prst="rect">
+            <a:avLst/>
+          </a:prstGeom>
+          <a:noFill/>
+        </p:spPr>
+        <p:txBody>
+          <a:bodyPr wrap="square" lIns="0" rIns="0" tIns="0" bIns="0" anchor="t">
+            <a:spAutoFit/>
+          </a:bodyPr>
+          <a:lstStyle/>
+          <a:p>
+            <a:pPr algn="ctr"/>
+            <a:r>
+              <a:rPr sz="800" b="0" i="0">
+                <a:solidFill>
+                  <a:srgbClr val="4A6478"/>
+                </a:solidFill>
+                <a:latin typeface="Segoe UI"/>
+              </a:rPr>
+              <a:t>10</a:t>
+            </a:r>
+          </a:p>
+        </p:txBody>
+      </p:sp>
+      <p:cxnSp>
+        <p:nvCxnSpPr>
+          <p:cNvPr id="104" name="Connector 103"/>
+          <p:cNvCxnSpPr/>
+          <p:nvPr/>
+        </p:nvCxnSpPr>
+        <p:spPr>
+          <a:xfrm>
+            <a:off x="9883140" y="6126480"/>
+            <a:ext cx="0" cy="36576"/>
+          </a:xfrm>
+          <a:prstGeom prst="line">
+            <a:avLst/>
+          </a:prstGeom>
+          <a:ln w="12700">
+            <a:solidFill>
+              <a:srgbClr val="84A0B4"/>
+            </a:solidFill>
+          </a:ln>
+        </p:spPr>
+        <p:style>
+          <a:lnRef idx="2">
+            <a:schemeClr val="accent1"/>
+          </a:lnRef>
+          <a:fillRef idx="0">
+            <a:schemeClr val="accent1"/>
+          </a:fillRef>
+          <a:effectRef idx="1">
+            <a:schemeClr val="accent1"/>
+          </a:effectRef>
+          <a:fontRef idx="minor">
+            <a:schemeClr val="tx1"/>
+          </a:fontRef>
+        </p:style>
+      </p:cxnSp>
+      <p:sp>
+        <p:nvSpPr>
+          <p:cNvPr id="105" name="TextBox 104"/>
+          <p:cNvSpPr txBox="1"/>
+          <p:nvPr/>
+        </p:nvSpPr>
+        <p:spPr>
+          <a:xfrm>
+            <a:off x="9608820" y="6181344"/>
+            <a:ext cx="548640" cy="146304"/>
+          </a:xfrm>
+          <a:prstGeom prst="rect">
+            <a:avLst/>
+          </a:prstGeom>
+          <a:noFill/>
+        </p:spPr>
+        <p:txBody>
+          <a:bodyPr wrap="square" lIns="0" rIns="0" tIns="0" bIns="0" anchor="t">
+            <a:spAutoFit/>
+          </a:bodyPr>
+          <a:lstStyle/>
+          <a:p>
+            <a:pPr algn="ctr"/>
+            <a:r>
+              <a:rPr sz="800" b="0" i="0">
+                <a:solidFill>
+                  <a:srgbClr val="4A6478"/>
+                </a:solidFill>
+                <a:latin typeface="Segoe UI"/>
+              </a:rPr>
+              <a:t>100</a:t>
+            </a:r>
+          </a:p>
+        </p:txBody>
+      </p:sp>
+      <p:cxnSp>
+        <p:nvCxnSpPr>
+          <p:cNvPr id="106" name="Connector 105"/>
+          <p:cNvCxnSpPr/>
+          <p:nvPr/>
+        </p:nvCxnSpPr>
+        <p:spPr>
+          <a:xfrm>
+            <a:off x="10927080" y="6126480"/>
+            <a:ext cx="0" cy="36576"/>
+          </a:xfrm>
+          <a:prstGeom prst="line">
+            <a:avLst/>
+          </a:prstGeom>
+          <a:ln w="12700">
+            <a:solidFill>
+              <a:srgbClr val="84A0B4"/>
+            </a:solidFill>
+          </a:ln>
+        </p:spPr>
+        <p:style>
+          <a:lnRef idx="2">
+            <a:schemeClr val="accent1"/>
+          </a:lnRef>
+          <a:fillRef idx="0">
+            <a:schemeClr val="accent1"/>
+          </a:fillRef>
+          <a:effectRef idx="1">
+            <a:schemeClr val="accent1"/>
+          </a:effectRef>
+          <a:fontRef idx="minor">
+            <a:schemeClr val="tx1"/>
+          </a:fontRef>
+        </p:style>
+      </p:cxnSp>
+      <p:sp>
+        <p:nvSpPr>
+          <p:cNvPr id="107" name="TextBox 106"/>
+          <p:cNvSpPr txBox="1"/>
+          <p:nvPr/>
+        </p:nvSpPr>
+        <p:spPr>
+          <a:xfrm>
+            <a:off x="10652760" y="6181344"/>
+            <a:ext cx="548640" cy="146304"/>
+          </a:xfrm>
+          <a:prstGeom prst="rect">
+            <a:avLst/>
+          </a:prstGeom>
+          <a:noFill/>
+        </p:spPr>
+        <p:txBody>
+          <a:bodyPr wrap="square" lIns="0" rIns="0" tIns="0" bIns="0" anchor="t">
+            <a:spAutoFit/>
+          </a:bodyPr>
+          <a:lstStyle/>
+          <a:p>
+            <a:pPr algn="ctr"/>
+            <a:r>
+              <a:rPr sz="800" b="0" i="0">
+                <a:solidFill>
+                  <a:srgbClr val="4A6478"/>
+                </a:solidFill>
+                <a:latin typeface="Segoe UI"/>
+              </a:rPr>
+              <a:t>1000</a:t>
+            </a:r>
+          </a:p>
+        </p:txBody>
+      </p:sp>
+      <p:cxnSp>
+        <p:nvCxnSpPr>
+          <p:cNvPr id="108" name="Connector 107"/>
+          <p:cNvCxnSpPr/>
+          <p:nvPr/>
+        </p:nvCxnSpPr>
+        <p:spPr>
+          <a:xfrm>
+            <a:off x="7591325" y="5349240"/>
+            <a:ext cx="0" cy="777240"/>
+          </a:xfrm>
+          <a:prstGeom prst="line">
+            <a:avLst/>
+          </a:prstGeom>
+          <a:ln w="19050">
+            <a:solidFill>
+              <a:srgbClr val="9A3B1B"/>
+            </a:solidFill>
+            <a:prstDash val="dash"/>
+          </a:ln>
+        </p:spPr>
+        <p:style>
+          <a:lnRef idx="2">
+            <a:schemeClr val="accent1"/>
+          </a:lnRef>
+          <a:fillRef idx="0">
+            <a:schemeClr val="accent1"/>
+          </a:fillRef>
+          <a:effectRef idx="1">
+            <a:schemeClr val="accent1"/>
+          </a:effectRef>
+          <a:fontRef idx="minor">
+            <a:schemeClr val="tx1"/>
+          </a:fontRef>
+        </p:style>
+      </p:cxnSp>
+      <p:sp>
+        <p:nvSpPr>
+          <p:cNvPr id="109" name="TextBox 108"/>
+          <p:cNvSpPr txBox="1"/>
+          <p:nvPr/>
+        </p:nvSpPr>
+        <p:spPr>
+          <a:xfrm>
+            <a:off x="5533925" y="5330952"/>
+            <a:ext cx="2011680" cy="146304"/>
+          </a:xfrm>
+          <a:prstGeom prst="rect">
+            <a:avLst/>
+          </a:prstGeom>
+          <a:noFill/>
+        </p:spPr>
+        <p:txBody>
+          <a:bodyPr wrap="square" lIns="0" rIns="0" tIns="0" bIns="0" anchor="t">
+            <a:spAutoFit/>
+          </a:bodyPr>
+          <a:lstStyle/>
+          <a:p>
+            <a:pPr algn="r"/>
+            <a:r>
+              <a:rPr sz="900" b="1" i="0">
+                <a:solidFill>
+                  <a:srgbClr val="9A3B1B"/>
+                </a:solidFill>
+                <a:latin typeface="Segoe UI"/>
+              </a:rPr>
+              <a:t>soglia p99 · ≈ 1% falsi allarmi</a:t>
+            </a:r>
+          </a:p>
+        </p:txBody>
+      </p:sp>
+      <p:sp>
+        <p:nvSpPr>
+          <p:cNvPr id="110" name="Rectangle 109"/>
+          <p:cNvSpPr/>
+          <p:nvPr/>
+        </p:nvSpPr>
+        <p:spPr>
+          <a:xfrm>
+            <a:off x="9372600" y="5367528"/>
+            <a:ext cx="109728" cy="109728"/>
+          </a:xfrm>
+          <a:prstGeom prst="rect">
+            <a:avLst/>
+          </a:prstGeom>
+          <a:solidFill>
+            <a:srgbClr val="0C649C">
+              <a:alpha val="60000"/>
+            </a:srgbClr>
+          </a:solidFill>
+          <a:ln>
+            <a:noFill/>
+          </a:ln>
+          <a:effectLst/>
+        </p:spPr>
+        <p:style>
+          <a:lnRef idx="1">
+            <a:schemeClr val="accent1"/>
+          </a:lnRef>
+          <a:fillRef idx="3">
+            <a:schemeClr val="accent1"/>
+          </a:fillRef>
+          <a:effectRef idx="2">
+            <a:schemeClr val="accent1"/>
+          </a:effectRef>
+          <a:fontRef idx="minor">
+            <a:schemeClr val="lt1"/>
+          </a:fontRef>
+        </p:style>
+        <p:txBody>
+          <a:bodyPr rtlCol="0" anchor="ctr"/>
+          <a:lstStyle/>
+          <a:p/>
+        </p:txBody>
+      </p:sp>
+      <p:sp>
+        <p:nvSpPr>
+          <p:cNvPr id="111" name="TextBox 110"/>
+          <p:cNvSpPr txBox="1"/>
+          <p:nvPr/>
+        </p:nvSpPr>
+        <p:spPr>
+          <a:xfrm>
+            <a:off x="9528048" y="5340096"/>
+            <a:ext cx="1371600" cy="164592"/>
+          </a:xfrm>
+          <a:prstGeom prst="rect">
+            <a:avLst/>
+          </a:prstGeom>
+          <a:noFill/>
+        </p:spPr>
+        <p:txBody>
+          <a:bodyPr wrap="square" lIns="0" rIns="0" tIns="0" bIns="0" anchor="ctr">
+            <a:spAutoFit/>
+          </a:bodyPr>
+          <a:lstStyle/>
+          <a:p>
+            <a:pPr algn="l"/>
+            <a:r>
+              <a:rPr sz="900" b="0" i="0">
                 <a:solidFill>
                   <a:srgbClr val="0B2438"/>
                 </a:solidFill>
-                <a:latin typeface="Segoe UI" pitchFamily="34" charset="0"/>
-                <a:ea typeface="Segoe UI" pitchFamily="34" charset="-122"/>
-                <a:cs typeface="Segoe UI" pitchFamily="34" charset="-120"/>
-              </a:rPr>
-              <a:t>binario attacco / normale, senza l'attacco escluso</a:t>
-            </a:r>
-            <a:endParaRPr lang="en-US" sz="1200" dirty="0"/>
-          </a:p>
-        </p:txBody>
-      </p:sp>
-      <p:sp>
-        <p:nvSpPr>
-          <p:cNvPr id="54" name="Shape 50"/>
-          <p:cNvSpPr/>
-          <p:nvPr/>
-        </p:nvSpPr>
-        <p:spPr>
-          <a:xfrm>
-            <a:off x="7838237" y="5285232"/>
-            <a:ext cx="3119018" cy="1188720"/>
-          </a:xfrm>
-          <a:prstGeom prst="roundRect">
-            <a:avLst>
-              <a:gd name="adj" fmla="val 10769"/>
-            </a:avLst>
-          </a:prstGeom>
-          <a:solidFill>
-            <a:srgbClr val="FFFFFF"/>
-          </a:solidFill>
-          <a:ln w="9525">
-            <a:solidFill>
-              <a:srgbClr val="D6E3EC"/>
-            </a:solidFill>
-            <a:prstDash val="solid"/>
-          </a:ln>
-        </p:spPr>
-      </p:sp>
-      <p:sp>
-        <p:nvSpPr>
-          <p:cNvPr id="55" name="Text 51"/>
+                <a:latin typeface="Segoe UI"/>
+              </a:rPr>
+              <a:t>Benign</a:t>
+            </a:r>
+          </a:p>
+        </p:txBody>
+      </p:sp>
+      <p:sp>
+        <p:nvSpPr>
+          <p:cNvPr id="112" name="Rectangle 111"/>
+          <p:cNvSpPr/>
+          <p:nvPr/>
+        </p:nvSpPr>
+        <p:spPr>
+          <a:xfrm>
+            <a:off x="9372600" y="5568696"/>
+            <a:ext cx="109728" cy="109728"/>
+          </a:xfrm>
+          <a:prstGeom prst="rect">
+            <a:avLst/>
+          </a:prstGeom>
+          <a:solidFill>
+            <a:srgbClr val="C98A3E">
+              <a:alpha val="60000"/>
+            </a:srgbClr>
+          </a:solidFill>
+          <a:ln>
+            <a:noFill/>
+          </a:ln>
+          <a:effectLst/>
+        </p:spPr>
+        <p:style>
+          <a:lnRef idx="1">
+            <a:schemeClr val="accent1"/>
+          </a:lnRef>
+          <a:fillRef idx="3">
+            <a:schemeClr val="accent1"/>
+          </a:fillRef>
+          <a:effectRef idx="2">
+            <a:schemeClr val="accent1"/>
+          </a:effectRef>
+          <a:fontRef idx="minor">
+            <a:schemeClr val="lt1"/>
+          </a:fontRef>
+        </p:style>
+        <p:txBody>
+          <a:bodyPr rtlCol="0" anchor="ctr"/>
+          <a:lstStyle/>
+          <a:p/>
+        </p:txBody>
+      </p:sp>
+      <p:sp>
+        <p:nvSpPr>
+          <p:cNvPr id="113" name="TextBox 112"/>
           <p:cNvSpPr txBox="1"/>
           <p:nvPr/>
         </p:nvSpPr>
         <p:spPr>
           <a:xfrm>
-            <a:off x="8021117" y="5413248"/>
-            <a:ext cx="2753258" cy="237744"/>
-          </a:xfrm>
-          <a:prstGeom prst="rect">
-            <a:avLst/>
-          </a:prstGeom>
-          <a:noFill/>
-          <a:ln/>
-        </p:spPr>
-        <p:txBody>
-          <a:bodyPr wrap="square" lIns="0" tIns="0" rIns="0" bIns="0" rtlCol="0" anchor="t"/>
-          <a:lstStyle/>
-          <a:p>
-            <a:pPr indent="0" marL="0">
-              <a:buNone/>
-            </a:pPr>
-            <a:r>
-              <a:rPr lang="en-US" sz="1050" spc="150" kern="0" dirty="0">
-                <a:solidFill>
-                  <a:srgbClr val="0C649C"/>
-                </a:solidFill>
-                <a:latin typeface="Segoe UI Semibold" pitchFamily="34" charset="0"/>
-                <a:ea typeface="Segoe UI Semibold" pitchFamily="34" charset="-122"/>
-                <a:cs typeface="Segoe UI Semibold" pitchFamily="34" charset="-120"/>
-              </a:rPr>
-              <a:t>AUTOENCODER</a:t>
-            </a:r>
-            <a:endParaRPr lang="en-US" sz="1050" dirty="0"/>
-          </a:p>
-        </p:txBody>
-      </p:sp>
-      <p:sp>
-        <p:nvSpPr>
-          <p:cNvPr id="56" name="Text 52"/>
-          <p:cNvSpPr txBox="1"/>
-          <p:nvPr/>
-        </p:nvSpPr>
-        <p:spPr>
-          <a:xfrm>
-            <a:off x="8021117" y="5669280"/>
-            <a:ext cx="2753258" cy="777240"/>
-          </a:xfrm>
-          <a:prstGeom prst="rect">
-            <a:avLst/>
-          </a:prstGeom>
-          <a:noFill/>
-          <a:ln/>
-        </p:spPr>
-        <p:txBody>
-          <a:bodyPr wrap="square" lIns="0" tIns="0" rIns="0" bIns="0" rtlCol="0" anchor="t"/>
-          <a:lstStyle/>
-          <a:p>
-            <a:pPr indent="0" marL="0">
-              <a:buNone/>
-            </a:pPr>
-            <a:r>
-              <a:rPr lang="en-US" sz="1200" dirty="0">
+            <a:off x="9528048" y="5541264"/>
+            <a:ext cx="1371600" cy="164592"/>
+          </a:xfrm>
+          <a:prstGeom prst="rect">
+            <a:avLst/>
+          </a:prstGeom>
+          <a:noFill/>
+        </p:spPr>
+        <p:txBody>
+          <a:bodyPr wrap="square" lIns="0" rIns="0" tIns="0" bIns="0" anchor="ctr">
+            <a:spAutoFit/>
+          </a:bodyPr>
+          <a:lstStyle/>
+          <a:p>
+            <a:pPr algn="l"/>
+            <a:r>
+              <a:rPr sz="900" b="0" i="0">
                 <a:solidFill>
                   <a:srgbClr val="0B2438"/>
                 </a:solidFill>
-                <a:latin typeface="Segoe UI" pitchFamily="34" charset="0"/>
-                <a:ea typeface="Segoe UI" pitchFamily="34" charset="-122"/>
-                <a:cs typeface="Segoe UI" pitchFamily="34" charset="-120"/>
-              </a:rPr>
-              <a:t>2 modelli, solo Benign, soglia p99 ≈ 1% falsi allarmi</a:t>
-            </a:r>
-            <a:endParaRPr lang="en-US" sz="1200" dirty="0"/>
+                <a:latin typeface="Segoe UI"/>
+              </a:rPr>
+              <a:t>Attacchi</a:t>
+            </a:r>
           </a:p>
         </p:txBody>
       </p:sp>
@@ -9548,7 +12583,7 @@
     </p:bg>
     <p:spTree>
       <p:nvGrpSpPr>
-        <p:cNvPr id="1" name=""/>
+        <p:cNvPr id="2" name=""/>
         <p:cNvGrpSpPr/>
         <p:nvPr/>
       </p:nvGrpSpPr>
@@ -9562,7 +12597,7 @@
       </p:grpSpPr>
       <p:sp>
         <p:nvSpPr>
-          <p:cNvPr id="2" name="Text 0"/>
+          <p:cNvPr id="3" name="Text 0"/>
           <p:cNvSpPr txBox="1"/>
           <p:nvPr/>
         </p:nvSpPr>
@@ -9601,7 +12636,7 @@
       </p:sp>
       <p:sp>
         <p:nvSpPr>
-          <p:cNvPr id="3" name="Shape 1"/>
+          <p:cNvPr id="4" name="Shape 1"/>
           <p:cNvSpPr/>
           <p:nvPr/>
         </p:nvSpPr>
@@ -9628,7 +12663,7 @@
       </p:sp>
       <p:pic>
         <p:nvPicPr>
-          <p:cNvPr id="4" name="Image 0" descr="Logo Unimore">    </p:cNvPr>
+          <p:cNvPr id="5" name="Image 0" descr="Logo Unimore">    </p:cNvPr>
           <p:cNvPicPr>
             <a:picLocks noChangeAspect="1"/>
           </p:cNvPicPr>
@@ -9652,7 +12687,7 @@
       </p:pic>
       <p:sp>
         <p:nvSpPr>
-          <p:cNvPr id="5" name="Text 2"/>
+          <p:cNvPr id="6" name="Text 2"/>
           <p:cNvSpPr/>
           <p:nvPr/>
         </p:nvSpPr>
@@ -9703,7 +12738,7 @@
       </p:sp>
       <p:sp>
         <p:nvSpPr>
-          <p:cNvPr id="6" name="Text 3"/>
+          <p:cNvPr id="7" name="Text 3"/>
           <p:cNvSpPr txBox="1"/>
           <p:nvPr/>
         </p:nvSpPr>
@@ -9756,7 +12791,7 @@
       </p:sp>
       <p:sp>
         <p:nvSpPr>
-          <p:cNvPr id="7" name="Shape 4"/>
+          <p:cNvPr id="8" name="Shape 4"/>
           <p:cNvSpPr/>
           <p:nvPr/>
         </p:nvSpPr>
@@ -9790,7 +12825,7 @@
       </p:sp>
       <p:sp>
         <p:nvSpPr>
-          <p:cNvPr id="8" name="Shape 5"/>
+          <p:cNvPr id="9" name="Shape 5"/>
           <p:cNvSpPr/>
           <p:nvPr/>
         </p:nvSpPr>
@@ -9817,7 +12852,7 @@
       </p:sp>
       <p:sp>
         <p:nvSpPr>
-          <p:cNvPr id="9" name="Text 6"/>
+          <p:cNvPr id="10" name="Text 6"/>
           <p:cNvSpPr txBox="1"/>
           <p:nvPr/>
         </p:nvSpPr>
@@ -10302,7 +13337,46 @@
       </p:sp>
       <p:sp>
         <p:nvSpPr>
-          <p:cNvPr id="21" name="Shape 17"/>
+          <p:cNvPr id="21" name="Text 16"/>
+          <p:cNvSpPr txBox="1"/>
+          <p:nvPr/>
+        </p:nvSpPr>
+        <p:spPr>
+          <a:xfrm>
+            <a:off x="1234440" y="6309360"/>
+            <a:ext cx="3474720" cy="365760"/>
+          </a:xfrm>
+          <a:prstGeom prst="rect">
+            <a:avLst/>
+          </a:prstGeom>
+          <a:noFill/>
+          <a:ln/>
+        </p:spPr>
+        <p:txBody>
+          <a:bodyPr wrap="square" lIns="0" tIns="0" rIns="0" bIns="0" rtlCol="0" anchor="t"/>
+          <a:lstStyle/>
+          <a:p>
+            <a:pPr indent="0" marL="0">
+              <a:buNone/>
+            </a:pPr>
+            <a:r>
+              <a:rPr lang="en-US" sz="1000" dirty="0">
+                <a:solidFill>
+                  <a:srgbClr val="4A6478"/>
+                </a:solidFill>
+                <a:latin typeface="Segoe UI" pitchFamily="34" charset="0"/>
+                <a:ea typeface="Segoe UI" pitchFamily="34" charset="-122"/>
+                <a:cs typeface="Segoe UI" pitchFamily="34" charset="-120"/>
+              </a:rPr>
+              <a:t>* 1 e 7 casi: non sono stime. Split casuale: i numeri in-dominio sono ottimistici.</a:t>
+            </a:r>
+            <a:endParaRPr lang="en-US" sz="1200" dirty="0"/>
+          </a:p>
+        </p:txBody>
+      </p:sp>
+      <p:sp>
+        <p:nvSpPr>
+          <p:cNvPr id="22" name="Shape 17"/>
           <p:cNvSpPr/>
           <p:nvPr/>
         </p:nvSpPr>
@@ -10329,7 +13403,7 @@
       </p:sp>
       <p:graphicFrame>
         <p:nvGraphicFramePr>
-          <p:cNvPr id="22" name="Chart 0" descr=""/>
+          <p:cNvPr id="23" name="Chart 0" descr=""/>
           <p:cNvGraphicFramePr/>
           <p:nvPr/>
         </p:nvGraphicFramePr>
@@ -10370,7 +13444,7 @@
     </p:bg>
     <p:spTree>
       <p:nvGrpSpPr>
-        <p:cNvPr id="1" name=""/>
+        <p:cNvPr id="2" name=""/>
         <p:cNvGrpSpPr/>
         <p:nvPr/>
       </p:nvGrpSpPr>
@@ -10384,7 +13458,7 @@
       </p:grpSpPr>
       <p:sp>
         <p:nvSpPr>
-          <p:cNvPr id="2" name="Text 0"/>
+          <p:cNvPr id="3" name="Text 0"/>
           <p:cNvSpPr txBox="1"/>
           <p:nvPr/>
         </p:nvSpPr>
@@ -10423,7 +13497,7 @@
       </p:sp>
       <p:sp>
         <p:nvSpPr>
-          <p:cNvPr id="3" name="Shape 1"/>
+          <p:cNvPr id="4" name="Shape 1"/>
           <p:cNvSpPr/>
           <p:nvPr/>
         </p:nvSpPr>
@@ -10450,7 +13524,7 @@
       </p:sp>
       <p:pic>
         <p:nvPicPr>
-          <p:cNvPr id="4" name="Image 0" descr="Logo Unimore">    </p:cNvPr>
+          <p:cNvPr id="5" name="Image 0" descr="Logo Unimore">    </p:cNvPr>
           <p:cNvPicPr>
             <a:picLocks noChangeAspect="1"/>
           </p:cNvPicPr>
@@ -10474,7 +13548,7 @@
       </p:pic>
       <p:sp>
         <p:nvSpPr>
-          <p:cNvPr id="5" name="Text 2"/>
+          <p:cNvPr id="6" name="Text 2"/>
           <p:cNvSpPr/>
           <p:nvPr/>
         </p:nvSpPr>
@@ -10525,7 +13599,7 @@
       </p:sp>
       <p:sp>
         <p:nvSpPr>
-          <p:cNvPr id="6" name="Text 3"/>
+          <p:cNvPr id="7" name="Text 3"/>
           <p:cNvSpPr txBox="1"/>
           <p:nvPr/>
         </p:nvSpPr>
@@ -10578,7 +13652,7 @@
       </p:sp>
       <p:sp>
         <p:nvSpPr>
-          <p:cNvPr id="7" name="Shape 4"/>
+          <p:cNvPr id="8" name="Shape 4"/>
           <p:cNvSpPr/>
           <p:nvPr/>
         </p:nvSpPr>
@@ -10612,7 +13686,7 @@
       </p:sp>
       <p:sp>
         <p:nvSpPr>
-          <p:cNvPr id="8" name="Shape 5"/>
+          <p:cNvPr id="9" name="Shape 5"/>
           <p:cNvSpPr/>
           <p:nvPr/>
         </p:nvSpPr>
@@ -10639,7 +13713,7 @@
       </p:sp>
       <p:sp>
         <p:nvSpPr>
-          <p:cNvPr id="9" name="Text 6"/>
+          <p:cNvPr id="10" name="Text 6"/>
           <p:cNvSpPr txBox="1"/>
           <p:nvPr/>
         </p:nvSpPr>
@@ -11169,7 +14243,7 @@
         </p:nvSpPr>
         <p:spPr>
           <a:xfrm>
-            <a:off x="1234440" y="5074920"/>
+            <a:off x="1234440" y="5532120"/>
             <a:ext cx="9722815" cy="237744"/>
           </a:xfrm>
           <a:prstGeom prst="rect">
@@ -11208,7 +14282,7 @@
         </p:nvSpPr>
         <p:spPr>
           <a:xfrm>
-            <a:off x="1546708" y="5440680"/>
+            <a:off x="2715768" y="5852160"/>
             <a:ext cx="2103120" cy="457200"/>
           </a:xfrm>
           <a:prstGeom prst="roundRect">
@@ -11255,7 +14329,7 @@
         </p:nvSpPr>
         <p:spPr>
           <a:xfrm>
-            <a:off x="3878428" y="5440680"/>
+            <a:off x="5047488" y="5852160"/>
             <a:ext cx="2103120" cy="457200"/>
           </a:xfrm>
           <a:prstGeom prst="roundRect">
@@ -11296,13 +14370,13 @@
       </p:sp>
       <p:sp>
         <p:nvSpPr>
-          <p:cNvPr id="29" name="Text 25"/>
-          <p:cNvSpPr/>
-          <p:nvPr/>
-        </p:nvSpPr>
-        <p:spPr>
-          <a:xfrm>
-            <a:off x="6210148" y="5440680"/>
+          <p:cNvPr id="29" name="Text 26"/>
+          <p:cNvSpPr/>
+          <p:nvPr/>
+        </p:nvSpPr>
+        <p:spPr>
+          <a:xfrm>
+            <a:off x="7379208" y="5852160"/>
             <a:ext cx="2103120" cy="457200"/>
           </a:xfrm>
           <a:prstGeom prst="roundRect">
@@ -11335,7 +14409,7 @@
                 <a:ea typeface="Segoe UI Semibold" pitchFamily="34" charset="-122"/>
                 <a:cs typeface="Segoe UI Semibold" pitchFamily="34" charset="-120"/>
               </a:rPr>
-              <a:t>Cattura duplicata</a:t>
+              <a:t>Classi sbilanciate</a:t>
             </a:r>
             <a:endParaRPr lang="en-US" sz="1300" dirty="0"/>
           </a:p>
@@ -11343,48 +14417,484 @@
       </p:sp>
       <p:sp>
         <p:nvSpPr>
-          <p:cNvPr id="30" name="Text 26"/>
-          <p:cNvSpPr/>
-          <p:nvPr/>
-        </p:nvSpPr>
-        <p:spPr>
-          <a:xfrm>
-            <a:off x="8541868" y="5440680"/>
-            <a:ext cx="2103120" cy="457200"/>
-          </a:xfrm>
-          <a:prstGeom prst="roundRect">
-            <a:avLst>
-              <a:gd name="adj" fmla="val 50000"/>
-            </a:avLst>
-          </a:prstGeom>
-          <a:solidFill>
-            <a:srgbClr val="FFFFFF"/>
-          </a:solidFill>
-          <a:ln w="9525">
-            <a:solidFill>
-              <a:srgbClr val="D6E3EC"/>
-            </a:solidFill>
-          </a:ln>
-        </p:spPr>
-        <p:txBody>
-          <a:bodyPr wrap="square" lIns="0" tIns="0" rIns="0" bIns="0" rtlCol="0" anchor="ctr"/>
-          <a:lstStyle/>
-          <a:p>
-            <a:pPr algn="ctr" indent="0" marL="0">
-              <a:buNone/>
-            </a:pPr>
-            <a:r>
-              <a:rPr lang="en-US" sz="1300" dirty="0">
+          <p:cNvPr id="30" name="TextBox 30"/>
+          <p:cNvSpPr txBox="1"/>
+          <p:nvPr/>
+        </p:nvSpPr>
+        <p:spPr>
+          <a:xfrm>
+            <a:off x="1234440" y="4754880"/>
+            <a:ext cx="9692640" cy="237744"/>
+          </a:xfrm>
+          <a:prstGeom prst="rect">
+            <a:avLst/>
+          </a:prstGeom>
+          <a:noFill/>
+        </p:spPr>
+        <p:txBody>
+          <a:bodyPr wrap="square" lIns="0" rIns="0" tIns="0" bIns="0" anchor="t">
+            <a:spAutoFit/>
+          </a:bodyPr>
+          <a:lstStyle/>
+          <a:p>
+            <a:pPr algn="l"/>
+            <a:r>
+              <a:rPr sz="1050" b="0" i="0" spc="100">
+                <a:solidFill>
+                  <a:srgbClr val="4A6478"/>
+                </a:solidFill>
+                <a:latin typeface="Segoe UI Semibold"/>
+              </a:rPr>
+              <a:t>SOGLIA REGOLABILE · TEST SET</a:t>
+            </a:r>
+          </a:p>
+        </p:txBody>
+      </p:sp>
+      <p:sp>
+        <p:nvSpPr>
+          <p:cNvPr id="31" name="TextBox 31"/>
+          <p:cNvSpPr txBox="1"/>
+          <p:nvPr/>
+        </p:nvSpPr>
+        <p:spPr>
+          <a:xfrm>
+            <a:off x="1234440" y="5047488"/>
+            <a:ext cx="548640" cy="201168"/>
+          </a:xfrm>
+          <a:prstGeom prst="rect">
+            <a:avLst/>
+          </a:prstGeom>
+          <a:noFill/>
+        </p:spPr>
+        <p:txBody>
+          <a:bodyPr wrap="square" lIns="0" rIns="0" tIns="0" bIns="0" anchor="ctr">
+            <a:spAutoFit/>
+          </a:bodyPr>
+          <a:lstStyle/>
+          <a:p>
+            <a:pPr algn="r"/>
+            <a:r>
+              <a:rPr sz="1000" b="0" i="0">
                 <a:solidFill>
                   <a:srgbClr val="0B2438"/>
                 </a:solidFill>
-                <a:latin typeface="Segoe UI Semibold" pitchFamily="34" charset="0"/>
-                <a:ea typeface="Segoe UI Semibold" pitchFamily="34" charset="-122"/>
-                <a:cs typeface="Segoe UI Semibold" pitchFamily="34" charset="-120"/>
-              </a:rPr>
-              <a:t>Classi sbilanciate</a:t>
-            </a:r>
-            <a:endParaRPr lang="en-US" sz="1300" dirty="0"/>
+                <a:latin typeface="Segoe UI"/>
+              </a:rPr>
+              <a:t>p99</a:t>
+            </a:r>
+          </a:p>
+        </p:txBody>
+      </p:sp>
+      <p:sp>
+        <p:nvSpPr>
+          <p:cNvPr id="32" name="Rectangle 32"/>
+          <p:cNvSpPr/>
+          <p:nvPr/>
+        </p:nvSpPr>
+        <p:spPr>
+          <a:xfrm>
+            <a:off x="1874520" y="5084064"/>
+            <a:ext cx="2049170" cy="128016"/>
+          </a:xfrm>
+          <a:prstGeom prst="rect">
+            <a:avLst/>
+          </a:prstGeom>
+          <a:solidFill>
+            <a:srgbClr val="0C649C"/>
+          </a:solidFill>
+          <a:ln>
+            <a:noFill/>
+          </a:ln>
+          <a:effectLst/>
+        </p:spPr>
+        <p:style>
+          <a:lnRef idx="1">
+            <a:schemeClr val="accent1"/>
+          </a:lnRef>
+          <a:fillRef idx="3">
+            <a:schemeClr val="accent1"/>
+          </a:fillRef>
+          <a:effectRef idx="2">
+            <a:schemeClr val="accent1"/>
+          </a:effectRef>
+          <a:fontRef idx="minor">
+            <a:schemeClr val="lt1"/>
+          </a:fontRef>
+        </p:style>
+        <p:txBody>
+          <a:bodyPr rtlCol="0" anchor="ctr"/>
+          <a:lstStyle/>
+          <a:p/>
+        </p:txBody>
+      </p:sp>
+      <p:sp>
+        <p:nvSpPr>
+          <p:cNvPr id="33" name="TextBox 33"/>
+          <p:cNvSpPr txBox="1"/>
+          <p:nvPr/>
+        </p:nvSpPr>
+        <p:spPr>
+          <a:xfrm>
+            <a:off x="3996842" y="5047488"/>
+            <a:ext cx="1828800" cy="201168"/>
+          </a:xfrm>
+          <a:prstGeom prst="rect">
+            <a:avLst/>
+          </a:prstGeom>
+          <a:noFill/>
+        </p:spPr>
+        <p:txBody>
+          <a:bodyPr wrap="square" lIns="0" rIns="0" tIns="0" bIns="0" anchor="ctr">
+            <a:spAutoFit/>
+          </a:bodyPr>
+          <a:lstStyle/>
+          <a:p>
+            <a:pPr algn="l"/>
+            <a:r>
+              <a:rPr sz="1000" b="0" i="0">
+                <a:solidFill>
+                  <a:srgbClr val="4A6478"/>
+                </a:solidFill>
+                <a:latin typeface="Segoe UI"/>
+              </a:rPr>
+              <a:t>74,7% dei DoS riconosciuti</a:t>
+            </a:r>
+          </a:p>
+        </p:txBody>
+      </p:sp>
+      <p:sp>
+        <p:nvSpPr>
+          <p:cNvPr id="34" name="TextBox 34"/>
+          <p:cNvSpPr txBox="1"/>
+          <p:nvPr/>
+        </p:nvSpPr>
+        <p:spPr>
+          <a:xfrm>
+            <a:off x="1234440" y="5276088"/>
+            <a:ext cx="548640" cy="201168"/>
+          </a:xfrm>
+          <a:prstGeom prst="rect">
+            <a:avLst/>
+          </a:prstGeom>
+          <a:noFill/>
+        </p:spPr>
+        <p:txBody>
+          <a:bodyPr wrap="square" lIns="0" rIns="0" tIns="0" bIns="0" anchor="ctr">
+            <a:spAutoFit/>
+          </a:bodyPr>
+          <a:lstStyle/>
+          <a:p>
+            <a:pPr algn="r"/>
+            <a:r>
+              <a:rPr sz="1000" b="0" i="0">
+                <a:solidFill>
+                  <a:srgbClr val="0B2438"/>
+                </a:solidFill>
+                <a:latin typeface="Segoe UI"/>
+              </a:rPr>
+              <a:t>p99,9</a:t>
+            </a:r>
+          </a:p>
+        </p:txBody>
+      </p:sp>
+      <p:sp>
+        <p:nvSpPr>
+          <p:cNvPr id="35" name="Rectangle 35"/>
+          <p:cNvSpPr/>
+          <p:nvPr/>
+        </p:nvSpPr>
+        <p:spPr>
+          <a:xfrm>
+            <a:off x="1874520" y="5312664"/>
+            <a:ext cx="1300277" cy="128016"/>
+          </a:xfrm>
+          <a:prstGeom prst="rect">
+            <a:avLst/>
+          </a:prstGeom>
+          <a:solidFill>
+            <a:srgbClr val="0C649C"/>
+          </a:solidFill>
+          <a:ln>
+            <a:noFill/>
+          </a:ln>
+          <a:effectLst/>
+        </p:spPr>
+        <p:style>
+          <a:lnRef idx="1">
+            <a:schemeClr val="accent1"/>
+          </a:lnRef>
+          <a:fillRef idx="3">
+            <a:schemeClr val="accent1"/>
+          </a:fillRef>
+          <a:effectRef idx="2">
+            <a:schemeClr val="accent1"/>
+          </a:effectRef>
+          <a:fontRef idx="minor">
+            <a:schemeClr val="lt1"/>
+          </a:fontRef>
+        </p:style>
+        <p:txBody>
+          <a:bodyPr rtlCol="0" anchor="ctr"/>
+          <a:lstStyle/>
+          <a:p/>
+        </p:txBody>
+      </p:sp>
+      <p:sp>
+        <p:nvSpPr>
+          <p:cNvPr id="36" name="TextBox 36"/>
+          <p:cNvSpPr txBox="1"/>
+          <p:nvPr/>
+        </p:nvSpPr>
+        <p:spPr>
+          <a:xfrm>
+            <a:off x="3247949" y="5276088"/>
+            <a:ext cx="1828800" cy="201168"/>
+          </a:xfrm>
+          <a:prstGeom prst="rect">
+            <a:avLst/>
+          </a:prstGeom>
+          <a:noFill/>
+        </p:spPr>
+        <p:txBody>
+          <a:bodyPr wrap="square" lIns="0" rIns="0" tIns="0" bIns="0" anchor="ctr">
+            <a:spAutoFit/>
+          </a:bodyPr>
+          <a:lstStyle/>
+          <a:p>
+            <a:pPr algn="l"/>
+            <a:r>
+              <a:rPr sz="1000" b="0" i="0">
+                <a:solidFill>
+                  <a:srgbClr val="4A6478"/>
+                </a:solidFill>
+                <a:latin typeface="Segoe UI"/>
+              </a:rPr>
+              <a:t>47,4% dei DoS riconosciuti</a:t>
+            </a:r>
+          </a:p>
+        </p:txBody>
+      </p:sp>
+      <p:sp>
+        <p:nvSpPr>
+          <p:cNvPr id="37" name="TextBox 37"/>
+          <p:cNvSpPr txBox="1"/>
+          <p:nvPr/>
+        </p:nvSpPr>
+        <p:spPr>
+          <a:xfrm>
+            <a:off x="6373368" y="5047488"/>
+            <a:ext cx="548640" cy="201168"/>
+          </a:xfrm>
+          <a:prstGeom prst="rect">
+            <a:avLst/>
+          </a:prstGeom>
+          <a:noFill/>
+        </p:spPr>
+        <p:txBody>
+          <a:bodyPr wrap="square" lIns="0" rIns="0" tIns="0" bIns="0" anchor="ctr">
+            <a:spAutoFit/>
+          </a:bodyPr>
+          <a:lstStyle/>
+          <a:p>
+            <a:pPr algn="r"/>
+            <a:r>
+              <a:rPr sz="1000" b="0" i="0">
+                <a:solidFill>
+                  <a:srgbClr val="0B2438"/>
+                </a:solidFill>
+                <a:latin typeface="Segoe UI"/>
+              </a:rPr>
+              <a:t>p99</a:t>
+            </a:r>
+          </a:p>
+        </p:txBody>
+      </p:sp>
+      <p:sp>
+        <p:nvSpPr>
+          <p:cNvPr id="38" name="Rectangle 38"/>
+          <p:cNvSpPr/>
+          <p:nvPr/>
+        </p:nvSpPr>
+        <p:spPr>
+          <a:xfrm>
+            <a:off x="7013448" y="5084064"/>
+            <a:ext cx="2194560" cy="128016"/>
+          </a:xfrm>
+          <a:prstGeom prst="rect">
+            <a:avLst/>
+          </a:prstGeom>
+          <a:solidFill>
+            <a:srgbClr val="C98A3E"/>
+          </a:solidFill>
+          <a:ln>
+            <a:noFill/>
+          </a:ln>
+          <a:effectLst/>
+        </p:spPr>
+        <p:style>
+          <a:lnRef idx="1">
+            <a:schemeClr val="accent1"/>
+          </a:lnRef>
+          <a:fillRef idx="3">
+            <a:schemeClr val="accent1"/>
+          </a:fillRef>
+          <a:effectRef idx="2">
+            <a:schemeClr val="accent1"/>
+          </a:effectRef>
+          <a:fontRef idx="minor">
+            <a:schemeClr val="lt1"/>
+          </a:fontRef>
+        </p:style>
+        <p:txBody>
+          <a:bodyPr rtlCol="0" anchor="ctr"/>
+          <a:lstStyle/>
+          <a:p/>
+        </p:txBody>
+      </p:sp>
+      <p:sp>
+        <p:nvSpPr>
+          <p:cNvPr id="39" name="TextBox 39"/>
+          <p:cNvSpPr txBox="1"/>
+          <p:nvPr/>
+        </p:nvSpPr>
+        <p:spPr>
+          <a:xfrm>
+            <a:off x="9281160" y="5047488"/>
+            <a:ext cx="1828800" cy="201168"/>
+          </a:xfrm>
+          <a:prstGeom prst="rect">
+            <a:avLst/>
+          </a:prstGeom>
+          <a:noFill/>
+        </p:spPr>
+        <p:txBody>
+          <a:bodyPr wrap="square" lIns="0" rIns="0" tIns="0" bIns="0" anchor="ctr">
+            <a:spAutoFit/>
+          </a:bodyPr>
+          <a:lstStyle/>
+          <a:p>
+            <a:pPr algn="l"/>
+            <a:r>
+              <a:rPr sz="1000" b="0" i="0">
+                <a:solidFill>
+                  <a:srgbClr val="4A6478"/>
+                </a:solidFill>
+                <a:latin typeface="Segoe UI"/>
+              </a:rPr>
+              <a:t>3.944 falsi allarmi extra</a:t>
+            </a:r>
+          </a:p>
+        </p:txBody>
+      </p:sp>
+      <p:sp>
+        <p:nvSpPr>
+          <p:cNvPr id="40" name="TextBox 40"/>
+          <p:cNvSpPr txBox="1"/>
+          <p:nvPr/>
+        </p:nvSpPr>
+        <p:spPr>
+          <a:xfrm>
+            <a:off x="6373368" y="5276088"/>
+            <a:ext cx="548640" cy="201168"/>
+          </a:xfrm>
+          <a:prstGeom prst="rect">
+            <a:avLst/>
+          </a:prstGeom>
+          <a:noFill/>
+        </p:spPr>
+        <p:txBody>
+          <a:bodyPr wrap="square" lIns="0" rIns="0" tIns="0" bIns="0" anchor="ctr">
+            <a:spAutoFit/>
+          </a:bodyPr>
+          <a:lstStyle/>
+          <a:p>
+            <a:pPr algn="r"/>
+            <a:r>
+              <a:rPr sz="1000" b="0" i="0">
+                <a:solidFill>
+                  <a:srgbClr val="0B2438"/>
+                </a:solidFill>
+                <a:latin typeface="Segoe UI"/>
+              </a:rPr>
+              <a:t>p99,9</a:t>
+            </a:r>
+          </a:p>
+        </p:txBody>
+      </p:sp>
+      <p:sp>
+        <p:nvSpPr>
+          <p:cNvPr id="41" name="Rectangle 41"/>
+          <p:cNvSpPr/>
+          <p:nvPr/>
+        </p:nvSpPr>
+        <p:spPr>
+          <a:xfrm>
+            <a:off x="7013448" y="5312664"/>
+            <a:ext cx="218677" cy="128016"/>
+          </a:xfrm>
+          <a:prstGeom prst="rect">
+            <a:avLst/>
+          </a:prstGeom>
+          <a:solidFill>
+            <a:srgbClr val="C98A3E"/>
+          </a:solidFill>
+          <a:ln>
+            <a:noFill/>
+          </a:ln>
+          <a:effectLst/>
+        </p:spPr>
+        <p:style>
+          <a:lnRef idx="1">
+            <a:schemeClr val="accent1"/>
+          </a:lnRef>
+          <a:fillRef idx="3">
+            <a:schemeClr val="accent1"/>
+          </a:fillRef>
+          <a:effectRef idx="2">
+            <a:schemeClr val="accent1"/>
+          </a:effectRef>
+          <a:fontRef idx="minor">
+            <a:schemeClr val="lt1"/>
+          </a:fontRef>
+        </p:style>
+        <p:txBody>
+          <a:bodyPr rtlCol="0" anchor="ctr"/>
+          <a:lstStyle/>
+          <a:p/>
+        </p:txBody>
+      </p:sp>
+      <p:sp>
+        <p:nvSpPr>
+          <p:cNvPr id="42" name="TextBox 42"/>
+          <p:cNvSpPr txBox="1"/>
+          <p:nvPr/>
+        </p:nvSpPr>
+        <p:spPr>
+          <a:xfrm>
+            <a:off x="7305277" y="5276088"/>
+            <a:ext cx="1828800" cy="201168"/>
+          </a:xfrm>
+          <a:prstGeom prst="rect">
+            <a:avLst/>
+          </a:prstGeom>
+          <a:noFill/>
+        </p:spPr>
+        <p:txBody>
+          <a:bodyPr wrap="square" lIns="0" rIns="0" tIns="0" bIns="0" anchor="ctr">
+            <a:spAutoFit/>
+          </a:bodyPr>
+          <a:lstStyle/>
+          <a:p>
+            <a:pPr algn="l"/>
+            <a:r>
+              <a:rPr sz="1000" b="0" i="0">
+                <a:solidFill>
+                  <a:srgbClr val="4A6478"/>
+                </a:solidFill>
+                <a:latin typeface="Segoe UI"/>
+              </a:rPr>
+              <a:t>393 falsi allarmi extra</a:t>
+            </a:r>
           </a:p>
         </p:txBody>
       </p:sp>
@@ -11415,7 +14925,7 @@
     </p:bg>
     <p:spTree>
       <p:nvGrpSpPr>
-        <p:cNvPr id="1" name=""/>
+        <p:cNvPr id="2" name=""/>
         <p:cNvGrpSpPr/>
         <p:nvPr/>
       </p:nvGrpSpPr>
@@ -11429,7 +14939,7 @@
       </p:grpSpPr>
       <p:sp>
         <p:nvSpPr>
-          <p:cNvPr id="2" name="Text 0"/>
+          <p:cNvPr id="3" name="Text 0"/>
           <p:cNvSpPr txBox="1"/>
           <p:nvPr/>
         </p:nvSpPr>
@@ -11468,7 +14978,7 @@
       </p:sp>
       <p:sp>
         <p:nvSpPr>
-          <p:cNvPr id="3" name="Shape 1"/>
+          <p:cNvPr id="4" name="Shape 1"/>
           <p:cNvSpPr/>
           <p:nvPr/>
         </p:nvSpPr>
@@ -11495,7 +15005,7 @@
       </p:sp>
       <p:pic>
         <p:nvPicPr>
-          <p:cNvPr id="4" name="Image 0" descr="Logo Unimore">    </p:cNvPr>
+          <p:cNvPr id="5" name="Image 0" descr="Logo Unimore">    </p:cNvPr>
           <p:cNvPicPr>
             <a:picLocks noChangeAspect="1"/>
           </p:cNvPicPr>
@@ -11519,7 +15029,7 @@
       </p:pic>
       <p:sp>
         <p:nvSpPr>
-          <p:cNvPr id="5" name="Text 2"/>
+          <p:cNvPr id="6" name="Text 2"/>
           <p:cNvSpPr/>
           <p:nvPr/>
         </p:nvSpPr>
@@ -11570,7 +15080,7 @@
       </p:sp>
       <p:sp>
         <p:nvSpPr>
-          <p:cNvPr id="6" name="Text 3"/>
+          <p:cNvPr id="7" name="Text 3"/>
           <p:cNvSpPr txBox="1"/>
           <p:nvPr/>
         </p:nvSpPr>
@@ -11623,7 +15133,7 @@
       </p:sp>
       <p:sp>
         <p:nvSpPr>
-          <p:cNvPr id="7" name="Shape 4"/>
+          <p:cNvPr id="8" name="Shape 4"/>
           <p:cNvSpPr/>
           <p:nvPr/>
         </p:nvSpPr>
@@ -11657,7 +15167,7 @@
       </p:sp>
       <p:sp>
         <p:nvSpPr>
-          <p:cNvPr id="8" name="Shape 5"/>
+          <p:cNvPr id="9" name="Shape 5"/>
           <p:cNvSpPr/>
           <p:nvPr/>
         </p:nvSpPr>
@@ -11684,7 +15194,7 @@
       </p:sp>
       <p:sp>
         <p:nvSpPr>
-          <p:cNvPr id="9" name="Text 6"/>
+          <p:cNvPr id="10" name="Text 6"/>
           <p:cNvSpPr txBox="1"/>
           <p:nvPr/>
         </p:nvSpPr>
@@ -12879,84 +16389,6 @@
               <a:t>CrowdStrike · SentinelOne · Defender</a:t>
             </a:r>
             <a:endParaRPr lang="en-US" sz="1300" dirty="0"/>
-          </a:p>
-        </p:txBody>
-      </p:sp>
-      <p:sp>
-        <p:nvSpPr>
-          <p:cNvPr id="47" name="Text 43"/>
-          <p:cNvSpPr txBox="1"/>
-          <p:nvPr/>
-        </p:nvSpPr>
-        <p:spPr>
-          <a:xfrm>
-            <a:off x="1234440" y="5669280"/>
-            <a:ext cx="9722815" cy="237744"/>
-          </a:xfrm>
-          <a:prstGeom prst="rect">
-            <a:avLst/>
-          </a:prstGeom>
-          <a:noFill/>
-          <a:ln/>
-        </p:spPr>
-        <p:txBody>
-          <a:bodyPr wrap="square" lIns="0" tIns="0" rIns="0" bIns="0" rtlCol="0" anchor="t"/>
-          <a:lstStyle/>
-          <a:p>
-            <a:pPr algn="ctr" indent="0" marL="0">
-              <a:buNone/>
-            </a:pPr>
-            <a:r>
-              <a:rPr lang="en-US" sz="1050" spc="150" kern="0" dirty="0">
-                <a:solidFill>
-                  <a:srgbClr val="0C649C"/>
-                </a:solidFill>
-                <a:latin typeface="Segoe UI Semibold" pitchFamily="34" charset="0"/>
-                <a:ea typeface="Segoe UI Semibold" pitchFamily="34" charset="-122"/>
-                <a:cs typeface="Segoe UI Semibold" pitchFamily="34" charset="-120"/>
-              </a:rPr>
-              <a:t>SIMULAZIONE DOCKER</a:t>
-            </a:r>
-            <a:endParaRPr lang="en-US" sz="1050" dirty="0"/>
-          </a:p>
-        </p:txBody>
-      </p:sp>
-      <p:sp>
-        <p:nvSpPr>
-          <p:cNvPr id="48" name="Text 44"/>
-          <p:cNvSpPr txBox="1"/>
-          <p:nvPr/>
-        </p:nvSpPr>
-        <p:spPr>
-          <a:xfrm>
-            <a:off x="1234440" y="5916168"/>
-            <a:ext cx="9722815" cy="365760"/>
-          </a:xfrm>
-          <a:prstGeom prst="rect">
-            <a:avLst/>
-          </a:prstGeom>
-          <a:noFill/>
-          <a:ln/>
-        </p:spPr>
-        <p:txBody>
-          <a:bodyPr wrap="square" lIns="0" tIns="0" rIns="0" bIns="0" rtlCol="0" anchor="t"/>
-          <a:lstStyle/>
-          <a:p>
-            <a:pPr algn="ctr" indent="0" marL="0">
-              <a:buNone/>
-            </a:pPr>
-            <a:r>
-              <a:rPr lang="en-US" sz="1600" i="1" dirty="0">
-                <a:solidFill>
-                  <a:srgbClr val="0B2438"/>
-                </a:solidFill>
-                <a:latin typeface="Georgia" pitchFamily="34" charset="0"/>
-                <a:ea typeface="Georgia" pitchFamily="34" charset="-122"/>
-                <a:cs typeface="Georgia" pitchFamily="34" charset="-120"/>
-              </a:rPr>
-              <a:t>31 container, 39.781 flussi, 28 episodi — banco di prova, non traffico reale</a:t>
-            </a:r>
-            <a:endParaRPr lang="en-US" sz="1600" dirty="0"/>
           </a:p>
         </p:txBody>
       </p:sp>
@@ -12987,7 +16419,7 @@
     </p:bg>
     <p:spTree>
       <p:nvGrpSpPr>
-        <p:cNvPr id="1" name=""/>
+        <p:cNvPr id="2" name=""/>
         <p:cNvGrpSpPr/>
         <p:nvPr/>
       </p:nvGrpSpPr>
@@ -13001,7 +16433,7 @@
       </p:grpSpPr>
       <p:sp>
         <p:nvSpPr>
-          <p:cNvPr id="2" name="Text 0"/>
+          <p:cNvPr id="3" name="Text 0"/>
           <p:cNvSpPr txBox="1"/>
           <p:nvPr/>
         </p:nvSpPr>
@@ -13040,7 +16472,7 @@
       </p:sp>
       <p:sp>
         <p:nvSpPr>
-          <p:cNvPr id="3" name="Shape 1"/>
+          <p:cNvPr id="4" name="Shape 1"/>
           <p:cNvSpPr/>
           <p:nvPr/>
         </p:nvSpPr>
@@ -13067,7 +16499,7 @@
       </p:sp>
       <p:pic>
         <p:nvPicPr>
-          <p:cNvPr id="4" name="Image 0" descr="Logo Unimore">    </p:cNvPr>
+          <p:cNvPr id="5" name="Image 0" descr="Logo Unimore">    </p:cNvPr>
           <p:cNvPicPr>
             <a:picLocks noChangeAspect="1"/>
           </p:cNvPicPr>
@@ -13091,7 +16523,7 @@
       </p:pic>
       <p:sp>
         <p:nvSpPr>
-          <p:cNvPr id="5" name="Text 2"/>
+          <p:cNvPr id="6" name="Text 2"/>
           <p:cNvSpPr/>
           <p:nvPr/>
         </p:nvSpPr>
@@ -13142,7 +16574,7 @@
       </p:sp>
       <p:sp>
         <p:nvSpPr>
-          <p:cNvPr id="6" name="Text 3"/>
+          <p:cNvPr id="7" name="Text 3"/>
           <p:cNvSpPr txBox="1"/>
           <p:nvPr/>
         </p:nvSpPr>
@@ -13493,7 +16925,7 @@
         <p:spPr>
           <a:xfrm>
             <a:off x="822960" y="3675888"/>
-            <a:ext cx="10545775" cy="320040"/>
+            <a:ext cx="10545775" cy="640080"/>
           </a:xfrm>
           <a:prstGeom prst="rect">
             <a:avLst/>
@@ -13518,6 +16950,23 @@
                 <a:cs typeface="Segoe UI" pitchFamily="34" charset="-120"/>
               </a:rPr>
               <a:t>Trasferimento tra reti · un flusso alla volta (niente pattern nel tempo) · solo livello di rete</a:t>
+            </a:r>
+            <a:endParaRPr lang="en-US" sz="1400" dirty="0"/>
+          </a:p>
+          <a:p>
+            <a:pPr algn="ctr" indent="0" marL="0">
+              <a:buNone/>
+            </a:pPr>
+            <a:r>
+              <a:rPr lang="en-US" sz="1200" dirty="0">
+                <a:solidFill>
+                  <a:srgbClr val="FFFFFF"/>
+                </a:solidFill>
+                <a:latin typeface="Segoe UI" pitchFamily="34" charset="0"/>
+                <a:ea typeface="Segoe UI" pitchFamily="34" charset="-122"/>
+                <a:cs typeface="Segoe UI" pitchFamily="34" charset="-120"/>
+              </a:rPr>
+              <a:t>Split casuale: numeri in-dominio ottimistici · stime affidabili solo sui DoS (Infiltration 7 casi, Heartbleed 1)</a:t>
             </a:r>
             <a:endParaRPr lang="en-US" sz="1400" dirty="0"/>
           </a:p>
@@ -13606,6 +17055,41 @@
               <a:t>Grazie — domande? →</a:t>
             </a:r>
             <a:endParaRPr lang="en-US" sz="1300" dirty="0"/>
+          </a:p>
+        </p:txBody>
+      </p:sp>
+      <p:sp>
+        <p:nvSpPr>
+          <p:cNvPr id="18" name="TextBox 17"/>
+          <p:cNvSpPr txBox="1"/>
+          <p:nvPr/>
+        </p:nvSpPr>
+        <p:spPr>
+          <a:xfrm>
+            <a:off x="822960" y="5422392"/>
+            <a:ext cx="10543032" cy="274320"/>
+          </a:xfrm>
+          <a:prstGeom prst="rect">
+            <a:avLst/>
+          </a:prstGeom>
+          <a:noFill/>
+        </p:spPr>
+        <p:txBody>
+          <a:bodyPr wrap="square" lIns="0" rIns="0" tIns="0" bIns="0" anchor="ctr">
+            <a:spAutoFit/>
+          </a:bodyPr>
+          <a:lstStyle/>
+          <a:p>
+            <a:pPr algn="ctr"/>
+            <a:r>
+              <a:rPr sz="1200" b="0" i="0">
+                <a:solidFill>
+                  <a:srgbClr val="BCD1DE"/>
+                </a:solidFill>
+                <a:latin typeface="Segoe UI"/>
+              </a:rPr>
+              <a:t>Sviluppo futuro: affiancare un EDR (agente sull’host: processi, utenti, payload decifrato)</a:t>
+            </a:r>
           </a:p>
         </p:txBody>
       </p:sp>

--- a/slides/presentazione_design_origin_v2.pptx
+++ b/slides/presentazione_design_origin_v2.pptx
@@ -3783,7 +3783,7 @@
         <p:spPr>
           <a:xfrm>
             <a:off x="1234440" y="3291840"/>
-            <a:ext cx="5486400" cy="237744"/>
+            <a:ext cx="9692640" cy="237744"/>
           </a:xfrm>
           <a:prstGeom prst="rect">
             <a:avLst/>
@@ -3807,7 +3807,7 @@
                 <a:ea typeface="Segoe UI Semibold" pitchFamily="34" charset="-122"/>
                 <a:cs typeface="Segoe UI Semibold" pitchFamily="34" charset="-120"/>
               </a:rPr>
-              <a:t>FLUSSI PER FAMIGLIA · SCALA LOGARITMICA</a:t>
+              <a:t>FLUSSI PER FAMIGLIA, PRIMA DELLA PULIZIA · LUNGHEZZA IN SCALA LOG</a:t>
             </a:r>
             <a:endParaRPr lang="en-US" sz="1050" dirty="0"/>
           </a:p>
@@ -4002,7 +4002,7 @@
                 <a:ea typeface="Georgia" pitchFamily="34" charset="-122"/>
                 <a:cs typeface="Georgia" pitchFamily="34" charset="-120"/>
               </a:rPr>
-              <a:t>2.143 + 2.843</a:t>
+              <a:t>2.843</a:t>
             </a:r>
             <a:endParaRPr lang="en-US" sz="3400" dirty="0"/>
           </a:p>
@@ -4041,7 +4041,7 @@
                 <a:ea typeface="Segoe UI" pitchFamily="34" charset="-122"/>
                 <a:cs typeface="Segoe UI" pitchFamily="34" charset="-120"/>
               </a:rPr>
-              <a:t>etichette corrette + righe rimosse</a:t>
+              <a:t>righe rimosse · 2.143 etichette corrette</a:t>
             </a:r>
             <a:endParaRPr lang="en-US" sz="1200" dirty="0"/>
           </a:p>
@@ -9948,7 +9948,7 @@
                 <a:ea typeface="Segoe UI Semibold" pitchFamily="34" charset="-122"/>
                 <a:cs typeface="Segoe UI Semibold" pitchFamily="34" charset="-120"/>
               </a:rPr>
-              <a:t>ERRORE DI RICOSTRUZIONE · AUTOENCODER SOLO SU BENIGN</a:t>
+              <a:t>ERRORE DI RICOSTRUZIONE (VALIDATION, UN AUTOENCODER)</a:t>
             </a:r>
             <a:endParaRPr lang="en-US" sz="1050" dirty="0"/>
           </a:p>
@@ -14445,7 +14445,7 @@
                 </a:solidFill>
                 <a:latin typeface="Segoe UI Semibold"/>
               </a:rPr>
-              <a:t>SOGLIA REGOLABILE · TEST SET</a:t>
+              <a:t>SOGLIA REGOLABILE · TEST SET, MEDIA DI 5 SEED</a:t>
             </a:r>
           </a:p>
         </p:txBody>
@@ -14494,7 +14494,7 @@
         <p:spPr>
           <a:xfrm>
             <a:off x="1874520" y="5084064"/>
-            <a:ext cx="2049170" cy="128016"/>
+            <a:ext cx="2032711" cy="128016"/>
           </a:xfrm>
           <a:prstGeom prst="rect">
             <a:avLst/>
@@ -14535,7 +14535,7 @@
         </p:nvSpPr>
         <p:spPr>
           <a:xfrm>
-            <a:off x="3996842" y="5047488"/>
+            <a:off x="3980383" y="5047488"/>
             <a:ext cx="1828800" cy="201168"/>
           </a:xfrm>
           <a:prstGeom prst="rect">
@@ -14557,7 +14557,7 @@
                 </a:solidFill>
                 <a:latin typeface="Segoe UI"/>
               </a:rPr>
-              <a:t>74,7% dei DoS riconosciuti</a:t>
+              <a:t>74,1% dei DoS riconosciuti</a:t>
             </a:r>
           </a:p>
         </p:txBody>
@@ -14606,7 +14606,7 @@
         <p:spPr>
           <a:xfrm>
             <a:off x="1874520" y="5312664"/>
-            <a:ext cx="1300277" cy="128016"/>
+            <a:ext cx="1207008" cy="128016"/>
           </a:xfrm>
           <a:prstGeom prst="rect">
             <a:avLst/>
@@ -14647,7 +14647,7 @@
         </p:nvSpPr>
         <p:spPr>
           <a:xfrm>
-            <a:off x="3247949" y="5276088"/>
+            <a:off x="3154680" y="5276088"/>
             <a:ext cx="1828800" cy="201168"/>
           </a:xfrm>
           <a:prstGeom prst="rect">
@@ -14669,7 +14669,7 @@
                 </a:solidFill>
                 <a:latin typeface="Segoe UI"/>
               </a:rPr>
-              <a:t>47,4% dei DoS riconosciuti</a:t>
+              <a:t>44,0% dei DoS riconosciuti</a:t>
             </a:r>
           </a:p>
         </p:txBody>
@@ -14781,7 +14781,7 @@
                 </a:solidFill>
                 <a:latin typeface="Segoe UI"/>
               </a:rPr>
-              <a:t>3.944 falsi allarmi extra</a:t>
+              <a:t>0,99% di falsi allarmi extra</a:t>
             </a:r>
           </a:p>
         </p:txBody>
@@ -14830,7 +14830,7 @@
         <p:spPr>
           <a:xfrm>
             <a:off x="7013448" y="5312664"/>
-            <a:ext cx="218677" cy="128016"/>
+            <a:ext cx="221672" cy="128016"/>
           </a:xfrm>
           <a:prstGeom prst="rect">
             <a:avLst/>
@@ -14871,7 +14871,7 @@
         </p:nvSpPr>
         <p:spPr>
           <a:xfrm>
-            <a:off x="7305277" y="5276088"/>
+            <a:off x="7308272" y="5276088"/>
             <a:ext cx="1828800" cy="201168"/>
           </a:xfrm>
           <a:prstGeom prst="rect">
@@ -14893,7 +14893,7 @@
                 </a:solidFill>
                 <a:latin typeface="Segoe UI"/>
               </a:rPr>
-              <a:t>393 falsi allarmi extra</a:t>
+              <a:t>0,10% di falsi allarmi extra</a:t>
             </a:r>
           </a:p>
         </p:txBody>

--- a/slides/presentazione_design_origin_v2.pptx
+++ b/slides/presentazione_design_origin_v2.pptx
@@ -14445,7 +14445,7 @@
                 </a:solidFill>
                 <a:latin typeface="Segoe UI Semibold"/>
               </a:rPr>
-              <a:t>SOGLIA REGOLABILE · TEST SET, MEDIA DI 5 SEED</a:t>
+              <a:t>SOGLIA REGOLABILE · TEST SET</a:t>
             </a:r>
           </a:p>
         </p:txBody>
@@ -14494,7 +14494,7 @@
         <p:spPr>
           <a:xfrm>
             <a:off x="1874520" y="5084064"/>
-            <a:ext cx="2032711" cy="128016"/>
+            <a:ext cx="2049170" cy="128016"/>
           </a:xfrm>
           <a:prstGeom prst="rect">
             <a:avLst/>
@@ -14535,7 +14535,7 @@
         </p:nvSpPr>
         <p:spPr>
           <a:xfrm>
-            <a:off x="3980383" y="5047488"/>
+            <a:off x="3996842" y="5047488"/>
             <a:ext cx="1828800" cy="201168"/>
           </a:xfrm>
           <a:prstGeom prst="rect">
@@ -14557,7 +14557,7 @@
                 </a:solidFill>
                 <a:latin typeface="Segoe UI"/>
               </a:rPr>
-              <a:t>74,1% dei DoS riconosciuti</a:t>
+              <a:t>74,7% dei DoS riconosciuti</a:t>
             </a:r>
           </a:p>
         </p:txBody>
@@ -14606,7 +14606,7 @@
         <p:spPr>
           <a:xfrm>
             <a:off x="1874520" y="5312664"/>
-            <a:ext cx="1207008" cy="128016"/>
+            <a:ext cx="1300276" cy="128016"/>
           </a:xfrm>
           <a:prstGeom prst="rect">
             <a:avLst/>
@@ -14647,7 +14647,7 @@
         </p:nvSpPr>
         <p:spPr>
           <a:xfrm>
-            <a:off x="3154680" y="5276088"/>
+            <a:off x="3247948" y="5276088"/>
             <a:ext cx="1828800" cy="201168"/>
           </a:xfrm>
           <a:prstGeom prst="rect">
@@ -14669,7 +14669,7 @@
                 </a:solidFill>
                 <a:latin typeface="Segoe UI"/>
               </a:rPr>
-              <a:t>44,0% dei DoS riconosciuti</a:t>
+              <a:t>47,4% dei DoS riconosciuti</a:t>
             </a:r>
           </a:p>
         </p:txBody>
@@ -14781,7 +14781,7 @@
                 </a:solidFill>
                 <a:latin typeface="Segoe UI"/>
               </a:rPr>
-              <a:t>0,99% di falsi allarmi extra</a:t>
+              <a:t>3.944 falsi allarmi extra</a:t>
             </a:r>
           </a:p>
         </p:txBody>
@@ -14830,7 +14830,7 @@
         <p:spPr>
           <a:xfrm>
             <a:off x="7013448" y="5312664"/>
-            <a:ext cx="221672" cy="128016"/>
+            <a:ext cx="218676" cy="128016"/>
           </a:xfrm>
           <a:prstGeom prst="rect">
             <a:avLst/>
@@ -14871,7 +14871,7 @@
         </p:nvSpPr>
         <p:spPr>
           <a:xfrm>
-            <a:off x="7308272" y="5276088"/>
+            <a:off x="7305276" y="5276088"/>
             <a:ext cx="1828800" cy="201168"/>
           </a:xfrm>
           <a:prstGeom prst="rect">
@@ -14893,7 +14893,7 @@
                 </a:solidFill>
                 <a:latin typeface="Segoe UI"/>
               </a:rPr>
-              <a:t>0,10% di falsi allarmi extra</a:t>
+              <a:t>393 falsi allarmi extra</a:t>
             </a:r>
           </a:p>
         </p:txBody>

--- a/slides/presentazione_design_origin_v2.pptx
+++ b/slides/presentazione_design_origin_v2.pptx
@@ -16496,6 +16496,10 @@
             <a:prstDash val="solid"/>
           </a:ln>
         </p:spPr>
+        <p:txBody>
+          <a:bodyPr/>
+          <a:p/>
+        </p:txBody>
       </p:sp>
       <p:pic>
         <p:nvPicPr>
@@ -16733,6 +16737,10 @@
             <a:prstDash val="solid"/>
           </a:ln>
         </p:spPr>
+        <p:txBody>
+          <a:bodyPr/>
+          <a:p/>
+        </p:txBody>
       </p:sp>
       <p:sp>
         <p:nvSpPr>
@@ -16820,6 +16828,10 @@
             <a:prstDash val="solid"/>
           </a:ln>
         </p:spPr>
+        <p:txBody>
+          <a:bodyPr/>
+          <a:p/>
+        </p:txBody>
       </p:sp>
       <p:sp>
         <p:nvSpPr>
@@ -17052,7 +17064,7 @@
                 <a:ea typeface="Segoe UI Semibold" pitchFamily="34" charset="-122"/>
                 <a:cs typeface="Segoe UI Semibold" pitchFamily="34" charset="-120"/>
               </a:rPr>
-              <a:t>Grazie — domande? →</a:t>
+              <a:t>Grazie per l'attenzione</a:t>
             </a:r>
             <a:endParaRPr lang="en-US" sz="1300" dirty="0"/>
           </a:p>
